--- a/Trie_Search_Engine_DSA_6Slides.pptx
+++ b/Trie_Search_Engine_DSA_6Slides.pptx
@@ -3093,12 +3093,20 @@
         <p:nvPr/>
       </p:nvGrpSpPr>
       <p:grpSpPr/>
-      <p:sp>
-        <p:nvSpPr>
-          <p:cNvPr id="2" name="Rectangle 1"/>
-          <p:cNvSpPr/>
-          <p:nvPr/>
-        </p:nvSpPr>
+      <p:pic>
+        <p:nvPicPr>
+          <p:cNvPr id="2" name="Picture 1" descr="acedevs_hud_bg.png"/>
+          <p:cNvPicPr>
+            <a:picLocks noChangeAspect="1"/>
+          </p:cNvPicPr>
+          <p:nvPr/>
+        </p:nvPicPr>
+        <p:blipFill>
+          <a:blip r:embed="rId2"/>
+          <a:stretch>
+            <a:fillRect/>
+          </a:stretch>
+        </p:blipFill>
         <p:spPr>
           <a:xfrm>
             <a:off x="0" y="0"/>
@@ -3107,8 +3115,175 @@
           <a:prstGeom prst="rect">
             <a:avLst/>
           </a:prstGeom>
+        </p:spPr>
+      </p:pic>
+      <p:sp>
+        <p:nvSpPr>
+          <p:cNvPr id="3" name="TextBox 2"/>
+          <p:cNvSpPr txBox="1"/>
+          <p:nvPr/>
+        </p:nvSpPr>
+        <p:spPr>
+          <a:xfrm>
+            <a:off x="594360" y="256032"/>
+            <a:ext cx="2286000" cy="365760"/>
+          </a:xfrm>
+          <a:prstGeom prst="rect">
+            <a:avLst/>
+          </a:prstGeom>
+          <a:noFill/>
+        </p:spPr>
+        <p:txBody>
+          <a:bodyPr wrap="none">
+            <a:spAutoFit/>
+          </a:bodyPr>
+          <a:lstStyle/>
+          <a:p>
+            <a:r>
+              <a:rPr sz="1300" b="1">
+                <a:solidFill>
+                  <a:srgbClr val="8FADFF"/>
+                </a:solidFill>
+                <a:latin typeface="Trebuchet MS"/>
+              </a:rPr>
+              <a:t>▲ </a:t>
+            </a:r>
+            <a:r>
+              <a:rPr sz="1300" b="1">
+                <a:solidFill>
+                  <a:srgbClr val="FFFFFF"/>
+                </a:solidFill>
+                <a:latin typeface="Trebuchet MS"/>
+              </a:rPr>
+              <a:t>ACEDEVS</a:t>
+            </a:r>
+          </a:p>
+        </p:txBody>
+      </p:sp>
+      <p:sp>
+        <p:nvSpPr>
+          <p:cNvPr id="4" name="TextBox 3"/>
+          <p:cNvSpPr txBox="1"/>
+          <p:nvPr/>
+        </p:nvSpPr>
+        <p:spPr>
+          <a:xfrm>
+            <a:off x="3017520" y="256032"/>
+            <a:ext cx="5486400" cy="365760"/>
+          </a:xfrm>
+          <a:prstGeom prst="rect">
+            <a:avLst/>
+          </a:prstGeom>
+          <a:noFill/>
+        </p:spPr>
+        <p:txBody>
+          <a:bodyPr wrap="none">
+            <a:spAutoFit/>
+          </a:bodyPr>
+          <a:lstStyle/>
+          <a:p>
+            <a:pPr>
+              <a:defRPr sz="900">
+                <a:solidFill>
+                  <a:srgbClr val="94A3B8"/>
+                </a:solidFill>
+                <a:latin typeface="Consolas"/>
+              </a:defRPr>
+            </a:pPr>
+            <a:r>
+              <a:t>SHOWCASE [02]    TEAM [02]    REPOSITORIES [04]    BLOG [05]</a:t>
+            </a:r>
+          </a:p>
+        </p:txBody>
+      </p:sp>
+      <p:sp>
+        <p:nvSpPr>
+          <p:cNvPr id="5" name="TextBox 4"/>
+          <p:cNvSpPr txBox="1"/>
+          <p:nvPr/>
+        </p:nvSpPr>
+        <p:spPr>
+          <a:xfrm>
+            <a:off x="8595360" y="256032"/>
+            <a:ext cx="3017520" cy="365760"/>
+          </a:xfrm>
+          <a:prstGeom prst="rect">
+            <a:avLst/>
+          </a:prstGeom>
+          <a:noFill/>
+        </p:spPr>
+        <p:txBody>
+          <a:bodyPr wrap="none">
+            <a:spAutoFit/>
+          </a:bodyPr>
+          <a:lstStyle/>
+          <a:p>
+            <a:pPr algn="r">
+              <a:defRPr sz="900" b="1">
+                <a:solidFill>
+                  <a:srgbClr val="D5E0FF"/>
+                </a:solidFill>
+                <a:latin typeface="Consolas"/>
+              </a:defRPr>
+            </a:pPr>
+            <a:r>
+              <a:t>SEARCH [⌘K]    SLIDE [01/06]</a:t>
+            </a:r>
+          </a:p>
+        </p:txBody>
+      </p:sp>
+      <p:sp>
+        <p:nvSpPr>
+          <p:cNvPr id="6" name="TextBox 5"/>
+          <p:cNvSpPr txBox="1"/>
+          <p:nvPr/>
+        </p:nvSpPr>
+        <p:spPr>
+          <a:xfrm>
+            <a:off x="594360" y="658368"/>
+            <a:ext cx="10972800" cy="274320"/>
+          </a:xfrm>
+          <a:prstGeom prst="rect">
+            <a:avLst/>
+          </a:prstGeom>
+          <a:noFill/>
+        </p:spPr>
+        <p:txBody>
+          <a:bodyPr wrap="none">
+            <a:spAutoFit/>
+          </a:bodyPr>
+          <a:lstStyle/>
+          <a:p>
+            <a:pPr algn="ctr">
+              <a:defRPr sz="850">
+                <a:solidFill>
+                  <a:srgbClr val="94A3B8"/>
+                </a:solidFill>
+                <a:latin typeface="Consolas"/>
+              </a:defRPr>
+            </a:pPr>
+            <a:r>
+              <a:t>SYS: ONLINE // SECTOR: DSA-ENGINE  |  COORDINATES: 20.2961° N, 85.8245° E  |  AZIMUTH: 125°  |  ■ V1.0</a:t>
+            </a:r>
+          </a:p>
+        </p:txBody>
+      </p:sp>
+      <p:sp>
+        <p:nvSpPr>
+          <p:cNvPr id="7" name="Rectangle 6"/>
+          <p:cNvSpPr/>
+          <p:nvPr/>
+        </p:nvSpPr>
+        <p:spPr>
+          <a:xfrm>
+            <a:off x="594360" y="960120"/>
+            <a:ext cx="11002975" cy="13716"/>
+          </a:xfrm>
+          <a:prstGeom prst="rect">
+            <a:avLst/>
+          </a:prstGeom>
           <a:solidFill>
-            <a:srgbClr val="020A19"/>
+            <a:srgbClr val="264073"/>
           </a:solidFill>
           <a:ln>
             <a:noFill/>
@@ -3138,25 +3313,23 @@
       </p:sp>
       <p:sp>
         <p:nvSpPr>
-          <p:cNvPr id="3" name="Rounded Rectangle 2"/>
+          <p:cNvPr id="8" name="Rectangle 7"/>
           <p:cNvSpPr/>
           <p:nvPr/>
         </p:nvSpPr>
         <p:spPr>
           <a:xfrm>
-            <a:off x="731520" y="731520"/>
-            <a:ext cx="6217920" cy="347472"/>
-          </a:xfrm>
-          <a:prstGeom prst="roundRect">
+            <a:off x="594360" y="6400800"/>
+            <a:ext cx="11002975" cy="13716"/>
+          </a:xfrm>
+          <a:prstGeom prst="rect">
             <a:avLst/>
           </a:prstGeom>
           <a:solidFill>
-            <a:srgbClr val="0B214D"/>
+            <a:srgbClr val="264073"/>
           </a:solidFill>
-          <a:ln w="12700">
-            <a:solidFill>
-              <a:srgbClr val="60A5FA"/>
-            </a:solidFill>
+          <a:ln>
+            <a:noFill/>
           </a:ln>
         </p:spPr>
         <p:style>
@@ -3178,28 +3351,19 @@
           <a:lstStyle/>
           <a:p>
             <a:pPr algn="ctr"/>
-            <a:r>
-              <a:rPr sz="1000" b="1">
-                <a:solidFill>
-                  <a:srgbClr val="60A5FA"/>
-                </a:solidFill>
-                <a:latin typeface="Consolas"/>
-              </a:rPr>
-              <a:t>CENTURION UNIVERSITY // CSE DEPARTMENT // DSA CAPSTONE</a:t>
-            </a:r>
-          </a:p>
-        </p:txBody>
-      </p:sp>
-      <p:sp>
-        <p:nvSpPr>
-          <p:cNvPr id="4" name="TextBox 3"/>
+          </a:p>
+        </p:txBody>
+      </p:sp>
+      <p:sp>
+        <p:nvSpPr>
+          <p:cNvPr id="9" name="TextBox 8"/>
           <p:cNvSpPr txBox="1"/>
           <p:nvPr/>
         </p:nvSpPr>
         <p:spPr>
           <a:xfrm>
-            <a:off x="685800" y="1234440"/>
-            <a:ext cx="10789920" cy="2743200"/>
+            <a:off x="594360" y="6446520"/>
+            <a:ext cx="4114800" cy="320040"/>
           </a:xfrm>
           <a:prstGeom prst="rect">
             <a:avLst/>
@@ -3207,81 +3371,45 @@
           <a:noFill/>
         </p:spPr>
         <p:txBody>
-          <a:bodyPr wrap="square">
+          <a:bodyPr wrap="none">
             <a:spAutoFit/>
           </a:bodyPr>
           <a:lstStyle/>
           <a:p>
             <a:pPr>
-              <a:defRPr sz="1200" b="1">
-                <a:solidFill>
-                  <a:srgbClr val="34D399"/>
+              <a:defRPr sz="850">
+                <a:solidFill>
+                  <a:srgbClr val="94A3B8"/>
                 </a:solidFill>
                 <a:latin typeface="Consolas"/>
               </a:defRPr>
             </a:pPr>
             <a:r>
-              <a:t>DATA STRUCTURES &amp; ALGORITHMS PROJECT</a:t>
-            </a:r>
-          </a:p>
-          <a:p>
-            <a:pPr>
-              <a:spcBef>
-                <a:spcPts val="800"/>
-              </a:spcBef>
-              <a:defRPr sz="3800" b="1">
-                <a:solidFill>
-                  <a:srgbClr val="D5E0FF"/>
-                </a:solidFill>
-                <a:latin typeface="Trebuchet MS"/>
-              </a:defRPr>
-            </a:pPr>
-            <a:r>
-              <a:t>The Trie &amp; Inverted Index</a:t>
-            </a:r>
-            <a:br/>
-            <a:r>
-              <a:t>Search Engine</a:t>
-            </a:r>
-          </a:p>
-          <a:p>
-            <a:pPr>
-              <a:spcBef>
-                <a:spcPts val="1000"/>
-              </a:spcBef>
-              <a:defRPr sz="1500">
-                <a:solidFill>
-                  <a:srgbClr val="94A3B8"/>
-                </a:solidFill>
-                <a:latin typeface="Calibri"/>
-              </a:defRPr>
-            </a:pPr>
-            <a:r>
-              <a:t>Zero-latency in-memory prefix autocomplete and multi-tag discovery built for the AceDevs platform.</a:t>
-            </a:r>
-          </a:p>
-        </p:txBody>
-      </p:sp>
-      <p:sp>
-        <p:nvSpPr>
-          <p:cNvPr id="5" name="Rounded Rectangle 4"/>
+              <a:t>ZOOM 1.0X  500M    ∿ SOUND [ON] // 60 FPS</a:t>
+            </a:r>
+          </a:p>
+        </p:txBody>
+      </p:sp>
+      <p:sp>
+        <p:nvSpPr>
+          <p:cNvPr id="10" name="Snip Diagonal Corner Rectangle 9"/>
           <p:cNvSpPr/>
           <p:nvPr/>
         </p:nvSpPr>
         <p:spPr>
           <a:xfrm>
-            <a:off x="731520" y="4389120"/>
-            <a:ext cx="3337560" cy="1691640"/>
-          </a:xfrm>
-          <a:prstGeom prst="roundRect">
+            <a:off x="4663440" y="6446520"/>
+            <a:ext cx="2834640" cy="256032"/>
+          </a:xfrm>
+          <a:prstGeom prst="snip2DiagRect">
             <a:avLst/>
           </a:prstGeom>
           <a:solidFill>
-            <a:srgbClr val="07183A"/>
+            <a:srgbClr val="041029"/>
           </a:solidFill>
-          <a:ln w="15240">
+          <a:ln w="12700">
             <a:solidFill>
-              <a:srgbClr val="60A5FA"/>
+              <a:srgbClr val="264073"/>
             </a:solidFill>
           </a:ln>
         </p:spPr>
@@ -3304,19 +3432,28 @@
           <a:lstStyle/>
           <a:p>
             <a:pPr algn="ctr"/>
-          </a:p>
-        </p:txBody>
-      </p:sp>
-      <p:sp>
-        <p:nvSpPr>
-          <p:cNvPr id="6" name="TextBox 5"/>
+            <a:r>
+              <a:rPr sz="800">
+                <a:solidFill>
+                  <a:srgbClr val="D5E0FF"/>
+                </a:solidFill>
+                <a:latin typeface="Consolas"/>
+              </a:rPr>
+              <a:t>◎ SYSTEM HERO COCKPIT ◎</a:t>
+            </a:r>
+          </a:p>
+        </p:txBody>
+      </p:sp>
+      <p:sp>
+        <p:nvSpPr>
+          <p:cNvPr id="11" name="TextBox 10"/>
           <p:cNvSpPr txBox="1"/>
           <p:nvPr/>
         </p:nvSpPr>
         <p:spPr>
           <a:xfrm>
-            <a:off x="868680" y="4526280"/>
-            <a:ext cx="3063240" cy="1371600"/>
+            <a:off x="8412480" y="6446520"/>
+            <a:ext cx="3154680" cy="320040"/>
           </a:xfrm>
           <a:prstGeom prst="rect">
             <a:avLst/>
@@ -3329,68 +3466,40 @@
           </a:bodyPr>
           <a:lstStyle/>
           <a:p>
-            <a:pPr>
-              <a:defRPr sz="1600" b="1">
-                <a:solidFill>
-                  <a:srgbClr val="FFFFFF"/>
-                </a:solidFill>
-                <a:latin typeface="Trebuchet MS"/>
-              </a:defRPr>
-            </a:pPr>
-            <a:r>
-              <a:t>ARBAZ ARSHAD</a:t>
-            </a:r>
-          </a:p>
-          <a:p>
-            <a:pPr>
-              <a:spcBef>
-                <a:spcPts val="400"/>
-              </a:spcBef>
-              <a:defRPr sz="1100">
-                <a:solidFill>
-                  <a:srgbClr val="94A3B8"/>
-                </a:solidFill>
-                <a:latin typeface="Calibri"/>
-              </a:defRPr>
-            </a:pPr>
-            <a:r>
-              <a:t>Lead Architect [DEV-01]</a:t>
-            </a:r>
-            <a:br/>
-            <a:r>
-              <a:t>Game Systems &amp; AI</a:t>
-            </a:r>
-            <a:br/>
-            <a:r>
-              <a:t>Portfolio: arbazarshad.com</a:t>
-            </a:r>
-            <a:br/>
-            <a:r>
-              <a:t>GitHub: arbazarshad7</a:t>
-            </a:r>
-          </a:p>
-        </p:txBody>
-      </p:sp>
-      <p:sp>
-        <p:nvSpPr>
-          <p:cNvPr id="7" name="Rounded Rectangle 6"/>
+            <a:pPr algn="r">
+              <a:defRPr sz="850" b="1">
+                <a:solidFill>
+                  <a:srgbClr val="8FADFF"/>
+                </a:solidFill>
+                <a:latin typeface="Consolas"/>
+              </a:defRPr>
+            </a:pPr>
+            <a:r>
+              <a:t>FILTERS [00]    ◎ 125° N</a:t>
+            </a:r>
+          </a:p>
+        </p:txBody>
+      </p:sp>
+      <p:sp>
+        <p:nvSpPr>
+          <p:cNvPr id="12" name="Snip Diagonal Corner Rectangle 11"/>
           <p:cNvSpPr/>
           <p:nvPr/>
         </p:nvSpPr>
         <p:spPr>
           <a:xfrm>
-            <a:off x="4434840" y="4389120"/>
-            <a:ext cx="3337560" cy="1691640"/>
-          </a:xfrm>
-          <a:prstGeom prst="roundRect">
+            <a:off x="1645920" y="1234440"/>
+            <a:ext cx="8899855" cy="3108960"/>
+          </a:xfrm>
+          <a:prstGeom prst="snip2DiagRect">
             <a:avLst/>
           </a:prstGeom>
           <a:solidFill>
-            <a:srgbClr val="07183A"/>
+            <a:srgbClr val="041029"/>
           </a:solidFill>
           <a:ln w="15240">
             <a:solidFill>
-              <a:srgbClr val="60A5FA"/>
+              <a:srgbClr val="264073"/>
             </a:solidFill>
           </a:ln>
         </p:spPr>
@@ -3418,14 +3527,14 @@
       </p:sp>
       <p:sp>
         <p:nvSpPr>
-          <p:cNvPr id="8" name="TextBox 7"/>
+          <p:cNvPr id="13" name="TextBox 12"/>
           <p:cNvSpPr txBox="1"/>
           <p:nvPr/>
         </p:nvSpPr>
         <p:spPr>
           <a:xfrm>
-            <a:off x="4572000" y="4526280"/>
-            <a:ext cx="3063240" cy="1371600"/>
+            <a:off x="1828800" y="1371600"/>
+            <a:ext cx="8534095" cy="2011680"/>
           </a:xfrm>
           <a:prstGeom prst="rect">
             <a:avLst/>
@@ -3433,13 +3542,29 @@
           <a:noFill/>
         </p:spPr>
         <p:txBody>
-          <a:bodyPr wrap="none">
+          <a:bodyPr wrap="square">
             <a:spAutoFit/>
           </a:bodyPr>
           <a:lstStyle/>
           <a:p>
-            <a:pPr>
-              <a:defRPr sz="1600" b="1">
+            <a:pPr algn="ctr">
+              <a:defRPr sz="1000" b="1">
+                <a:solidFill>
+                  <a:srgbClr val="8FADFF"/>
+                </a:solidFill>
+                <a:latin typeface="Consolas"/>
+              </a:defRPr>
+            </a:pPr>
+            <a:r>
+              <a:t>COLLECTIVE DEVELOPER PORTFOLIO // DIGITAL TWIN</a:t>
+            </a:r>
+          </a:p>
+          <a:p>
+            <a:pPr algn="ctr">
+              <a:spcBef>
+                <a:spcPts val="600"/>
+              </a:spcBef>
+              <a:defRPr sz="3200" b="1">
                 <a:solidFill>
                   <a:srgbClr val="FFFFFF"/>
                 </a:solidFill>
@@ -3447,15 +3572,19 @@
               </a:defRPr>
             </a:pPr>
             <a:r>
-              <a:t>DEVESH DAS</a:t>
-            </a:r>
-          </a:p>
-          <a:p>
-            <a:pPr>
+              <a:t>THE TRIE &amp; INVERTED INDEX</a:t>
+            </a:r>
+            <a:br/>
+            <a:r>
+              <a:t>SEARCH ENGINE</a:t>
+            </a:r>
+          </a:p>
+          <a:p>
+            <a:pPr algn="ctr">
               <a:spcBef>
-                <a:spcPts val="400"/>
+                <a:spcPts val="600"/>
               </a:spcBef>
-              <a:defRPr sz="1100">
+              <a:defRPr sz="1300">
                 <a:solidFill>
                   <a:srgbClr val="94A3B8"/>
                 </a:solidFill>
@@ -3463,44 +3592,30 @@
               </a:defRPr>
             </a:pPr>
             <a:r>
-              <a:t>CS &amp; Physics Engineer [DEV-02]</a:t>
-            </a:r>
-            <a:br/>
-            <a:r>
-              <a:t>Game Mechanics &amp; Engines</a:t>
-            </a:r>
-            <a:br/>
-            <a:r>
-              <a:t>Portfolio: mrdeveshdas.vercel.app</a:t>
-            </a:r>
-            <a:br/>
-            <a:r>
-              <a:t>GitHub: ninja27dev</a:t>
-            </a:r>
-          </a:p>
-        </p:txBody>
-      </p:sp>
-      <p:sp>
-        <p:nvSpPr>
-          <p:cNvPr id="9" name="Rounded Rectangle 8"/>
+              <a:t>Zero-latency in-memory prefix autocomplete and multi-tag discovery engineered for the AceDevs platform.</a:t>
+            </a:r>
+          </a:p>
+        </p:txBody>
+      </p:sp>
+      <p:sp>
+        <p:nvSpPr>
+          <p:cNvPr id="14" name="Snip Diagonal Corner Rectangle 13"/>
           <p:cNvSpPr/>
           <p:nvPr/>
         </p:nvSpPr>
         <p:spPr>
           <a:xfrm>
-            <a:off x="8138160" y="4389120"/>
-            <a:ext cx="3337560" cy="1691640"/>
-          </a:xfrm>
-          <a:prstGeom prst="roundRect">
+            <a:off x="2926080" y="3611880"/>
+            <a:ext cx="3017520" cy="502920"/>
+          </a:xfrm>
+          <a:prstGeom prst="snip2DiagRect">
             <a:avLst/>
           </a:prstGeom>
           <a:solidFill>
-            <a:srgbClr val="0E2D5F"/>
+            <a:srgbClr val="D5E0FF"/>
           </a:solidFill>
-          <a:ln w="15240">
-            <a:solidFill>
-              <a:srgbClr val="34D399"/>
-            </a:solidFill>
+          <a:ln>
+            <a:noFill/>
           </a:ln>
         </p:spPr>
         <p:style>
@@ -3522,19 +3637,127 @@
           <a:lstStyle/>
           <a:p>
             <a:pPr algn="ctr"/>
-          </a:p>
-        </p:txBody>
-      </p:sp>
-      <p:sp>
-        <p:nvSpPr>
-          <p:cNvPr id="10" name="TextBox 9"/>
+            <a:r>
+              <a:rPr sz="1100" b="1">
+                <a:solidFill>
+                  <a:srgbClr val="020A19"/>
+                </a:solidFill>
+                <a:latin typeface="Trebuchet MS"/>
+              </a:rPr>
+              <a:t>👤 MEET THE FOUNDERS [02]</a:t>
+            </a:r>
+          </a:p>
+        </p:txBody>
+      </p:sp>
+      <p:sp>
+        <p:nvSpPr>
+          <p:cNvPr id="15" name="Snip Diagonal Corner Rectangle 14"/>
+          <p:cNvSpPr/>
+          <p:nvPr/>
+        </p:nvSpPr>
+        <p:spPr>
+          <a:xfrm>
+            <a:off x="6217920" y="3611880"/>
+            <a:ext cx="3017520" cy="502920"/>
+          </a:xfrm>
+          <a:prstGeom prst="snip2DiagRect">
+            <a:avLst/>
+          </a:prstGeom>
+          <a:solidFill>
+            <a:srgbClr val="041029"/>
+          </a:solidFill>
+          <a:ln w="15240">
+            <a:solidFill>
+              <a:srgbClr val="8FADFF"/>
+            </a:solidFill>
+          </a:ln>
+        </p:spPr>
+        <p:style>
+          <a:lnRef idx="1">
+            <a:schemeClr val="accent1"/>
+          </a:lnRef>
+          <a:fillRef idx="3">
+            <a:schemeClr val="accent1"/>
+          </a:fillRef>
+          <a:effectRef idx="2">
+            <a:schemeClr val="accent1"/>
+          </a:effectRef>
+          <a:fontRef idx="minor">
+            <a:schemeClr val="lt1"/>
+          </a:fontRef>
+        </p:style>
+        <p:txBody>
+          <a:bodyPr rtlCol="0" anchor="ctr"/>
+          <a:lstStyle/>
+          <a:p>
+            <a:pPr algn="ctr"/>
+            <a:r>
+              <a:rPr sz="1100" b="1">
+                <a:solidFill>
+                  <a:srgbClr val="D5E0FF"/>
+                </a:solidFill>
+                <a:latin typeface="Trebuchet MS"/>
+              </a:rPr>
+              <a:t>📦 IN-MEMORY SEARCH [00]</a:t>
+            </a:r>
+          </a:p>
+        </p:txBody>
+      </p:sp>
+      <p:sp>
+        <p:nvSpPr>
+          <p:cNvPr id="16" name="Snip Diagonal Corner Rectangle 15"/>
+          <p:cNvSpPr/>
+          <p:nvPr/>
+        </p:nvSpPr>
+        <p:spPr>
+          <a:xfrm>
+            <a:off x="594360" y="4526280"/>
+            <a:ext cx="3474720" cy="1737360"/>
+          </a:xfrm>
+          <a:prstGeom prst="snip2DiagRect">
+            <a:avLst/>
+          </a:prstGeom>
+          <a:solidFill>
+            <a:srgbClr val="041029"/>
+          </a:solidFill>
+          <a:ln w="15240">
+            <a:solidFill>
+              <a:srgbClr val="264073"/>
+            </a:solidFill>
+          </a:ln>
+        </p:spPr>
+        <p:style>
+          <a:lnRef idx="1">
+            <a:schemeClr val="accent1"/>
+          </a:lnRef>
+          <a:fillRef idx="3">
+            <a:schemeClr val="accent1"/>
+          </a:fillRef>
+          <a:effectRef idx="2">
+            <a:schemeClr val="accent1"/>
+          </a:effectRef>
+          <a:fontRef idx="minor">
+            <a:schemeClr val="lt1"/>
+          </a:fontRef>
+        </p:style>
+        <p:txBody>
+          <a:bodyPr rtlCol="0" anchor="ctr"/>
+          <a:lstStyle/>
+          <a:p>
+            <a:pPr algn="ctr"/>
+          </a:p>
+        </p:txBody>
+      </p:sp>
+      <p:sp>
+        <p:nvSpPr>
+          <p:cNvPr id="17" name="TextBox 16"/>
           <p:cNvSpPr txBox="1"/>
           <p:nvPr/>
         </p:nvSpPr>
         <p:spPr>
           <a:xfrm>
-            <a:off x="8275320" y="4526280"/>
-            <a:ext cx="3063240" cy="1371600"/>
+            <a:off x="731520" y="4617720"/>
+            <a:ext cx="3200400" cy="1554480"/>
           </a:xfrm>
           <a:prstGeom prst="rect">
             <a:avLst/>
@@ -3542,49 +3765,279 @@
           <a:noFill/>
         </p:spPr>
         <p:txBody>
-          <a:bodyPr wrap="none">
+          <a:bodyPr wrap="square">
             <a:spAutoFit/>
           </a:bodyPr>
           <a:lstStyle/>
           <a:p>
             <a:pPr>
-              <a:defRPr sz="1500" b="1">
-                <a:solidFill>
-                  <a:srgbClr val="34D399"/>
-                </a:solidFill>
-                <a:latin typeface="Trebuchet MS"/>
-              </a:defRPr>
-            </a:pPr>
-            <a:r>
-              <a:t>KEY HIGHLIGHTS</a:t>
+              <a:defRPr sz="850" b="1">
+                <a:solidFill>
+                  <a:srgbClr val="8FADFF"/>
+                </a:solidFill>
+                <a:latin typeface="Consolas"/>
+              </a:defRPr>
+            </a:pPr>
+            <a:r>
+              <a:t>⚙ CORE 01           ARBAZ &amp; DEVESH</a:t>
             </a:r>
           </a:p>
           <a:p>
             <a:pPr>
               <a:spcBef>
-                <a:spcPts val="400"/>
+                <a:spcPts val="300"/>
               </a:spcBef>
-              <a:defRPr sz="1100">
-                <a:solidFill>
-                  <a:srgbClr val="D5E0FF"/>
+              <a:defRPr sz="1400" b="1">
+                <a:solidFill>
+                  <a:srgbClr val="FFFFFF"/>
+                </a:solidFill>
+                <a:latin typeface="Trebuchet MS"/>
+              </a:defRPr>
+            </a:pPr>
+            <a:r>
+              <a:t>Dual Developer Synergy</a:t>
+            </a:r>
+          </a:p>
+          <a:p>
+            <a:pPr>
+              <a:spcBef>
+                <a:spcPts val="300"/>
+              </a:spcBef>
+              <a:defRPr sz="1000">
+                <a:solidFill>
+                  <a:srgbClr val="94A3B8"/>
+                </a:solidFill>
+                <a:latin typeface="Calibri"/>
+              </a:defRPr>
+            </a:pPr>
+            <a:r>
+              <a:t>Arbaz Arshad [DEV-01] &amp; Devesh Das [DEV-02]. Game systems, AI &amp; CS engineering at Centurion University, Bhubaneswar.</a:t>
+            </a:r>
+          </a:p>
+        </p:txBody>
+      </p:sp>
+      <p:sp>
+        <p:nvSpPr>
+          <p:cNvPr id="18" name="Snip Diagonal Corner Rectangle 17"/>
+          <p:cNvSpPr/>
+          <p:nvPr/>
+        </p:nvSpPr>
+        <p:spPr>
+          <a:xfrm>
+            <a:off x="4357116" y="4526280"/>
+            <a:ext cx="3474720" cy="1737360"/>
+          </a:xfrm>
+          <a:prstGeom prst="snip2DiagRect">
+            <a:avLst/>
+          </a:prstGeom>
+          <a:solidFill>
+            <a:srgbClr val="041029"/>
+          </a:solidFill>
+          <a:ln w="15240">
+            <a:solidFill>
+              <a:srgbClr val="264073"/>
+            </a:solidFill>
+          </a:ln>
+        </p:spPr>
+        <p:style>
+          <a:lnRef idx="1">
+            <a:schemeClr val="accent1"/>
+          </a:lnRef>
+          <a:fillRef idx="3">
+            <a:schemeClr val="accent1"/>
+          </a:fillRef>
+          <a:effectRef idx="2">
+            <a:schemeClr val="accent1"/>
+          </a:effectRef>
+          <a:fontRef idx="minor">
+            <a:schemeClr val="lt1"/>
+          </a:fontRef>
+        </p:style>
+        <p:txBody>
+          <a:bodyPr rtlCol="0" anchor="ctr"/>
+          <a:lstStyle/>
+          <a:p>
+            <a:pPr algn="ctr"/>
+          </a:p>
+        </p:txBody>
+      </p:sp>
+      <p:sp>
+        <p:nvSpPr>
+          <p:cNvPr id="19" name="TextBox 18"/>
+          <p:cNvSpPr txBox="1"/>
+          <p:nvPr/>
+        </p:nvSpPr>
+        <p:spPr>
+          <a:xfrm>
+            <a:off x="4494276" y="4617720"/>
+            <a:ext cx="3200400" cy="1554480"/>
+          </a:xfrm>
+          <a:prstGeom prst="rect">
+            <a:avLst/>
+          </a:prstGeom>
+          <a:noFill/>
+        </p:spPr>
+        <p:txBody>
+          <a:bodyPr wrap="square">
+            <a:spAutoFit/>
+          </a:bodyPr>
+          <a:lstStyle/>
+          <a:p>
+            <a:pPr>
+              <a:defRPr sz="850" b="1">
+                <a:solidFill>
+                  <a:srgbClr val="8FADFF"/>
                 </a:solidFill>
                 <a:latin typeface="Consolas"/>
               </a:defRPr>
             </a:pPr>
             <a:r>
-              <a:t>⚡ &lt; 1.5ms Query Latency</a:t>
-            </a:r>
-            <a:br/>
-            <a:r>
-              <a:t>🔒 100% Client-Side In-Memory</a:t>
-            </a:r>
-            <a:br/>
-            <a:r>
-              <a:t>📦 Zero NPM Search Dependencies</a:t>
-            </a:r>
-            <a:br/>
-            <a:r>
-              <a:t>🌐 100% Offline Resilient</a:t>
+              <a:t>🌐 CORE 02           PREFIX TRIE // O(k)</a:t>
+            </a:r>
+          </a:p>
+          <a:p>
+            <a:pPr>
+              <a:spcBef>
+                <a:spcPts val="300"/>
+              </a:spcBef>
+              <a:defRPr sz="1400" b="1">
+                <a:solidFill>
+                  <a:srgbClr val="FFFFFF"/>
+                </a:solidFill>
+                <a:latin typeface="Trebuchet MS"/>
+              </a:defRPr>
+            </a:pPr>
+            <a:r>
+              <a:t>Sub-Millisecond Autocomplete</a:t>
+            </a:r>
+          </a:p>
+          <a:p>
+            <a:pPr>
+              <a:spcBef>
+                <a:spcPts val="300"/>
+              </a:spcBef>
+              <a:defRPr sz="1000">
+                <a:solidFill>
+                  <a:srgbClr val="94A3B8"/>
+                </a:solidFill>
+                <a:latin typeface="Calibri"/>
+              </a:defRPr>
+            </a:pPr>
+            <a:r>
+              <a:t>Character-by-character tree branching yielding instant autocomplete suggestions in &lt; 0.8ms without external npm libraries.</a:t>
+            </a:r>
+          </a:p>
+        </p:txBody>
+      </p:sp>
+      <p:sp>
+        <p:nvSpPr>
+          <p:cNvPr id="20" name="Snip Diagonal Corner Rectangle 19"/>
+          <p:cNvSpPr/>
+          <p:nvPr/>
+        </p:nvSpPr>
+        <p:spPr>
+          <a:xfrm>
+            <a:off x="8119872" y="4526280"/>
+            <a:ext cx="3474720" cy="1737360"/>
+          </a:xfrm>
+          <a:prstGeom prst="snip2DiagRect">
+            <a:avLst/>
+          </a:prstGeom>
+          <a:solidFill>
+            <a:srgbClr val="041029"/>
+          </a:solidFill>
+          <a:ln w="15240">
+            <a:solidFill>
+              <a:srgbClr val="264073"/>
+            </a:solidFill>
+          </a:ln>
+        </p:spPr>
+        <p:style>
+          <a:lnRef idx="1">
+            <a:schemeClr val="accent1"/>
+          </a:lnRef>
+          <a:fillRef idx="3">
+            <a:schemeClr val="accent1"/>
+          </a:fillRef>
+          <a:effectRef idx="2">
+            <a:schemeClr val="accent1"/>
+          </a:effectRef>
+          <a:fontRef idx="minor">
+            <a:schemeClr val="lt1"/>
+          </a:fontRef>
+        </p:style>
+        <p:txBody>
+          <a:bodyPr rtlCol="0" anchor="ctr"/>
+          <a:lstStyle/>
+          <a:p>
+            <a:pPr algn="ctr"/>
+          </a:p>
+        </p:txBody>
+      </p:sp>
+      <p:sp>
+        <p:nvSpPr>
+          <p:cNvPr id="21" name="TextBox 20"/>
+          <p:cNvSpPr txBox="1"/>
+          <p:nvPr/>
+        </p:nvSpPr>
+        <p:spPr>
+          <a:xfrm>
+            <a:off x="8257032" y="4617720"/>
+            <a:ext cx="3200400" cy="1554480"/>
+          </a:xfrm>
+          <a:prstGeom prst="rect">
+            <a:avLst/>
+          </a:prstGeom>
+          <a:noFill/>
+        </p:spPr>
+        <p:txBody>
+          <a:bodyPr wrap="square">
+            <a:spAutoFit/>
+          </a:bodyPr>
+          <a:lstStyle/>
+          <a:p>
+            <a:pPr>
+              <a:defRPr sz="850" b="1">
+                <a:solidFill>
+                  <a:srgbClr val="8FADFF"/>
+                </a:solidFill>
+                <a:latin typeface="Consolas"/>
+              </a:defRPr>
+            </a:pPr>
+            <a:r>
+              <a:t>🗄 CORE 03           IN-MEMORY INDEX</a:t>
+            </a:r>
+          </a:p>
+          <a:p>
+            <a:pPr>
+              <a:spcBef>
+                <a:spcPts val="300"/>
+              </a:spcBef>
+              <a:defRPr sz="1400" b="1">
+                <a:solidFill>
+                  <a:srgbClr val="FFFFFF"/>
+                </a:solidFill>
+                <a:latin typeface="Trebuchet MS"/>
+              </a:defRPr>
+            </a:pPr>
+            <a:r>
+              <a:t>Multi-Tag Set Intersections</a:t>
+            </a:r>
+          </a:p>
+          <a:p>
+            <a:pPr>
+              <a:spcBef>
+                <a:spcPts val="300"/>
+              </a:spcBef>
+              <a:defRPr sz="1000">
+                <a:solidFill>
+                  <a:srgbClr val="94A3B8"/>
+                </a:solidFill>
+                <a:latin typeface="Calibri"/>
+              </a:defRPr>
+            </a:pPr>
+            <a:r>
+              <a:t>Mathematical posting list set algebra answering multi-tag boolean queries (#unity ∩ #physics) in &lt; 1.4ms.</a:t>
             </a:r>
           </a:p>
         </p:txBody>
@@ -3607,12 +4060,20 @@
         <p:nvPr/>
       </p:nvGrpSpPr>
       <p:grpSpPr/>
-      <p:sp>
-        <p:nvSpPr>
-          <p:cNvPr id="2" name="Rectangle 1"/>
-          <p:cNvSpPr/>
-          <p:nvPr/>
-        </p:nvSpPr>
+      <p:pic>
+        <p:nvPicPr>
+          <p:cNvPr id="2" name="Picture 1" descr="acedevs_hud_bg.png"/>
+          <p:cNvPicPr>
+            <a:picLocks noChangeAspect="1"/>
+          </p:cNvPicPr>
+          <p:nvPr/>
+        </p:nvPicPr>
+        <p:blipFill>
+          <a:blip r:embed="rId2"/>
+          <a:stretch>
+            <a:fillRect/>
+          </a:stretch>
+        </p:blipFill>
         <p:spPr>
           <a:xfrm>
             <a:off x="0" y="0"/>
@@ -3621,8 +4082,175 @@
           <a:prstGeom prst="rect">
             <a:avLst/>
           </a:prstGeom>
+        </p:spPr>
+      </p:pic>
+      <p:sp>
+        <p:nvSpPr>
+          <p:cNvPr id="3" name="TextBox 2"/>
+          <p:cNvSpPr txBox="1"/>
+          <p:nvPr/>
+        </p:nvSpPr>
+        <p:spPr>
+          <a:xfrm>
+            <a:off x="594360" y="256032"/>
+            <a:ext cx="2286000" cy="365760"/>
+          </a:xfrm>
+          <a:prstGeom prst="rect">
+            <a:avLst/>
+          </a:prstGeom>
+          <a:noFill/>
+        </p:spPr>
+        <p:txBody>
+          <a:bodyPr wrap="none">
+            <a:spAutoFit/>
+          </a:bodyPr>
+          <a:lstStyle/>
+          <a:p>
+            <a:r>
+              <a:rPr sz="1300" b="1">
+                <a:solidFill>
+                  <a:srgbClr val="8FADFF"/>
+                </a:solidFill>
+                <a:latin typeface="Trebuchet MS"/>
+              </a:rPr>
+              <a:t>▲ </a:t>
+            </a:r>
+            <a:r>
+              <a:rPr sz="1300" b="1">
+                <a:solidFill>
+                  <a:srgbClr val="FFFFFF"/>
+                </a:solidFill>
+                <a:latin typeface="Trebuchet MS"/>
+              </a:rPr>
+              <a:t>ACEDEVS</a:t>
+            </a:r>
+          </a:p>
+        </p:txBody>
+      </p:sp>
+      <p:sp>
+        <p:nvSpPr>
+          <p:cNvPr id="4" name="TextBox 3"/>
+          <p:cNvSpPr txBox="1"/>
+          <p:nvPr/>
+        </p:nvSpPr>
+        <p:spPr>
+          <a:xfrm>
+            <a:off x="3017520" y="256032"/>
+            <a:ext cx="5486400" cy="365760"/>
+          </a:xfrm>
+          <a:prstGeom prst="rect">
+            <a:avLst/>
+          </a:prstGeom>
+          <a:noFill/>
+        </p:spPr>
+        <p:txBody>
+          <a:bodyPr wrap="none">
+            <a:spAutoFit/>
+          </a:bodyPr>
+          <a:lstStyle/>
+          <a:p>
+            <a:pPr>
+              <a:defRPr sz="900">
+                <a:solidFill>
+                  <a:srgbClr val="94A3B8"/>
+                </a:solidFill>
+                <a:latin typeface="Consolas"/>
+              </a:defRPr>
+            </a:pPr>
+            <a:r>
+              <a:t>SHOWCASE [02]    TEAM [02]    REPOSITORIES [04]    BLOG [05]</a:t>
+            </a:r>
+          </a:p>
+        </p:txBody>
+      </p:sp>
+      <p:sp>
+        <p:nvSpPr>
+          <p:cNvPr id="5" name="TextBox 4"/>
+          <p:cNvSpPr txBox="1"/>
+          <p:nvPr/>
+        </p:nvSpPr>
+        <p:spPr>
+          <a:xfrm>
+            <a:off x="8595360" y="256032"/>
+            <a:ext cx="3017520" cy="365760"/>
+          </a:xfrm>
+          <a:prstGeom prst="rect">
+            <a:avLst/>
+          </a:prstGeom>
+          <a:noFill/>
+        </p:spPr>
+        <p:txBody>
+          <a:bodyPr wrap="none">
+            <a:spAutoFit/>
+          </a:bodyPr>
+          <a:lstStyle/>
+          <a:p>
+            <a:pPr algn="r">
+              <a:defRPr sz="900" b="1">
+                <a:solidFill>
+                  <a:srgbClr val="D5E0FF"/>
+                </a:solidFill>
+                <a:latin typeface="Consolas"/>
+              </a:defRPr>
+            </a:pPr>
+            <a:r>
+              <a:t>SEARCH [⌘K]    SLIDE [02/06]</a:t>
+            </a:r>
+          </a:p>
+        </p:txBody>
+      </p:sp>
+      <p:sp>
+        <p:nvSpPr>
+          <p:cNvPr id="6" name="TextBox 5"/>
+          <p:cNvSpPr txBox="1"/>
+          <p:nvPr/>
+        </p:nvSpPr>
+        <p:spPr>
+          <a:xfrm>
+            <a:off x="594360" y="658368"/>
+            <a:ext cx="10972800" cy="274320"/>
+          </a:xfrm>
+          <a:prstGeom prst="rect">
+            <a:avLst/>
+          </a:prstGeom>
+          <a:noFill/>
+        </p:spPr>
+        <p:txBody>
+          <a:bodyPr wrap="none">
+            <a:spAutoFit/>
+          </a:bodyPr>
+          <a:lstStyle/>
+          <a:p>
+            <a:pPr algn="ctr">
+              <a:defRPr sz="850">
+                <a:solidFill>
+                  <a:srgbClr val="94A3B8"/>
+                </a:solidFill>
+                <a:latin typeface="Consolas"/>
+              </a:defRPr>
+            </a:pPr>
+            <a:r>
+              <a:t>SYS: ONLINE // SECTOR: DSA-ENGINE  |  COORDINATES: 20.2961° N, 85.8245° E  |  AZIMUTH: 125°  |  ■ V1.0</a:t>
+            </a:r>
+          </a:p>
+        </p:txBody>
+      </p:sp>
+      <p:sp>
+        <p:nvSpPr>
+          <p:cNvPr id="7" name="Rectangle 6"/>
+          <p:cNvSpPr/>
+          <p:nvPr/>
+        </p:nvSpPr>
+        <p:spPr>
+          <a:xfrm>
+            <a:off x="594360" y="960120"/>
+            <a:ext cx="11002975" cy="13716"/>
+          </a:xfrm>
+          <a:prstGeom prst="rect">
+            <a:avLst/>
+          </a:prstGeom>
           <a:solidFill>
-            <a:srgbClr val="020A19"/>
+            <a:srgbClr val="264073"/>
           </a:solidFill>
           <a:ln>
             <a:noFill/>
@@ -3652,25 +4280,23 @@
       </p:sp>
       <p:sp>
         <p:nvSpPr>
-          <p:cNvPr id="3" name="Rounded Rectangle 2"/>
+          <p:cNvPr id="8" name="Rectangle 7"/>
           <p:cNvSpPr/>
           <p:nvPr/>
         </p:nvSpPr>
         <p:spPr>
           <a:xfrm>
-            <a:off x="731520" y="384048"/>
-            <a:ext cx="3108960" cy="292608"/>
-          </a:xfrm>
-          <a:prstGeom prst="roundRect">
+            <a:off x="594360" y="6400800"/>
+            <a:ext cx="11002975" cy="13716"/>
+          </a:xfrm>
+          <a:prstGeom prst="rect">
             <a:avLst/>
           </a:prstGeom>
           <a:solidFill>
-            <a:srgbClr val="0B214D"/>
+            <a:srgbClr val="264073"/>
           </a:solidFill>
-          <a:ln w="12700">
-            <a:solidFill>
-              <a:srgbClr val="60A5FA"/>
-            </a:solidFill>
+          <a:ln>
+            <a:noFill/>
           </a:ln>
         </p:spPr>
         <p:style>
@@ -3692,28 +4318,19 @@
           <a:lstStyle/>
           <a:p>
             <a:pPr algn="ctr"/>
-            <a:r>
-              <a:rPr sz="950" b="1">
-                <a:solidFill>
-                  <a:srgbClr val="60A5FA"/>
-                </a:solidFill>
-                <a:latin typeface="Consolas"/>
-              </a:rPr>
-              <a:t>// THE PROBLEM</a:t>
-            </a:r>
-          </a:p>
-        </p:txBody>
-      </p:sp>
-      <p:sp>
-        <p:nvSpPr>
-          <p:cNvPr id="4" name="TextBox 3"/>
+          </a:p>
+        </p:txBody>
+      </p:sp>
+      <p:sp>
+        <p:nvSpPr>
+          <p:cNvPr id="9" name="TextBox 8"/>
           <p:cNvSpPr txBox="1"/>
           <p:nvPr/>
         </p:nvSpPr>
         <p:spPr>
           <a:xfrm>
-            <a:off x="685800" y="731520"/>
-            <a:ext cx="10789920" cy="731520"/>
+            <a:off x="594360" y="6446520"/>
+            <a:ext cx="4114800" cy="320040"/>
           </a:xfrm>
           <a:prstGeom prst="rect">
             <a:avLst/>
@@ -3721,60 +4338,46 @@
           <a:noFill/>
         </p:spPr>
         <p:txBody>
-          <a:bodyPr wrap="square">
+          <a:bodyPr wrap="none">
             <a:spAutoFit/>
           </a:bodyPr>
           <a:lstStyle/>
           <a:p>
             <a:pPr>
-              <a:defRPr sz="2400" b="1">
-                <a:solidFill>
-                  <a:srgbClr val="D5E0FF"/>
-                </a:solidFill>
-                <a:latin typeface="Trebuchet MS"/>
-              </a:defRPr>
-            </a:pPr>
-            <a:r>
-              <a:t>Why Traditional Search Fails in Modern Web Apps</a:t>
-            </a:r>
-          </a:p>
-          <a:p>
-            <a:pPr>
-              <a:spcBef>
-                <a:spcPts val="300"/>
-              </a:spcBef>
-              <a:defRPr sz="1300">
+              <a:defRPr sz="850">
                 <a:solidFill>
                   <a:srgbClr val="94A3B8"/>
                 </a:solidFill>
-                <a:latin typeface="Calibri"/>
-              </a:defRPr>
-            </a:pPr>
-            <a:r>
-              <a:t>Comparing standard array scans, remote cloud search APIs, and our in-memory DSA engine.</a:t>
-            </a:r>
-          </a:p>
-        </p:txBody>
-      </p:sp>
-      <p:sp>
-        <p:nvSpPr>
-          <p:cNvPr id="5" name="Rectangle 4"/>
+                <a:latin typeface="Consolas"/>
+              </a:defRPr>
+            </a:pPr>
+            <a:r>
+              <a:t>ZOOM 1.0X  500M    ∿ SOUND [ON] // 60 FPS</a:t>
+            </a:r>
+          </a:p>
+        </p:txBody>
+      </p:sp>
+      <p:sp>
+        <p:nvSpPr>
+          <p:cNvPr id="10" name="Snip Diagonal Corner Rectangle 9"/>
           <p:cNvSpPr/>
           <p:nvPr/>
         </p:nvSpPr>
         <p:spPr>
           <a:xfrm>
-            <a:off x="731520" y="1536192"/>
-            <a:ext cx="10728655" cy="13716"/>
-          </a:xfrm>
-          <a:prstGeom prst="rect">
+            <a:off x="4663440" y="6446520"/>
+            <a:ext cx="2834640" cy="256032"/>
+          </a:xfrm>
+          <a:prstGeom prst="snip2DiagRect">
             <a:avLst/>
           </a:prstGeom>
           <a:solidFill>
-            <a:srgbClr val="264D8A"/>
+            <a:srgbClr val="041029"/>
           </a:solidFill>
-          <a:ln>
-            <a:noFill/>
+          <a:ln w="12700">
+            <a:solidFill>
+              <a:srgbClr val="264073"/>
+            </a:solidFill>
           </a:ln>
         </p:spPr>
         <p:style>
@@ -3796,25 +4399,136 @@
           <a:lstStyle/>
           <a:p>
             <a:pPr algn="ctr"/>
-          </a:p>
-        </p:txBody>
-      </p:sp>
-      <p:sp>
-        <p:nvSpPr>
-          <p:cNvPr id="6" name="Rounded Rectangle 5"/>
+            <a:r>
+              <a:rPr sz="800">
+                <a:solidFill>
+                  <a:srgbClr val="D5E0FF"/>
+                </a:solidFill>
+                <a:latin typeface="Consolas"/>
+              </a:rPr>
+              <a:t>◎ BOTTLENECK ANALYSIS ◎</a:t>
+            </a:r>
+          </a:p>
+        </p:txBody>
+      </p:sp>
+      <p:sp>
+        <p:nvSpPr>
+          <p:cNvPr id="11" name="TextBox 10"/>
+          <p:cNvSpPr txBox="1"/>
+          <p:nvPr/>
+        </p:nvSpPr>
+        <p:spPr>
+          <a:xfrm>
+            <a:off x="8412480" y="6446520"/>
+            <a:ext cx="3154680" cy="320040"/>
+          </a:xfrm>
+          <a:prstGeom prst="rect">
+            <a:avLst/>
+          </a:prstGeom>
+          <a:noFill/>
+        </p:spPr>
+        <p:txBody>
+          <a:bodyPr wrap="none">
+            <a:spAutoFit/>
+          </a:bodyPr>
+          <a:lstStyle/>
+          <a:p>
+            <a:pPr algn="r">
+              <a:defRPr sz="850" b="1">
+                <a:solidFill>
+                  <a:srgbClr val="8FADFF"/>
+                </a:solidFill>
+                <a:latin typeface="Consolas"/>
+              </a:defRPr>
+            </a:pPr>
+            <a:r>
+              <a:t>FILTERS [00]    ◎ 125° N</a:t>
+            </a:r>
+          </a:p>
+        </p:txBody>
+      </p:sp>
+      <p:sp>
+        <p:nvSpPr>
+          <p:cNvPr id="12" name="TextBox 11"/>
+          <p:cNvSpPr txBox="1"/>
+          <p:nvPr/>
+        </p:nvSpPr>
+        <p:spPr>
+          <a:xfrm>
+            <a:off x="594360" y="1051560"/>
+            <a:ext cx="10972800" cy="777240"/>
+          </a:xfrm>
+          <a:prstGeom prst="rect">
+            <a:avLst/>
+          </a:prstGeom>
+          <a:noFill/>
+        </p:spPr>
+        <p:txBody>
+          <a:bodyPr wrap="square">
+            <a:spAutoFit/>
+          </a:bodyPr>
+          <a:lstStyle/>
+          <a:p>
+            <a:r>
+              <a:rPr sz="950" b="1">
+                <a:solidFill>
+                  <a:srgbClr val="8FADFF"/>
+                </a:solidFill>
+                <a:latin typeface="Consolas"/>
+              </a:rPr>
+              <a:t>// ARCHITECTURAL BOTTLENECK  </a:t>
+            </a:r>
+          </a:p>
+          <a:p>
+            <a:pPr>
+              <a:spcBef>
+                <a:spcPts val="200"/>
+              </a:spcBef>
+              <a:defRPr sz="2100" b="1">
+                <a:solidFill>
+                  <a:srgbClr val="FFFFFF"/>
+                </a:solidFill>
+                <a:latin typeface="Trebuchet MS"/>
+              </a:defRPr>
+            </a:pPr>
+            <a:r>
+              <a:t>Why Traditional Search Fails in Modern Web Apps</a:t>
+            </a:r>
+          </a:p>
+          <a:p>
+            <a:pPr>
+              <a:spcBef>
+                <a:spcPts val="200"/>
+              </a:spcBef>
+              <a:defRPr sz="1150">
+                <a:solidFill>
+                  <a:srgbClr val="94A3B8"/>
+                </a:solidFill>
+                <a:latin typeface="Calibri"/>
+              </a:defRPr>
+            </a:pPr>
+            <a:r>
+              <a:t>Comparing brute-force linear array loops, cloud search APIs, and our in-memory DSA engine.</a:t>
+            </a:r>
+          </a:p>
+        </p:txBody>
+      </p:sp>
+      <p:sp>
+        <p:nvSpPr>
+          <p:cNvPr id="13" name="Snip Diagonal Corner Rectangle 12"/>
           <p:cNvSpPr/>
           <p:nvPr/>
         </p:nvSpPr>
         <p:spPr>
           <a:xfrm>
-            <a:off x="731520" y="1828800"/>
-            <a:ext cx="3337560" cy="4480560"/>
-          </a:xfrm>
-          <a:prstGeom prst="roundRect">
+            <a:off x="594360" y="1965960"/>
+            <a:ext cx="3474720" cy="4251960"/>
+          </a:xfrm>
+          <a:prstGeom prst="snip2DiagRect">
             <a:avLst/>
           </a:prstGeom>
           <a:solidFill>
-            <a:srgbClr val="07183A"/>
+            <a:srgbClr val="041029"/>
           </a:solidFill>
           <a:ln w="15240">
             <a:solidFill>
@@ -3846,14 +4560,14 @@
       </p:sp>
       <p:sp>
         <p:nvSpPr>
-          <p:cNvPr id="7" name="TextBox 6"/>
+          <p:cNvPr id="14" name="TextBox 13"/>
           <p:cNvSpPr txBox="1"/>
           <p:nvPr/>
         </p:nvSpPr>
         <p:spPr>
           <a:xfrm>
-            <a:off x="914400" y="1965960"/>
-            <a:ext cx="2971800" cy="457200"/>
+            <a:off x="777240" y="2103120"/>
+            <a:ext cx="3108960" cy="3931920"/>
           </a:xfrm>
           <a:prstGeom prst="rect">
             <a:avLst/>
@@ -3867,131 +4581,120 @@
           <a:lstStyle/>
           <a:p>
             <a:pPr>
-              <a:defRPr sz="1400" b="1">
+              <a:defRPr sz="950" b="1">
+                <a:solidFill>
+                  <a:srgbClr val="F87171"/>
+                </a:solidFill>
+                <a:latin typeface="Consolas"/>
+              </a:defRPr>
+            </a:pPr>
+            <a:r>
+              <a:t>[FAIL 01]  O(N · L) SCANS</a:t>
+            </a:r>
+          </a:p>
+          <a:p>
+            <a:pPr>
+              <a:spcBef>
+                <a:spcPts val="300"/>
+              </a:spcBef>
+              <a:defRPr sz="1500" b="1">
+                <a:solidFill>
+                  <a:srgbClr val="FFFFFF"/>
+                </a:solidFill>
+                <a:latin typeface="Trebuchet MS"/>
+              </a:defRPr>
+            </a:pPr>
+            <a:r>
+              <a:t>Naive Array Filtering</a:t>
+            </a:r>
+          </a:p>
+          <a:p>
+            <a:pPr>
+              <a:spcBef>
+                <a:spcPts val="1000"/>
+              </a:spcBef>
+            </a:pPr>
+            <a:r>
+              <a:rPr b="1" sz="1100">
                 <a:solidFill>
                   <a:srgbClr val="D5E0FF"/>
                 </a:solidFill>
-                <a:latin typeface="Trebuchet MS"/>
-              </a:defRPr>
-            </a:pPr>
-            <a:r>
-              <a:t>1. Naive Array Loops</a:t>
-            </a:r>
-          </a:p>
-        </p:txBody>
-      </p:sp>
-      <p:sp>
-        <p:nvSpPr>
-          <p:cNvPr id="8" name="TextBox 7"/>
-          <p:cNvSpPr txBox="1"/>
-          <p:nvPr/>
-        </p:nvSpPr>
-        <p:spPr>
-          <a:xfrm>
-            <a:off x="914400" y="2468880"/>
-            <a:ext cx="2971800" cy="3657600"/>
-          </a:xfrm>
-          <a:prstGeom prst="rect">
-            <a:avLst/>
-          </a:prstGeom>
-          <a:noFill/>
-        </p:spPr>
-        <p:txBody>
-          <a:bodyPr wrap="square">
-            <a:spAutoFit/>
-          </a:bodyPr>
-          <a:lstStyle/>
+              </a:rPr>
+              <a:t>• O(N · L) Linear Delay: </a:t>
+            </a:r>
+            <a:r>
+              <a:rPr sz="1050">
+                <a:solidFill>
+                  <a:srgbClr val="94A3B8"/>
+                </a:solidFill>
+              </a:rPr>
+              <a:t>Iterates through every single record and string character by character.</a:t>
+            </a:r>
+          </a:p>
           <a:p>
             <a:pPr>
-              <a:spcAft>
+              <a:spcBef>
                 <a:spcPts val="1000"/>
-              </a:spcAft>
-              <a:defRPr sz="1000" b="1">
-                <a:solidFill>
-                  <a:srgbClr val="F87171"/>
-                </a:solidFill>
-                <a:latin typeface="Consolas"/>
-              </a:defRPr>
-            </a:pPr>
-            <a:r>
-              <a:t>[ SLOW &amp; INEFFICIENT ]</a:t>
+              </a:spcBef>
+            </a:pPr>
+            <a:r>
+              <a:rPr b="1" sz="1100">
+                <a:solidFill>
+                  <a:srgbClr val="D5E0FF"/>
+                </a:solidFill>
+              </a:rPr>
+              <a:t>• Drops 60 FPS WebGL Frames: </a:t>
+            </a:r>
+            <a:r>
+              <a:rPr sz="1050">
+                <a:solidFill>
+                  <a:srgbClr val="94A3B8"/>
+                </a:solidFill>
+              </a:rPr>
+              <a:t>JavaScript runs on a single thread. Heavy loops freeze 3D canvas animations.</a:t>
             </a:r>
           </a:p>
           <a:p>
             <a:pPr>
-              <a:spcAft>
+              <a:spcBef>
                 <a:spcPts val="1000"/>
-              </a:spcAft>
-              <a:defRPr sz="1200">
+              </a:spcBef>
+            </a:pPr>
+            <a:r>
+              <a:rPr b="1" sz="1100">
+                <a:solidFill>
+                  <a:srgbClr val="D5E0FF"/>
+                </a:solidFill>
+              </a:rPr>
+              <a:t>• No Prefix Intelligence: </a:t>
+            </a:r>
+            <a:r>
+              <a:rPr sz="1050">
                 <a:solidFill>
                   <a:srgbClr val="94A3B8"/>
                 </a:solidFill>
-                <a:latin typeface="Calibri"/>
-              </a:defRPr>
-            </a:pPr>
-            <a:r>
-              <a:t>❌ O(N · L) Time Complexity:</a:t>
-            </a:r>
-            <a:br/>
-            <a:r>
-              <a:t>Scans every single item and letter one by one.</a:t>
-            </a:r>
-          </a:p>
-          <a:p>
-            <a:pPr>
-              <a:spcAft>
-                <a:spcPts val="1000"/>
-              </a:spcAft>
-              <a:defRPr sz="1200">
-                <a:solidFill>
-                  <a:srgbClr val="94A3B8"/>
-                </a:solidFill>
-                <a:latin typeface="Calibri"/>
-              </a:defRPr>
-            </a:pPr>
-            <a:r>
-              <a:t>❌ Drops Animation Frames:</a:t>
-            </a:r>
-            <a:br/>
-            <a:r>
-              <a:t>Freezes browser main thread, causing 3D WebGL scenes to lag.</a:t>
-            </a:r>
-          </a:p>
-          <a:p>
-            <a:pPr>
-              <a:defRPr sz="1200">
-                <a:solidFill>
-                  <a:srgbClr val="94A3B8"/>
-                </a:solidFill>
-                <a:latin typeface="Calibri"/>
-              </a:defRPr>
-            </a:pPr>
-            <a:r>
-              <a:t>❌ No Prefix Intelligence:</a:t>
-            </a:r>
-            <a:br/>
-            <a:r>
-              <a:t>Cannot autocomplete partial keystrokes like 'gam' ➔ 'games'.</a:t>
-            </a:r>
-          </a:p>
-        </p:txBody>
-      </p:sp>
-      <p:sp>
-        <p:nvSpPr>
-          <p:cNvPr id="9" name="Rounded Rectangle 8"/>
+              </a:rPr>
+              <a:t>Substring includes() cannot provide structured prefix autocomplete suggestions.</a:t>
+            </a:r>
+          </a:p>
+        </p:txBody>
+      </p:sp>
+      <p:sp>
+        <p:nvSpPr>
+          <p:cNvPr id="15" name="Snip Diagonal Corner Rectangle 14"/>
           <p:cNvSpPr/>
           <p:nvPr/>
         </p:nvSpPr>
         <p:spPr>
           <a:xfrm>
-            <a:off x="4416552" y="1828800"/>
-            <a:ext cx="3337560" cy="4480560"/>
-          </a:xfrm>
-          <a:prstGeom prst="roundRect">
+            <a:off x="4357116" y="1965960"/>
+            <a:ext cx="3474720" cy="4251960"/>
+          </a:xfrm>
+          <a:prstGeom prst="snip2DiagRect">
             <a:avLst/>
           </a:prstGeom>
           <a:solidFill>
-            <a:srgbClr val="07183A"/>
+            <a:srgbClr val="041029"/>
           </a:solidFill>
           <a:ln w="15240">
             <a:solidFill>
@@ -4023,14 +4726,14 @@
       </p:sp>
       <p:sp>
         <p:nvSpPr>
-          <p:cNvPr id="10" name="TextBox 9"/>
+          <p:cNvPr id="16" name="TextBox 15"/>
           <p:cNvSpPr txBox="1"/>
           <p:nvPr/>
         </p:nvSpPr>
         <p:spPr>
           <a:xfrm>
-            <a:off x="4599432" y="1965960"/>
-            <a:ext cx="2971800" cy="457200"/>
+            <a:off x="4539996" y="2103120"/>
+            <a:ext cx="3108960" cy="3931920"/>
           </a:xfrm>
           <a:prstGeom prst="rect">
             <a:avLst/>
@@ -4044,131 +4747,120 @@
           <a:lstStyle/>
           <a:p>
             <a:pPr>
-              <a:defRPr sz="1400" b="1">
+              <a:defRPr sz="950" b="1">
+                <a:solidFill>
+                  <a:srgbClr val="FBBF24"/>
+                </a:solidFill>
+                <a:latin typeface="Consolas"/>
+              </a:defRPr>
+            </a:pPr>
+            <a:r>
+              <a:t>[FAIL 02]  200ms–400ms LAG</a:t>
+            </a:r>
+          </a:p>
+          <a:p>
+            <a:pPr>
+              <a:spcBef>
+                <a:spcPts val="300"/>
+              </a:spcBef>
+              <a:defRPr sz="1500" b="1">
+                <a:solidFill>
+                  <a:srgbClr val="FFFFFF"/>
+                </a:solidFill>
+                <a:latin typeface="Trebuchet MS"/>
+              </a:defRPr>
+            </a:pPr>
+            <a:r>
+              <a:t>Cloud Search APIs</a:t>
+            </a:r>
+          </a:p>
+          <a:p>
+            <a:pPr>
+              <a:spcBef>
+                <a:spcPts val="1000"/>
+              </a:spcBef>
+            </a:pPr>
+            <a:r>
+              <a:rPr b="1" sz="1100">
                 <a:solidFill>
                   <a:srgbClr val="D5E0FF"/>
                 </a:solidFill>
-                <a:latin typeface="Trebuchet MS"/>
-              </a:defRPr>
-            </a:pPr>
-            <a:r>
-              <a:t>2. Cloud Search APIs</a:t>
-            </a:r>
-          </a:p>
-        </p:txBody>
-      </p:sp>
-      <p:sp>
-        <p:nvSpPr>
-          <p:cNvPr id="11" name="TextBox 10"/>
-          <p:cNvSpPr txBox="1"/>
-          <p:nvPr/>
-        </p:nvSpPr>
-        <p:spPr>
-          <a:xfrm>
-            <a:off x="4599432" y="2468880"/>
-            <a:ext cx="2971800" cy="3657600"/>
-          </a:xfrm>
-          <a:prstGeom prst="rect">
-            <a:avLst/>
-          </a:prstGeom>
-          <a:noFill/>
-        </p:spPr>
-        <p:txBody>
-          <a:bodyPr wrap="square">
-            <a:spAutoFit/>
-          </a:bodyPr>
-          <a:lstStyle/>
+              </a:rPr>
+              <a:t>• Physical Network Latency: </a:t>
+            </a:r>
+            <a:r>
+              <a:rPr sz="1050">
+                <a:solidFill>
+                  <a:srgbClr val="94A3B8"/>
+                </a:solidFill>
+              </a:rPr>
+              <a:t>Every single keystroke incurs an HTTP request roundtrip over cellular or Wi-Fi.</a:t>
+            </a:r>
+          </a:p>
           <a:p>
             <a:pPr>
-              <a:spcAft>
+              <a:spcBef>
                 <a:spcPts val="1000"/>
-              </a:spcAft>
-              <a:defRPr sz="1000" b="1">
-                <a:solidFill>
-                  <a:srgbClr val="FBBF24"/>
-                </a:solidFill>
-                <a:latin typeface="Consolas"/>
-              </a:defRPr>
-            </a:pPr>
-            <a:r>
-              <a:t>[ HIGH LATENCY &amp; COST ]</a:t>
+              </a:spcBef>
+            </a:pPr>
+            <a:r>
+              <a:rPr b="1" sz="1100">
+                <a:solidFill>
+                  <a:srgbClr val="D5E0FF"/>
+                </a:solidFill>
+              </a:rPr>
+              <a:t>• Catastrophic Offline Blackout: </a:t>
+            </a:r>
+            <a:r>
+              <a:rPr sz="1050">
+                <a:solidFill>
+                  <a:srgbClr val="94A3B8"/>
+                </a:solidFill>
+              </a:rPr>
+              <a:t>Completely breaks when offline, on airplanes, or during poor network status.</a:t>
             </a:r>
           </a:p>
           <a:p>
             <a:pPr>
-              <a:spcAft>
+              <a:spcBef>
                 <a:spcPts val="1000"/>
-              </a:spcAft>
-              <a:defRPr sz="1200">
+              </a:spcBef>
+            </a:pPr>
+            <a:r>
+              <a:rPr b="1" sz="1100">
+                <a:solidFill>
+                  <a:srgbClr val="D5E0FF"/>
+                </a:solidFill>
+              </a:rPr>
+              <a:t>• Quotas &amp; API Billing: </a:t>
+            </a:r>
+            <a:r>
+              <a:rPr sz="1050">
                 <a:solidFill>
                   <a:srgbClr val="94A3B8"/>
                 </a:solidFill>
-                <a:latin typeface="Calibri"/>
-              </a:defRPr>
-            </a:pPr>
-            <a:r>
-              <a:t>⚠️ 200ms–400ms Lag:</a:t>
-            </a:r>
-            <a:br/>
-            <a:r>
-              <a:t>Every keystroke makes an HTTP network roundtrip to a remote server.</a:t>
-            </a:r>
-          </a:p>
-          <a:p>
-            <a:pPr>
-              <a:spcAft>
-                <a:spcPts val="1000"/>
-              </a:spcAft>
-              <a:defRPr sz="1200">
-                <a:solidFill>
-                  <a:srgbClr val="94A3B8"/>
-                </a:solidFill>
-                <a:latin typeface="Calibri"/>
-              </a:defRPr>
-            </a:pPr>
-            <a:r>
-              <a:t>⚠️ Breaks Offline:</a:t>
-            </a:r>
-            <a:br/>
-            <a:r>
-              <a:t>If the user loses internet connection, the search bar completely fails.</a:t>
-            </a:r>
-          </a:p>
-          <a:p>
-            <a:pPr>
-              <a:defRPr sz="1200">
-                <a:solidFill>
-                  <a:srgbClr val="94A3B8"/>
-                </a:solidFill>
-                <a:latin typeface="Calibri"/>
-              </a:defRPr>
-            </a:pPr>
-            <a:r>
-              <a:t>⚠️ Paid Quotas &amp; Limits:</a:t>
-            </a:r>
-            <a:br/>
-            <a:r>
-              <a:t>Requires API keys, rate-limit handling, and recurring hosting costs.</a:t>
-            </a:r>
-          </a:p>
-        </p:txBody>
-      </p:sp>
-      <p:sp>
-        <p:nvSpPr>
-          <p:cNvPr id="12" name="Rounded Rectangle 11"/>
+              </a:rPr>
+              <a:t>Requires third-party API keys, billing quotas, and security token management.</a:t>
+            </a:r>
+          </a:p>
+        </p:txBody>
+      </p:sp>
+      <p:sp>
+        <p:nvSpPr>
+          <p:cNvPr id="17" name="Snip Diagonal Corner Rectangle 16"/>
           <p:cNvSpPr/>
           <p:nvPr/>
         </p:nvSpPr>
         <p:spPr>
           <a:xfrm>
-            <a:off x="8101584" y="1828800"/>
-            <a:ext cx="3337560" cy="4480560"/>
-          </a:xfrm>
-          <a:prstGeom prst="roundRect">
+            <a:off x="8119872" y="1965960"/>
+            <a:ext cx="3474720" cy="4251960"/>
+          </a:xfrm>
+          <a:prstGeom prst="snip2DiagRect">
             <a:avLst/>
           </a:prstGeom>
           <a:solidFill>
-            <a:srgbClr val="0E2D5F"/>
+            <a:srgbClr val="07183C"/>
           </a:solidFill>
           <a:ln w="15240">
             <a:solidFill>
@@ -4200,14 +4892,14 @@
       </p:sp>
       <p:sp>
         <p:nvSpPr>
-          <p:cNvPr id="13" name="TextBox 12"/>
+          <p:cNvPr id="18" name="TextBox 17"/>
           <p:cNvSpPr txBox="1"/>
           <p:nvPr/>
         </p:nvSpPr>
         <p:spPr>
           <a:xfrm>
-            <a:off x="8284464" y="1965960"/>
-            <a:ext cx="2971800" cy="457200"/>
+            <a:off x="8302752" y="2103120"/>
+            <a:ext cx="3108960" cy="3931920"/>
           </a:xfrm>
           <a:prstGeom prst="rect">
             <a:avLst/>
@@ -4221,111 +4913,100 @@
           <a:lstStyle/>
           <a:p>
             <a:pPr>
-              <a:defRPr sz="1400" b="1">
-                <a:solidFill>
-                  <a:srgbClr val="D5E0FF"/>
+              <a:defRPr sz="950" b="1">
+                <a:solidFill>
+                  <a:srgbClr val="34D399"/>
+                </a:solidFill>
+                <a:latin typeface="Consolas"/>
+              </a:defRPr>
+            </a:pPr>
+            <a:r>
+              <a:t>[CORE 01]  &lt; 1.5ms LATENCY</a:t>
+            </a:r>
+          </a:p>
+          <a:p>
+            <a:pPr>
+              <a:spcBef>
+                <a:spcPts val="300"/>
+              </a:spcBef>
+              <a:defRPr sz="1500" b="1">
+                <a:solidFill>
+                  <a:srgbClr val="FFFFFF"/>
                 </a:solidFill>
                 <a:latin typeface="Trebuchet MS"/>
               </a:defRPr>
             </a:pPr>
             <a:r>
-              <a:t>3. Our In-Memory DSA Engine</a:t>
-            </a:r>
-          </a:p>
-        </p:txBody>
-      </p:sp>
-      <p:sp>
-        <p:nvSpPr>
-          <p:cNvPr id="14" name="TextBox 13"/>
-          <p:cNvSpPr txBox="1"/>
-          <p:nvPr/>
-        </p:nvSpPr>
-        <p:spPr>
-          <a:xfrm>
-            <a:off x="8284464" y="2468880"/>
-            <a:ext cx="2971800" cy="3657600"/>
-          </a:xfrm>
-          <a:prstGeom prst="rect">
-            <a:avLst/>
-          </a:prstGeom>
-          <a:noFill/>
-        </p:spPr>
-        <p:txBody>
-          <a:bodyPr wrap="square">
-            <a:spAutoFit/>
-          </a:bodyPr>
-          <a:lstStyle/>
+              <a:t>In-Memory DSA Engine</a:t>
+            </a:r>
+          </a:p>
           <a:p>
             <a:pPr>
-              <a:spcAft>
+              <a:spcBef>
                 <a:spcPts val="1000"/>
-              </a:spcAft>
-              <a:defRPr sz="1000" b="1">
+              </a:spcBef>
+            </a:pPr>
+            <a:r>
+              <a:rPr b="1" sz="1100">
                 <a:solidFill>
                   <a:srgbClr val="34D399"/>
                 </a:solidFill>
-                <a:latin typeface="Consolas"/>
-              </a:defRPr>
-            </a:pPr>
-            <a:r>
-              <a:t>[ OPTIMAL SOLUTION ]</a:t>
+              </a:rPr>
+              <a:t>✔ Sub-Millisecond Speed: </a:t>
+            </a:r>
+            <a:r>
+              <a:rPr sz="1050">
+                <a:solidFill>
+                  <a:srgbClr val="FFFFFF"/>
+                </a:solidFill>
+              </a:rPr>
+              <a:t>Executes queries in &lt; 1.5ms directly inside client browser RAM.</a:t>
             </a:r>
           </a:p>
           <a:p>
             <a:pPr>
-              <a:spcAft>
+              <a:spcBef>
                 <a:spcPts val="1000"/>
-              </a:spcAft>
-              <a:defRPr sz="1200">
+              </a:spcBef>
+            </a:pPr>
+            <a:r>
+              <a:rPr b="1" sz="1100">
+                <a:solidFill>
+                  <a:srgbClr val="34D399"/>
+                </a:solidFill>
+              </a:rPr>
+              <a:t>✔ O(k) Prefix Trie: </a:t>
+            </a:r>
+            <a:r>
+              <a:rPr sz="1050">
                 <a:solidFill>
                   <a:srgbClr val="FFFFFF"/>
                 </a:solidFill>
-                <a:latin typeface="Calibri"/>
-              </a:defRPr>
-            </a:pPr>
-            <a:r>
-              <a:t>✔ Sub-Millisecond Speed:</a:t>
-            </a:r>
-            <a:br/>
-            <a:r>
-              <a:t>Executes in &lt; 1.5ms directly inside browser RAM.</a:t>
+              </a:rPr>
+              <a:t>Lookup time depends strictly on token length k, completely independent of database size N!</a:t>
             </a:r>
           </a:p>
           <a:p>
             <a:pPr>
-              <a:spcAft>
+              <a:spcBef>
                 <a:spcPts val="1000"/>
-              </a:spcAft>
-              <a:defRPr sz="1200">
+              </a:spcBef>
+            </a:pPr>
+            <a:r>
+              <a:rPr b="1" sz="1100">
+                <a:solidFill>
+                  <a:srgbClr val="34D399"/>
+                </a:solidFill>
+              </a:rPr>
+              <a:t>✔ Set Intersection Logic: </a:t>
+            </a:r>
+            <a:r>
+              <a:rPr sz="1050">
                 <a:solidFill>
                   <a:srgbClr val="FFFFFF"/>
                 </a:solidFill>
-                <a:latin typeface="Calibri"/>
-              </a:defRPr>
-            </a:pPr>
-            <a:r>
-              <a:t>✔ O(k) Prefix Trie:</a:t>
-            </a:r>
-            <a:br/>
-            <a:r>
-              <a:t>Autocomplete speed depends only on token length, not dataset size!</a:t>
-            </a:r>
-          </a:p>
-          <a:p>
-            <a:pPr>
-              <a:defRPr sz="1200">
-                <a:solidFill>
-                  <a:srgbClr val="FFFFFF"/>
-                </a:solidFill>
-                <a:latin typeface="Calibri"/>
-              </a:defRPr>
-            </a:pPr>
-            <a:r>
-              <a:t>✔ Inverted Index Intersect:</a:t>
-            </a:r>
-            <a:br/>
-            <a:r>
-              <a:t>Instant multi-tag boolean queries (e.g., #unity AND #physics).</a:t>
+              </a:rPr>
+              <a:t>Inverted posting lists instantly answer multi-tag queries (#unity AND #physics).</a:t>
             </a:r>
           </a:p>
         </p:txBody>
@@ -4348,12 +5029,20 @@
         <p:nvPr/>
       </p:nvGrpSpPr>
       <p:grpSpPr/>
-      <p:sp>
-        <p:nvSpPr>
-          <p:cNvPr id="2" name="Rectangle 1"/>
-          <p:cNvSpPr/>
-          <p:nvPr/>
-        </p:nvSpPr>
+      <p:pic>
+        <p:nvPicPr>
+          <p:cNvPr id="2" name="Picture 1" descr="acedevs_hud_bg.png"/>
+          <p:cNvPicPr>
+            <a:picLocks noChangeAspect="1"/>
+          </p:cNvPicPr>
+          <p:nvPr/>
+        </p:nvPicPr>
+        <p:blipFill>
+          <a:blip r:embed="rId2"/>
+          <a:stretch>
+            <a:fillRect/>
+          </a:stretch>
+        </p:blipFill>
         <p:spPr>
           <a:xfrm>
             <a:off x="0" y="0"/>
@@ -4362,8 +5051,175 @@
           <a:prstGeom prst="rect">
             <a:avLst/>
           </a:prstGeom>
+        </p:spPr>
+      </p:pic>
+      <p:sp>
+        <p:nvSpPr>
+          <p:cNvPr id="3" name="TextBox 2"/>
+          <p:cNvSpPr txBox="1"/>
+          <p:nvPr/>
+        </p:nvSpPr>
+        <p:spPr>
+          <a:xfrm>
+            <a:off x="594360" y="256032"/>
+            <a:ext cx="2286000" cy="365760"/>
+          </a:xfrm>
+          <a:prstGeom prst="rect">
+            <a:avLst/>
+          </a:prstGeom>
+          <a:noFill/>
+        </p:spPr>
+        <p:txBody>
+          <a:bodyPr wrap="none">
+            <a:spAutoFit/>
+          </a:bodyPr>
+          <a:lstStyle/>
+          <a:p>
+            <a:r>
+              <a:rPr sz="1300" b="1">
+                <a:solidFill>
+                  <a:srgbClr val="8FADFF"/>
+                </a:solidFill>
+                <a:latin typeface="Trebuchet MS"/>
+              </a:rPr>
+              <a:t>▲ </a:t>
+            </a:r>
+            <a:r>
+              <a:rPr sz="1300" b="1">
+                <a:solidFill>
+                  <a:srgbClr val="FFFFFF"/>
+                </a:solidFill>
+                <a:latin typeface="Trebuchet MS"/>
+              </a:rPr>
+              <a:t>ACEDEVS</a:t>
+            </a:r>
+          </a:p>
+        </p:txBody>
+      </p:sp>
+      <p:sp>
+        <p:nvSpPr>
+          <p:cNvPr id="4" name="TextBox 3"/>
+          <p:cNvSpPr txBox="1"/>
+          <p:nvPr/>
+        </p:nvSpPr>
+        <p:spPr>
+          <a:xfrm>
+            <a:off x="3017520" y="256032"/>
+            <a:ext cx="5486400" cy="365760"/>
+          </a:xfrm>
+          <a:prstGeom prst="rect">
+            <a:avLst/>
+          </a:prstGeom>
+          <a:noFill/>
+        </p:spPr>
+        <p:txBody>
+          <a:bodyPr wrap="none">
+            <a:spAutoFit/>
+          </a:bodyPr>
+          <a:lstStyle/>
+          <a:p>
+            <a:pPr>
+              <a:defRPr sz="900">
+                <a:solidFill>
+                  <a:srgbClr val="94A3B8"/>
+                </a:solidFill>
+                <a:latin typeface="Consolas"/>
+              </a:defRPr>
+            </a:pPr>
+            <a:r>
+              <a:t>SHOWCASE [02]    TEAM [02]    REPOSITORIES [04]    BLOG [05]</a:t>
+            </a:r>
+          </a:p>
+        </p:txBody>
+      </p:sp>
+      <p:sp>
+        <p:nvSpPr>
+          <p:cNvPr id="5" name="TextBox 4"/>
+          <p:cNvSpPr txBox="1"/>
+          <p:nvPr/>
+        </p:nvSpPr>
+        <p:spPr>
+          <a:xfrm>
+            <a:off x="8595360" y="256032"/>
+            <a:ext cx="3017520" cy="365760"/>
+          </a:xfrm>
+          <a:prstGeom prst="rect">
+            <a:avLst/>
+          </a:prstGeom>
+          <a:noFill/>
+        </p:spPr>
+        <p:txBody>
+          <a:bodyPr wrap="none">
+            <a:spAutoFit/>
+          </a:bodyPr>
+          <a:lstStyle/>
+          <a:p>
+            <a:pPr algn="r">
+              <a:defRPr sz="900" b="1">
+                <a:solidFill>
+                  <a:srgbClr val="D5E0FF"/>
+                </a:solidFill>
+                <a:latin typeface="Consolas"/>
+              </a:defRPr>
+            </a:pPr>
+            <a:r>
+              <a:t>SEARCH [⌘K]    SLIDE [03/06]</a:t>
+            </a:r>
+          </a:p>
+        </p:txBody>
+      </p:sp>
+      <p:sp>
+        <p:nvSpPr>
+          <p:cNvPr id="6" name="TextBox 5"/>
+          <p:cNvSpPr txBox="1"/>
+          <p:nvPr/>
+        </p:nvSpPr>
+        <p:spPr>
+          <a:xfrm>
+            <a:off x="594360" y="658368"/>
+            <a:ext cx="10972800" cy="274320"/>
+          </a:xfrm>
+          <a:prstGeom prst="rect">
+            <a:avLst/>
+          </a:prstGeom>
+          <a:noFill/>
+        </p:spPr>
+        <p:txBody>
+          <a:bodyPr wrap="none">
+            <a:spAutoFit/>
+          </a:bodyPr>
+          <a:lstStyle/>
+          <a:p>
+            <a:pPr algn="ctr">
+              <a:defRPr sz="850">
+                <a:solidFill>
+                  <a:srgbClr val="94A3B8"/>
+                </a:solidFill>
+                <a:latin typeface="Consolas"/>
+              </a:defRPr>
+            </a:pPr>
+            <a:r>
+              <a:t>SYS: ONLINE // SECTOR: DSA-ENGINE  |  COORDINATES: 20.2961° N, 85.8245° E  |  AZIMUTH: 125°  |  ■ V1.0</a:t>
+            </a:r>
+          </a:p>
+        </p:txBody>
+      </p:sp>
+      <p:sp>
+        <p:nvSpPr>
+          <p:cNvPr id="7" name="Rectangle 6"/>
+          <p:cNvSpPr/>
+          <p:nvPr/>
+        </p:nvSpPr>
+        <p:spPr>
+          <a:xfrm>
+            <a:off x="594360" y="960120"/>
+            <a:ext cx="11002975" cy="13716"/>
+          </a:xfrm>
+          <a:prstGeom prst="rect">
+            <a:avLst/>
+          </a:prstGeom>
           <a:solidFill>
-            <a:srgbClr val="020A19"/>
+            <a:srgbClr val="264073"/>
           </a:solidFill>
           <a:ln>
             <a:noFill/>
@@ -4393,25 +5249,23 @@
       </p:sp>
       <p:sp>
         <p:nvSpPr>
-          <p:cNvPr id="3" name="Rounded Rectangle 2"/>
+          <p:cNvPr id="8" name="Rectangle 7"/>
           <p:cNvSpPr/>
           <p:nvPr/>
         </p:nvSpPr>
         <p:spPr>
           <a:xfrm>
-            <a:off x="731520" y="384048"/>
-            <a:ext cx="3108960" cy="292608"/>
-          </a:xfrm>
-          <a:prstGeom prst="roundRect">
+            <a:off x="594360" y="6400800"/>
+            <a:ext cx="11002975" cy="13716"/>
+          </a:xfrm>
+          <a:prstGeom prst="rect">
             <a:avLst/>
           </a:prstGeom>
           <a:solidFill>
-            <a:srgbClr val="0B214D"/>
+            <a:srgbClr val="264073"/>
           </a:solidFill>
-          <a:ln w="12700">
-            <a:solidFill>
-              <a:srgbClr val="60A5FA"/>
-            </a:solidFill>
+          <a:ln>
+            <a:noFill/>
           </a:ln>
         </p:spPr>
         <p:style>
@@ -4433,28 +5287,19 @@
           <a:lstStyle/>
           <a:p>
             <a:pPr algn="ctr"/>
-            <a:r>
-              <a:rPr sz="950" b="1">
-                <a:solidFill>
-                  <a:srgbClr val="60A5FA"/>
-                </a:solidFill>
-                <a:latin typeface="Consolas"/>
-              </a:rPr>
-              <a:t>// COMPONENT 01</a:t>
-            </a:r>
-          </a:p>
-        </p:txBody>
-      </p:sp>
-      <p:sp>
-        <p:nvSpPr>
-          <p:cNvPr id="4" name="TextBox 3"/>
+          </a:p>
+        </p:txBody>
+      </p:sp>
+      <p:sp>
+        <p:nvSpPr>
+          <p:cNvPr id="9" name="TextBox 8"/>
           <p:cNvSpPr txBox="1"/>
           <p:nvPr/>
         </p:nvSpPr>
         <p:spPr>
           <a:xfrm>
-            <a:off x="685800" y="731520"/>
-            <a:ext cx="10789920" cy="731520"/>
+            <a:off x="594360" y="6446520"/>
+            <a:ext cx="4114800" cy="320040"/>
           </a:xfrm>
           <a:prstGeom prst="rect">
             <a:avLst/>
@@ -4462,60 +5307,46 @@
           <a:noFill/>
         </p:spPr>
         <p:txBody>
-          <a:bodyPr wrap="square">
+          <a:bodyPr wrap="none">
             <a:spAutoFit/>
           </a:bodyPr>
           <a:lstStyle/>
           <a:p>
             <a:pPr>
-              <a:defRPr sz="2400" b="1">
-                <a:solidFill>
-                  <a:srgbClr val="D5E0FF"/>
-                </a:solidFill>
-                <a:latin typeface="Trebuchet MS"/>
-              </a:defRPr>
-            </a:pPr>
-            <a:r>
-              <a:t>Prefix Trie: Instant O(k) Autocomplete</a:t>
-            </a:r>
-          </a:p>
-          <a:p>
-            <a:pPr>
-              <a:spcBef>
-                <a:spcPts val="300"/>
-              </a:spcBef>
-              <a:defRPr sz="1300">
+              <a:defRPr sz="850">
                 <a:solidFill>
                   <a:srgbClr val="94A3B8"/>
                 </a:solidFill>
-                <a:latin typeface="Calibri"/>
-              </a:defRPr>
-            </a:pPr>
-            <a:r>
-              <a:t>Visualizing how character-by-character tree branching delivers sub-millisecond search suggestions.</a:t>
-            </a:r>
-          </a:p>
-        </p:txBody>
-      </p:sp>
-      <p:sp>
-        <p:nvSpPr>
-          <p:cNvPr id="5" name="Rectangle 4"/>
+                <a:latin typeface="Consolas"/>
+              </a:defRPr>
+            </a:pPr>
+            <a:r>
+              <a:t>ZOOM 1.0X  500M    ∿ SOUND [ON] // 60 FPS</a:t>
+            </a:r>
+          </a:p>
+        </p:txBody>
+      </p:sp>
+      <p:sp>
+        <p:nvSpPr>
+          <p:cNvPr id="10" name="Snip Diagonal Corner Rectangle 9"/>
           <p:cNvSpPr/>
           <p:nvPr/>
         </p:nvSpPr>
         <p:spPr>
           <a:xfrm>
-            <a:off x="731520" y="1536192"/>
-            <a:ext cx="10728655" cy="13716"/>
-          </a:xfrm>
-          <a:prstGeom prst="rect">
+            <a:off x="4663440" y="6446520"/>
+            <a:ext cx="2834640" cy="256032"/>
+          </a:xfrm>
+          <a:prstGeom prst="snip2DiagRect">
             <a:avLst/>
           </a:prstGeom>
           <a:solidFill>
-            <a:srgbClr val="264D8A"/>
+            <a:srgbClr val="041029"/>
           </a:solidFill>
-          <a:ln>
-            <a:noFill/>
+          <a:ln w="12700">
+            <a:solidFill>
+              <a:srgbClr val="264073"/>
+            </a:solidFill>
           </a:ln>
         </p:spPr>
         <p:style>
@@ -4537,29 +5368,140 @@
           <a:lstStyle/>
           <a:p>
             <a:pPr algn="ctr"/>
-          </a:p>
-        </p:txBody>
-      </p:sp>
-      <p:sp>
-        <p:nvSpPr>
-          <p:cNvPr id="6" name="Rounded Rectangle 5"/>
+            <a:r>
+              <a:rPr sz="800">
+                <a:solidFill>
+                  <a:srgbClr val="D5E0FF"/>
+                </a:solidFill>
+                <a:latin typeface="Consolas"/>
+              </a:rPr>
+              <a:t>◎ COMPONENT 01 // PREFIX TRIE ◎</a:t>
+            </a:r>
+          </a:p>
+        </p:txBody>
+      </p:sp>
+      <p:sp>
+        <p:nvSpPr>
+          <p:cNvPr id="11" name="TextBox 10"/>
+          <p:cNvSpPr txBox="1"/>
+          <p:nvPr/>
+        </p:nvSpPr>
+        <p:spPr>
+          <a:xfrm>
+            <a:off x="8412480" y="6446520"/>
+            <a:ext cx="3154680" cy="320040"/>
+          </a:xfrm>
+          <a:prstGeom prst="rect">
+            <a:avLst/>
+          </a:prstGeom>
+          <a:noFill/>
+        </p:spPr>
+        <p:txBody>
+          <a:bodyPr wrap="none">
+            <a:spAutoFit/>
+          </a:bodyPr>
+          <a:lstStyle/>
+          <a:p>
+            <a:pPr algn="r">
+              <a:defRPr sz="850" b="1">
+                <a:solidFill>
+                  <a:srgbClr val="8FADFF"/>
+                </a:solidFill>
+                <a:latin typeface="Consolas"/>
+              </a:defRPr>
+            </a:pPr>
+            <a:r>
+              <a:t>FILTERS [00]    ◎ 125° N</a:t>
+            </a:r>
+          </a:p>
+        </p:txBody>
+      </p:sp>
+      <p:sp>
+        <p:nvSpPr>
+          <p:cNvPr id="12" name="TextBox 11"/>
+          <p:cNvSpPr txBox="1"/>
+          <p:nvPr/>
+        </p:nvSpPr>
+        <p:spPr>
+          <a:xfrm>
+            <a:off x="594360" y="1051560"/>
+            <a:ext cx="10972800" cy="777240"/>
+          </a:xfrm>
+          <a:prstGeom prst="rect">
+            <a:avLst/>
+          </a:prstGeom>
+          <a:noFill/>
+        </p:spPr>
+        <p:txBody>
+          <a:bodyPr wrap="square">
+            <a:spAutoFit/>
+          </a:bodyPr>
+          <a:lstStyle/>
+          <a:p>
+            <a:r>
+              <a:rPr sz="950" b="1">
+                <a:solidFill>
+                  <a:srgbClr val="8FADFF"/>
+                </a:solidFill>
+                <a:latin typeface="Consolas"/>
+              </a:rPr>
+              <a:t>// DATA STRUCTURE 01  </a:t>
+            </a:r>
+          </a:p>
+          <a:p>
+            <a:pPr>
+              <a:spcBef>
+                <a:spcPts val="200"/>
+              </a:spcBef>
+              <a:defRPr sz="2100" b="1">
+                <a:solidFill>
+                  <a:srgbClr val="FFFFFF"/>
+                </a:solidFill>
+                <a:latin typeface="Trebuchet MS"/>
+              </a:defRPr>
+            </a:pPr>
+            <a:r>
+              <a:t>Prefix Trie: Instant O(k) Character Traversal</a:t>
+            </a:r>
+          </a:p>
+          <a:p>
+            <a:pPr>
+              <a:spcBef>
+                <a:spcPts val="200"/>
+              </a:spcBef>
+              <a:defRPr sz="1150">
+                <a:solidFill>
+                  <a:srgbClr val="94A3B8"/>
+                </a:solidFill>
+                <a:latin typeface="Calibri"/>
+              </a:defRPr>
+            </a:pPr>
+            <a:r>
+              <a:t>How root-to-leaf character branching delivers instant search suggestions without database scanning.</a:t>
+            </a:r>
+          </a:p>
+        </p:txBody>
+      </p:sp>
+      <p:sp>
+        <p:nvSpPr>
+          <p:cNvPr id="13" name="Snip Diagonal Corner Rectangle 12"/>
           <p:cNvSpPr/>
           <p:nvPr/>
         </p:nvSpPr>
         <p:spPr>
           <a:xfrm>
-            <a:off x="731520" y="1828800"/>
-            <a:ext cx="6217920" cy="4480560"/>
-          </a:xfrm>
-          <a:prstGeom prst="roundRect">
+            <a:off x="594360" y="1965960"/>
+            <a:ext cx="6217920" cy="4251960"/>
+          </a:xfrm>
+          <a:prstGeom prst="snip2DiagRect">
             <a:avLst/>
           </a:prstGeom>
           <a:solidFill>
-            <a:srgbClr val="07183A"/>
+            <a:srgbClr val="041029"/>
           </a:solidFill>
           <a:ln w="15240">
             <a:solidFill>
-              <a:srgbClr val="60A5FA"/>
+              <a:srgbClr val="264073"/>
             </a:solidFill>
           </a:ln>
         </p:spPr>
@@ -4587,14 +5529,14 @@
       </p:sp>
       <p:sp>
         <p:nvSpPr>
-          <p:cNvPr id="7" name="TextBox 6"/>
+          <p:cNvPr id="14" name="TextBox 13"/>
           <p:cNvSpPr txBox="1"/>
           <p:nvPr/>
         </p:nvSpPr>
         <p:spPr>
           <a:xfrm>
-            <a:off x="914400" y="1965960"/>
-            <a:ext cx="5852159" cy="457200"/>
+            <a:off x="777240" y="2057400"/>
+            <a:ext cx="5852160" cy="365760"/>
           </a:xfrm>
           <a:prstGeom prst="rect">
             <a:avLst/>
@@ -4602,45 +5544,360 @@
           <a:noFill/>
         </p:spPr>
         <p:txBody>
-          <a:bodyPr wrap="square">
+          <a:bodyPr wrap="none">
             <a:spAutoFit/>
           </a:bodyPr>
           <a:lstStyle/>
           <a:p>
             <a:pPr>
-              <a:defRPr sz="1400" b="1">
-                <a:solidFill>
-                  <a:srgbClr val="D5E0FF"/>
-                </a:solidFill>
-                <a:latin typeface="Trebuchet MS"/>
-              </a:defRPr>
-            </a:pPr>
-            <a:r>
-              <a:t>Trie Tree Structure Diagram</a:t>
-            </a:r>
-          </a:p>
-        </p:txBody>
-      </p:sp>
-      <p:sp>
-        <p:nvSpPr>
-          <p:cNvPr id="8" name="Oval 7"/>
+              <a:defRPr sz="900" b="1">
+                <a:solidFill>
+                  <a:srgbClr val="8FADFF"/>
+                </a:solidFill>
+                <a:latin typeface="Consolas"/>
+              </a:defRPr>
+            </a:pPr>
+            <a:r>
+              <a:t>[DIAGRAM] PREFIX TREE PATHWAY FOR "gam" QUERY</a:t>
+            </a:r>
+          </a:p>
+        </p:txBody>
+      </p:sp>
+      <p:cxnSp>
+        <p:nvCxnSpPr>
+          <p:cNvPr id="15" name="Connector 14"/>
+          <p:cNvCxnSpPr/>
+          <p:nvPr/>
+        </p:nvCxnSpPr>
+        <p:spPr>
+          <a:xfrm flipH="1">
+            <a:off x="2354580" y="2766060"/>
+            <a:ext cx="1280160" cy="731520"/>
+          </a:xfrm>
+          <a:prstGeom prst="line">
+            <a:avLst/>
+          </a:prstGeom>
+          <a:ln w="25400">
+            <a:solidFill>
+              <a:srgbClr val="34D399"/>
+            </a:solidFill>
+          </a:ln>
+        </p:spPr>
+        <p:style>
+          <a:lnRef idx="2">
+            <a:schemeClr val="accent1"/>
+          </a:lnRef>
+          <a:fillRef idx="0">
+            <a:schemeClr val="accent1"/>
+          </a:fillRef>
+          <a:effectRef idx="1">
+            <a:schemeClr val="accent1"/>
+          </a:effectRef>
+          <a:fontRef idx="minor">
+            <a:schemeClr val="tx1"/>
+          </a:fontRef>
+        </p:style>
+      </p:cxnSp>
+      <p:cxnSp>
+        <p:nvCxnSpPr>
+          <p:cNvPr id="16" name="Connector 15"/>
+          <p:cNvCxnSpPr/>
+          <p:nvPr/>
+        </p:nvCxnSpPr>
+        <p:spPr>
+          <a:xfrm>
+            <a:off x="3634740" y="2766060"/>
+            <a:ext cx="1280160" cy="731520"/>
+          </a:xfrm>
+          <a:prstGeom prst="line">
+            <a:avLst/>
+          </a:prstGeom>
+          <a:ln w="15240">
+            <a:solidFill>
+              <a:srgbClr val="264073"/>
+            </a:solidFill>
+          </a:ln>
+        </p:spPr>
+        <p:style>
+          <a:lnRef idx="2">
+            <a:schemeClr val="accent1"/>
+          </a:lnRef>
+          <a:fillRef idx="0">
+            <a:schemeClr val="accent1"/>
+          </a:fillRef>
+          <a:effectRef idx="1">
+            <a:schemeClr val="accent1"/>
+          </a:effectRef>
+          <a:fontRef idx="minor">
+            <a:schemeClr val="tx1"/>
+          </a:fontRef>
+        </p:style>
+      </p:cxnSp>
+      <p:cxnSp>
+        <p:nvCxnSpPr>
+          <p:cNvPr id="17" name="Connector 16"/>
+          <p:cNvCxnSpPr/>
+          <p:nvPr/>
+        </p:nvCxnSpPr>
+        <p:spPr>
+          <a:xfrm>
+            <a:off x="2354580" y="3497580"/>
+            <a:ext cx="0" cy="731520"/>
+          </a:xfrm>
+          <a:prstGeom prst="line">
+            <a:avLst/>
+          </a:prstGeom>
+          <a:ln w="25400">
+            <a:solidFill>
+              <a:srgbClr val="34D399"/>
+            </a:solidFill>
+          </a:ln>
+        </p:spPr>
+        <p:style>
+          <a:lnRef idx="2">
+            <a:schemeClr val="accent1"/>
+          </a:lnRef>
+          <a:fillRef idx="0">
+            <a:schemeClr val="accent1"/>
+          </a:fillRef>
+          <a:effectRef idx="1">
+            <a:schemeClr val="accent1"/>
+          </a:effectRef>
+          <a:fontRef idx="minor">
+            <a:schemeClr val="tx1"/>
+          </a:fontRef>
+        </p:style>
+      </p:cxnSp>
+      <p:cxnSp>
+        <p:nvCxnSpPr>
+          <p:cNvPr id="18" name="Connector 17"/>
+          <p:cNvCxnSpPr/>
+          <p:nvPr/>
+        </p:nvCxnSpPr>
+        <p:spPr>
+          <a:xfrm>
+            <a:off x="4914900" y="3497580"/>
+            <a:ext cx="0" cy="731520"/>
+          </a:xfrm>
+          <a:prstGeom prst="line">
+            <a:avLst/>
+          </a:prstGeom>
+          <a:ln w="15240">
+            <a:solidFill>
+              <a:srgbClr val="264073"/>
+            </a:solidFill>
+          </a:ln>
+        </p:spPr>
+        <p:style>
+          <a:lnRef idx="2">
+            <a:schemeClr val="accent1"/>
+          </a:lnRef>
+          <a:fillRef idx="0">
+            <a:schemeClr val="accent1"/>
+          </a:fillRef>
+          <a:effectRef idx="1">
+            <a:schemeClr val="accent1"/>
+          </a:effectRef>
+          <a:fontRef idx="minor">
+            <a:schemeClr val="tx1"/>
+          </a:fontRef>
+        </p:style>
+      </p:cxnSp>
+      <p:cxnSp>
+        <p:nvCxnSpPr>
+          <p:cNvPr id="19" name="Connector 18"/>
+          <p:cNvCxnSpPr/>
+          <p:nvPr/>
+        </p:nvCxnSpPr>
+        <p:spPr>
+          <a:xfrm>
+            <a:off x="2354580" y="4229100"/>
+            <a:ext cx="0" cy="731520"/>
+          </a:xfrm>
+          <a:prstGeom prst="line">
+            <a:avLst/>
+          </a:prstGeom>
+          <a:ln w="25400">
+            <a:solidFill>
+              <a:srgbClr val="34D399"/>
+            </a:solidFill>
+          </a:ln>
+        </p:spPr>
+        <p:style>
+          <a:lnRef idx="2">
+            <a:schemeClr val="accent1"/>
+          </a:lnRef>
+          <a:fillRef idx="0">
+            <a:schemeClr val="accent1"/>
+          </a:fillRef>
+          <a:effectRef idx="1">
+            <a:schemeClr val="accent1"/>
+          </a:effectRef>
+          <a:fontRef idx="minor">
+            <a:schemeClr val="tx1"/>
+          </a:fontRef>
+        </p:style>
+      </p:cxnSp>
+      <p:cxnSp>
+        <p:nvCxnSpPr>
+          <p:cNvPr id="20" name="Connector 19"/>
+          <p:cNvCxnSpPr/>
+          <p:nvPr/>
+        </p:nvCxnSpPr>
+        <p:spPr>
+          <a:xfrm>
+            <a:off x="4914900" y="4229100"/>
+            <a:ext cx="0" cy="731520"/>
+          </a:xfrm>
+          <a:prstGeom prst="line">
+            <a:avLst/>
+          </a:prstGeom>
+          <a:ln w="15240">
+            <a:solidFill>
+              <a:srgbClr val="264073"/>
+            </a:solidFill>
+          </a:ln>
+        </p:spPr>
+        <p:style>
+          <a:lnRef idx="2">
+            <a:schemeClr val="accent1"/>
+          </a:lnRef>
+          <a:fillRef idx="0">
+            <a:schemeClr val="accent1"/>
+          </a:fillRef>
+          <a:effectRef idx="1">
+            <a:schemeClr val="accent1"/>
+          </a:effectRef>
+          <a:fontRef idx="minor">
+            <a:schemeClr val="tx1"/>
+          </a:fontRef>
+        </p:style>
+      </p:cxnSp>
+      <p:cxnSp>
+        <p:nvCxnSpPr>
+          <p:cNvPr id="21" name="Connector 20"/>
+          <p:cNvCxnSpPr/>
+          <p:nvPr/>
+        </p:nvCxnSpPr>
+        <p:spPr>
+          <a:xfrm flipH="1">
+            <a:off x="1714500" y="4960620"/>
+            <a:ext cx="640080" cy="731520"/>
+          </a:xfrm>
+          <a:prstGeom prst="line">
+            <a:avLst/>
+          </a:prstGeom>
+          <a:ln w="25400">
+            <a:solidFill>
+              <a:srgbClr val="34D399"/>
+            </a:solidFill>
+          </a:ln>
+        </p:spPr>
+        <p:style>
+          <a:lnRef idx="2">
+            <a:schemeClr val="accent1"/>
+          </a:lnRef>
+          <a:fillRef idx="0">
+            <a:schemeClr val="accent1"/>
+          </a:fillRef>
+          <a:effectRef idx="1">
+            <a:schemeClr val="accent1"/>
+          </a:effectRef>
+          <a:fontRef idx="minor">
+            <a:schemeClr val="tx1"/>
+          </a:fontRef>
+        </p:style>
+      </p:cxnSp>
+      <p:cxnSp>
+        <p:nvCxnSpPr>
+          <p:cNvPr id="22" name="Connector 21"/>
+          <p:cNvCxnSpPr/>
+          <p:nvPr/>
+        </p:nvCxnSpPr>
+        <p:spPr>
+          <a:xfrm>
+            <a:off x="2354580" y="4960620"/>
+            <a:ext cx="640080" cy="731520"/>
+          </a:xfrm>
+          <a:prstGeom prst="line">
+            <a:avLst/>
+          </a:prstGeom>
+          <a:ln w="25400">
+            <a:solidFill>
+              <a:srgbClr val="34D399"/>
+            </a:solidFill>
+          </a:ln>
+        </p:spPr>
+        <p:style>
+          <a:lnRef idx="2">
+            <a:schemeClr val="accent1"/>
+          </a:lnRef>
+          <a:fillRef idx="0">
+            <a:schemeClr val="accent1"/>
+          </a:fillRef>
+          <a:effectRef idx="1">
+            <a:schemeClr val="accent1"/>
+          </a:effectRef>
+          <a:fontRef idx="minor">
+            <a:schemeClr val="tx1"/>
+          </a:fontRef>
+        </p:style>
+      </p:cxnSp>
+      <p:cxnSp>
+        <p:nvCxnSpPr>
+          <p:cNvPr id="23" name="Connector 22"/>
+          <p:cNvCxnSpPr/>
+          <p:nvPr/>
+        </p:nvCxnSpPr>
+        <p:spPr>
+          <a:xfrm>
+            <a:off x="4914900" y="4960620"/>
+            <a:ext cx="0" cy="731520"/>
+          </a:xfrm>
+          <a:prstGeom prst="line">
+            <a:avLst/>
+          </a:prstGeom>
+          <a:ln w="15240">
+            <a:solidFill>
+              <a:srgbClr val="264073"/>
+            </a:solidFill>
+          </a:ln>
+        </p:spPr>
+        <p:style>
+          <a:lnRef idx="2">
+            <a:schemeClr val="accent1"/>
+          </a:lnRef>
+          <a:fillRef idx="0">
+            <a:schemeClr val="accent1"/>
+          </a:fillRef>
+          <a:effectRef idx="1">
+            <a:schemeClr val="accent1"/>
+          </a:effectRef>
+          <a:fontRef idx="minor">
+            <a:schemeClr val="tx1"/>
+          </a:fontRef>
+        </p:style>
+      </p:cxnSp>
+      <p:sp>
+        <p:nvSpPr>
+          <p:cNvPr id="24" name="Oval 23"/>
           <p:cNvSpPr/>
           <p:nvPr/>
         </p:nvSpPr>
         <p:spPr>
           <a:xfrm>
-            <a:off x="3474720" y="2468880"/>
+            <a:off x="3383280" y="2514600"/>
             <a:ext cx="502920" cy="502920"/>
           </a:xfrm>
           <a:prstGeom prst="ellipse">
             <a:avLst/>
           </a:prstGeom>
           <a:solidFill>
-            <a:srgbClr val="0B214D"/>
+            <a:srgbClr val="041029"/>
           </a:solidFill>
-          <a:ln w="19050">
+          <a:ln w="12700">
             <a:solidFill>
-              <a:srgbClr val="60A5FA"/>
+              <a:srgbClr val="264073"/>
             </a:solidFill>
           </a:ln>
         </p:spPr>
@@ -4664,7 +5921,7 @@
           <a:p>
             <a:pPr algn="ctr"/>
             <a:r>
-              <a:rPr sz="1300" b="1">
+              <a:rPr sz="1200" b="1">
                 <a:solidFill>
                   <a:srgbClr val="FFFFFF"/>
                 </a:solidFill>
@@ -4677,14 +5934,14 @@
       </p:sp>
       <p:sp>
         <p:nvSpPr>
-          <p:cNvPr id="9" name="TextBox 8"/>
+          <p:cNvPr id="25" name="TextBox 24"/>
           <p:cNvSpPr txBox="1"/>
           <p:nvPr/>
         </p:nvSpPr>
         <p:spPr>
           <a:xfrm>
-            <a:off x="3017520" y="2971800"/>
-            <a:ext cx="1417320" cy="320040"/>
+            <a:off x="3017520" y="3017520"/>
+            <a:ext cx="1234440" cy="320040"/>
           </a:xfrm>
           <a:prstGeom prst="rect">
             <a:avLst/>
@@ -4692,14 +5949,14 @@
           <a:noFill/>
         </p:spPr>
         <p:txBody>
-          <a:bodyPr wrap="square">
+          <a:bodyPr wrap="none">
             <a:spAutoFit/>
           </a:bodyPr>
           <a:lstStyle/>
           <a:p>
             <a:pPr algn="ctr"/>
             <a:r>
-              <a:rPr sz="950" b="1">
+              <a:rPr sz="900" b="1">
                 <a:solidFill>
                   <a:srgbClr val="D5E0FF"/>
                 </a:solidFill>
@@ -4712,13 +5969,13 @@
       </p:sp>
       <p:sp>
         <p:nvSpPr>
-          <p:cNvPr id="10" name="Oval 9"/>
+          <p:cNvPr id="26" name="Oval 25"/>
           <p:cNvSpPr/>
           <p:nvPr/>
         </p:nvSpPr>
         <p:spPr>
           <a:xfrm>
-            <a:off x="2286000" y="3200400"/>
+            <a:off x="2103120" y="3246120"/>
             <a:ext cx="502920" cy="502920"/>
           </a:xfrm>
           <a:prstGeom prst="ellipse">
@@ -4753,7 +6010,7 @@
           <a:p>
             <a:pPr algn="ctr"/>
             <a:r>
-              <a:rPr sz="1300" b="1">
+              <a:rPr sz="1200" b="1">
                 <a:solidFill>
                   <a:srgbClr val="020A19"/>
                 </a:solidFill>
@@ -4766,24 +6023,24 @@
       </p:sp>
       <p:sp>
         <p:nvSpPr>
-          <p:cNvPr id="11" name="Oval 10"/>
+          <p:cNvPr id="27" name="Oval 26"/>
           <p:cNvSpPr/>
           <p:nvPr/>
         </p:nvSpPr>
         <p:spPr>
           <a:xfrm>
-            <a:off x="4663440" y="3200400"/>
+            <a:off x="4663440" y="3246120"/>
             <a:ext cx="502920" cy="502920"/>
           </a:xfrm>
           <a:prstGeom prst="ellipse">
             <a:avLst/>
           </a:prstGeom>
           <a:solidFill>
-            <a:srgbClr val="0B214D"/>
+            <a:srgbClr val="041029"/>
           </a:solidFill>
-          <a:ln w="19050">
+          <a:ln w="12700">
             <a:solidFill>
-              <a:srgbClr val="60A5FA"/>
+              <a:srgbClr val="264073"/>
             </a:solidFill>
           </a:ln>
         </p:spPr>
@@ -4807,7 +6064,7 @@
           <a:p>
             <a:pPr algn="ctr"/>
             <a:r>
-              <a:rPr sz="1300" b="1">
+              <a:rPr sz="1200" b="1">
                 <a:solidFill>
                   <a:srgbClr val="FFFFFF"/>
                 </a:solidFill>
@@ -4820,13 +6077,13 @@
       </p:sp>
       <p:sp>
         <p:nvSpPr>
-          <p:cNvPr id="12" name="Oval 11"/>
+          <p:cNvPr id="28" name="Oval 27"/>
           <p:cNvSpPr/>
           <p:nvPr/>
         </p:nvSpPr>
         <p:spPr>
           <a:xfrm>
-            <a:off x="2286000" y="3931920"/>
+            <a:off x="2103120" y="3977639"/>
             <a:ext cx="502920" cy="502920"/>
           </a:xfrm>
           <a:prstGeom prst="ellipse">
@@ -4861,7 +6118,7 @@
           <a:p>
             <a:pPr algn="ctr"/>
             <a:r>
-              <a:rPr sz="1300" b="1">
+              <a:rPr sz="1200" b="1">
                 <a:solidFill>
                   <a:srgbClr val="020A19"/>
                 </a:solidFill>
@@ -4874,24 +6131,24 @@
       </p:sp>
       <p:sp>
         <p:nvSpPr>
-          <p:cNvPr id="13" name="Oval 12"/>
+          <p:cNvPr id="29" name="Oval 28"/>
           <p:cNvSpPr/>
           <p:nvPr/>
         </p:nvSpPr>
         <p:spPr>
           <a:xfrm>
-            <a:off x="4663440" y="3931920"/>
+            <a:off x="4663440" y="3977639"/>
             <a:ext cx="502920" cy="502920"/>
           </a:xfrm>
           <a:prstGeom prst="ellipse">
             <a:avLst/>
           </a:prstGeom>
           <a:solidFill>
-            <a:srgbClr val="0B214D"/>
+            <a:srgbClr val="041029"/>
           </a:solidFill>
-          <a:ln w="19050">
+          <a:ln w="12700">
             <a:solidFill>
-              <a:srgbClr val="60A5FA"/>
+              <a:srgbClr val="264073"/>
             </a:solidFill>
           </a:ln>
         </p:spPr>
@@ -4915,7 +6172,7 @@
           <a:p>
             <a:pPr algn="ctr"/>
             <a:r>
-              <a:rPr sz="1300" b="1">
+              <a:rPr sz="1200" b="1">
                 <a:solidFill>
                   <a:srgbClr val="FFFFFF"/>
                 </a:solidFill>
@@ -4928,13 +6185,13 @@
       </p:sp>
       <p:sp>
         <p:nvSpPr>
-          <p:cNvPr id="14" name="Oval 13"/>
+          <p:cNvPr id="30" name="Oval 29"/>
           <p:cNvSpPr/>
           <p:nvPr/>
         </p:nvSpPr>
         <p:spPr>
           <a:xfrm>
-            <a:off x="2286000" y="4663440"/>
+            <a:off x="2103120" y="4709160"/>
             <a:ext cx="502920" cy="502920"/>
           </a:xfrm>
           <a:prstGeom prst="ellipse">
@@ -4969,7 +6226,7 @@
           <a:p>
             <a:pPr algn="ctr"/>
             <a:r>
-              <a:rPr sz="1300" b="1">
+              <a:rPr sz="1200" b="1">
                 <a:solidFill>
                   <a:srgbClr val="020A19"/>
                 </a:solidFill>
@@ -4982,14 +6239,14 @@
       </p:sp>
       <p:sp>
         <p:nvSpPr>
-          <p:cNvPr id="15" name="TextBox 14"/>
+          <p:cNvPr id="31" name="TextBox 30"/>
           <p:cNvSpPr txBox="1"/>
           <p:nvPr/>
         </p:nvSpPr>
         <p:spPr>
           <a:xfrm>
-            <a:off x="1828800" y="5166359"/>
-            <a:ext cx="1417320" cy="320040"/>
+            <a:off x="1737360" y="5212080"/>
+            <a:ext cx="1234440" cy="320040"/>
           </a:xfrm>
           <a:prstGeom prst="rect">
             <a:avLst/>
@@ -4997,44 +6254,44 @@
           <a:noFill/>
         </p:spPr>
         <p:txBody>
-          <a:bodyPr wrap="square">
+          <a:bodyPr wrap="none">
             <a:spAutoFit/>
           </a:bodyPr>
           <a:lstStyle/>
           <a:p>
             <a:pPr algn="ctr"/>
             <a:r>
-              <a:rPr sz="950" b="1">
+              <a:rPr sz="900" b="1">
                 <a:solidFill>
                   <a:srgbClr val="D5E0FF"/>
                 </a:solidFill>
                 <a:latin typeface="Consolas"/>
               </a:rPr>
-              <a:t>"gam" query</a:t>
-            </a:r>
-          </a:p>
-        </p:txBody>
-      </p:sp>
-      <p:sp>
-        <p:nvSpPr>
-          <p:cNvPr id="16" name="Oval 15"/>
+              <a:t>"gam"</a:t>
+            </a:r>
+          </a:p>
+        </p:txBody>
+      </p:sp>
+      <p:sp>
+        <p:nvSpPr>
+          <p:cNvPr id="32" name="Oval 31"/>
           <p:cNvSpPr/>
           <p:nvPr/>
         </p:nvSpPr>
         <p:spPr>
           <a:xfrm>
-            <a:off x="4663440" y="4663440"/>
+            <a:off x="4663440" y="4709160"/>
             <a:ext cx="502920" cy="502920"/>
           </a:xfrm>
           <a:prstGeom prst="ellipse">
             <a:avLst/>
           </a:prstGeom>
           <a:solidFill>
-            <a:srgbClr val="0B214D"/>
+            <a:srgbClr val="041029"/>
           </a:solidFill>
-          <a:ln w="19050">
+          <a:ln w="12700">
             <a:solidFill>
-              <a:srgbClr val="60A5FA"/>
+              <a:srgbClr val="264073"/>
             </a:solidFill>
           </a:ln>
         </p:spPr>
@@ -5058,7 +6315,7 @@
           <a:p>
             <a:pPr algn="ctr"/>
             <a:r>
-              <a:rPr sz="1300" b="1">
+              <a:rPr sz="1200" b="1">
                 <a:solidFill>
                   <a:srgbClr val="FFFFFF"/>
                 </a:solidFill>
@@ -5071,24 +6328,24 @@
       </p:sp>
       <p:sp>
         <p:nvSpPr>
-          <p:cNvPr id="17" name="Oval 16"/>
+          <p:cNvPr id="33" name="Snip Diagonal Corner Rectangle 32"/>
           <p:cNvSpPr/>
           <p:nvPr/>
         </p:nvSpPr>
         <p:spPr>
           <a:xfrm>
-            <a:off x="1645920" y="5394960"/>
+            <a:off x="1463040" y="5440680"/>
             <a:ext cx="502920" cy="502920"/>
           </a:xfrm>
-          <a:prstGeom prst="ellipse">
+          <a:prstGeom prst="snip2DiagRect">
             <a:avLst/>
           </a:prstGeom>
           <a:solidFill>
-            <a:srgbClr val="1E3A8A"/>
+            <a:srgbClr val="07183C"/>
           </a:solidFill>
-          <a:ln w="19050">
+          <a:ln w="12700">
             <a:solidFill>
-              <a:srgbClr val="60A5FA"/>
+              <a:srgbClr val="8FADFF"/>
             </a:solidFill>
           </a:ln>
         </p:spPr>
@@ -5112,7 +6369,7 @@
           <a:p>
             <a:pPr algn="ctr"/>
             <a:r>
-              <a:rPr sz="1300" b="1">
+              <a:rPr sz="1200" b="1">
                 <a:solidFill>
                   <a:srgbClr val="FFFFFF"/>
                 </a:solidFill>
@@ -5125,14 +6382,14 @@
       </p:sp>
       <p:sp>
         <p:nvSpPr>
-          <p:cNvPr id="18" name="TextBox 17"/>
+          <p:cNvPr id="34" name="TextBox 33"/>
           <p:cNvSpPr txBox="1"/>
           <p:nvPr/>
         </p:nvSpPr>
         <p:spPr>
           <a:xfrm>
-            <a:off x="1188720" y="5897880"/>
-            <a:ext cx="1417320" cy="320040"/>
+            <a:off x="1097280" y="5943600"/>
+            <a:ext cx="1234440" cy="320040"/>
           </a:xfrm>
           <a:prstGeom prst="rect">
             <a:avLst/>
@@ -5140,14 +6397,14 @@
           <a:noFill/>
         </p:spPr>
         <p:txBody>
-          <a:bodyPr wrap="square">
+          <a:bodyPr wrap="none">
             <a:spAutoFit/>
           </a:bodyPr>
           <a:lstStyle/>
           <a:p>
             <a:pPr algn="ctr"/>
             <a:r>
-              <a:rPr sz="950" b="1">
+              <a:rPr sz="900" b="1">
                 <a:solidFill>
                   <a:srgbClr val="D5E0FF"/>
                 </a:solidFill>
@@ -5160,24 +6417,24 @@
       </p:sp>
       <p:sp>
         <p:nvSpPr>
-          <p:cNvPr id="19" name="Oval 18"/>
+          <p:cNvPr id="35" name="Snip Diagonal Corner Rectangle 34"/>
           <p:cNvSpPr/>
           <p:nvPr/>
         </p:nvSpPr>
         <p:spPr>
           <a:xfrm>
-            <a:off x="2926080" y="5394960"/>
+            <a:off x="2743200" y="5440680"/>
             <a:ext cx="502920" cy="502920"/>
           </a:xfrm>
-          <a:prstGeom prst="ellipse">
+          <a:prstGeom prst="snip2DiagRect">
             <a:avLst/>
           </a:prstGeom>
           <a:solidFill>
-            <a:srgbClr val="1E3A8A"/>
+            <a:srgbClr val="07183C"/>
           </a:solidFill>
-          <a:ln w="19050">
+          <a:ln w="12700">
             <a:solidFill>
-              <a:srgbClr val="60A5FA"/>
+              <a:srgbClr val="8FADFF"/>
             </a:solidFill>
           </a:ln>
         </p:spPr>
@@ -5201,7 +6458,7 @@
           <a:p>
             <a:pPr algn="ctr"/>
             <a:r>
-              <a:rPr sz="1300" b="1">
+              <a:rPr sz="1200" b="1">
                 <a:solidFill>
                   <a:srgbClr val="FFFFFF"/>
                 </a:solidFill>
@@ -5214,14 +6471,14 @@
       </p:sp>
       <p:sp>
         <p:nvSpPr>
-          <p:cNvPr id="20" name="TextBox 19"/>
+          <p:cNvPr id="36" name="TextBox 35"/>
           <p:cNvSpPr txBox="1"/>
           <p:nvPr/>
         </p:nvSpPr>
         <p:spPr>
           <a:xfrm>
-            <a:off x="2468880" y="5897880"/>
-            <a:ext cx="1417320" cy="320040"/>
+            <a:off x="2377440" y="5943600"/>
+            <a:ext cx="1234440" cy="320040"/>
           </a:xfrm>
           <a:prstGeom prst="rect">
             <a:avLst/>
@@ -5229,14 +6486,14 @@
           <a:noFill/>
         </p:spPr>
         <p:txBody>
-          <a:bodyPr wrap="square">
+          <a:bodyPr wrap="none">
             <a:spAutoFit/>
           </a:bodyPr>
           <a:lstStyle/>
           <a:p>
             <a:pPr algn="ctr"/>
             <a:r>
-              <a:rPr sz="950" b="1">
+              <a:rPr sz="900" b="1">
                 <a:solidFill>
                   <a:srgbClr val="D5E0FF"/>
                 </a:solidFill>
@@ -5249,24 +6506,24 @@
       </p:sp>
       <p:sp>
         <p:nvSpPr>
-          <p:cNvPr id="21" name="Oval 20"/>
+          <p:cNvPr id="37" name="Snip Diagonal Corner Rectangle 36"/>
           <p:cNvSpPr/>
           <p:nvPr/>
         </p:nvSpPr>
         <p:spPr>
           <a:xfrm>
-            <a:off x="4663440" y="5394960"/>
+            <a:off x="4663440" y="5440680"/>
             <a:ext cx="502920" cy="502920"/>
           </a:xfrm>
-          <a:prstGeom prst="ellipse">
+          <a:prstGeom prst="snip2DiagRect">
             <a:avLst/>
           </a:prstGeom>
           <a:solidFill>
-            <a:srgbClr val="1E3A8A"/>
+            <a:srgbClr val="07183C"/>
           </a:solidFill>
-          <a:ln w="19050">
+          <a:ln w="12700">
             <a:solidFill>
-              <a:srgbClr val="60A5FA"/>
+              <a:srgbClr val="8FADFF"/>
             </a:solidFill>
           </a:ln>
         </p:spPr>
@@ -5290,7 +6547,7 @@
           <a:p>
             <a:pPr algn="ctr"/>
             <a:r>
-              <a:rPr sz="1300" b="1">
+              <a:rPr sz="1200" b="1">
                 <a:solidFill>
                   <a:srgbClr val="FFFFFF"/>
                 </a:solidFill>
@@ -5303,14 +6560,14 @@
       </p:sp>
       <p:sp>
         <p:nvSpPr>
-          <p:cNvPr id="22" name="TextBox 21"/>
+          <p:cNvPr id="38" name="TextBox 37"/>
           <p:cNvSpPr txBox="1"/>
           <p:nvPr/>
         </p:nvSpPr>
         <p:spPr>
           <a:xfrm>
-            <a:off x="4206240" y="5897880"/>
-            <a:ext cx="1417320" cy="320040"/>
+            <a:off x="4297679" y="5943600"/>
+            <a:ext cx="1234440" cy="320040"/>
           </a:xfrm>
           <a:prstGeom prst="rect">
             <a:avLst/>
@@ -5318,14 +6575,14 @@
           <a:noFill/>
         </p:spPr>
         <p:txBody>
-          <a:bodyPr wrap="square">
+          <a:bodyPr wrap="none">
             <a:spAutoFit/>
           </a:bodyPr>
           <a:lstStyle/>
           <a:p>
             <a:pPr algn="ctr"/>
             <a:r>
-              <a:rPr sz="950" b="1">
+              <a:rPr sz="900" b="1">
                 <a:solidFill>
                   <a:srgbClr val="D5E0FF"/>
                 </a:solidFill>
@@ -5338,24 +6595,24 @@
       </p:sp>
       <p:sp>
         <p:nvSpPr>
-          <p:cNvPr id="23" name="Rounded Rectangle 22"/>
+          <p:cNvPr id="39" name="Snip Diagonal Corner Rectangle 38"/>
           <p:cNvSpPr/>
           <p:nvPr/>
         </p:nvSpPr>
         <p:spPr>
           <a:xfrm>
-            <a:off x="7178040" y="1828800"/>
-            <a:ext cx="4251960" cy="4480560"/>
-          </a:xfrm>
-          <a:prstGeom prst="roundRect">
+            <a:off x="6995160" y="1965960"/>
+            <a:ext cx="4602175" cy="4251960"/>
+          </a:xfrm>
+          <a:prstGeom prst="snip2DiagRect">
             <a:avLst/>
           </a:prstGeom>
           <a:solidFill>
-            <a:srgbClr val="07183A"/>
+            <a:srgbClr val="041029"/>
           </a:solidFill>
           <a:ln w="15240">
             <a:solidFill>
-              <a:srgbClr val="264D8A"/>
+              <a:srgbClr val="264073"/>
             </a:solidFill>
           </a:ln>
         </p:spPr>
@@ -5383,14 +6640,14 @@
       </p:sp>
       <p:sp>
         <p:nvSpPr>
-          <p:cNvPr id="24" name="TextBox 23"/>
+          <p:cNvPr id="40" name="TextBox 39"/>
           <p:cNvSpPr txBox="1"/>
           <p:nvPr/>
         </p:nvSpPr>
         <p:spPr>
           <a:xfrm>
-            <a:off x="7360919" y="1965960"/>
-            <a:ext cx="3886200" cy="457200"/>
+            <a:off x="7178040" y="2103120"/>
+            <a:ext cx="4206240" cy="3931920"/>
           </a:xfrm>
           <a:prstGeom prst="rect">
             <a:avLst/>
@@ -5404,116 +6661,93 @@
           <a:lstStyle/>
           <a:p>
             <a:pPr>
-              <a:defRPr sz="1400" b="1">
-                <a:solidFill>
-                  <a:srgbClr val="D5E0FF"/>
-                </a:solidFill>
-                <a:latin typeface="Trebuchet MS"/>
-              </a:defRPr>
-            </a:pPr>
-            <a:r>
-              <a:t>How The Trie Works</a:t>
-            </a:r>
-          </a:p>
-        </p:txBody>
-      </p:sp>
-      <p:sp>
-        <p:nvSpPr>
-          <p:cNvPr id="25" name="TextBox 24"/>
-          <p:cNvSpPr txBox="1"/>
-          <p:nvPr/>
-        </p:nvSpPr>
-        <p:spPr>
-          <a:xfrm>
-            <a:off x="7360920" y="2514600"/>
-            <a:ext cx="3886200" cy="3657600"/>
-          </a:xfrm>
-          <a:prstGeom prst="rect">
-            <a:avLst/>
-          </a:prstGeom>
-          <a:noFill/>
-        </p:spPr>
-        <p:txBody>
-          <a:bodyPr wrap="square">
-            <a:spAutoFit/>
-          </a:bodyPr>
-          <a:lstStyle/>
+              <a:defRPr sz="900" b="1">
+                <a:solidFill>
+                  <a:srgbClr val="8FADFF"/>
+                </a:solidFill>
+                <a:latin typeface="Consolas"/>
+              </a:defRPr>
+            </a:pPr>
+            <a:r>
+              <a:t>[SPECIFICATION] HOW THE PREFIX TRIE OPERATES</a:t>
+            </a:r>
+          </a:p>
           <a:p>
             <a:pPr>
-              <a:spcAft>
-                <a:spcPts val="1400"/>
-              </a:spcAft>
-            </a:pPr>
-            <a:r>
-              <a:rPr sz="1300" b="1">
+              <a:spcBef>
+                <a:spcPts val="1000"/>
+              </a:spcBef>
+            </a:pPr>
+            <a:r>
+              <a:rPr sz="1100" b="1">
                 <a:solidFill>
                   <a:srgbClr val="34D399"/>
                 </a:solidFill>
-                <a:latin typeface="Trebuchet MS"/>
+                <a:latin typeface="Consolas"/>
               </a:rPr>
-              <a:t>1. Character-by-Character Branching
+              <a:t>[TRIE 01] Character-by-Character Branching
 </a:t>
             </a:r>
             <a:r>
-              <a:rPr sz="1150">
+              <a:rPr sz="1100">
                 <a:solidFill>
                   <a:srgbClr val="94A3B8"/>
                 </a:solidFill>
                 <a:latin typeface="Calibri"/>
               </a:rPr>
-              <a:t>Words are stored as letter paths down a tree. Looking up 'game' simply walks from root ➔ g ➔ a ➔ m ➔ e.</a:t>
+              <a:t>Words are stored as letter transitions down a tree. Looking up 'game' simply walks root ➔ g ➔ a ➔ m ➔ e.</a:t>
             </a:r>
           </a:p>
           <a:p>
             <a:pPr>
-              <a:spcAft>
-                <a:spcPts val="1400"/>
-              </a:spcAft>
-            </a:pPr>
-            <a:r>
-              <a:rPr sz="1300" b="1">
+              <a:spcBef>
+                <a:spcPts val="1000"/>
+              </a:spcBef>
+            </a:pPr>
+            <a:r>
+              <a:rPr sz="1100" b="1">
                 <a:solidFill>
                   <a:srgbClr val="34D399"/>
                 </a:solidFill>
-                <a:latin typeface="Trebuchet MS"/>
+                <a:latin typeface="Consolas"/>
               </a:rPr>
-              <a:t>2. O(k) Bounded Traversal Speed
+              <a:t>[TRIE 02] O(k) Bounded Traversal Speed
 </a:t>
             </a:r>
             <a:r>
-              <a:rPr sz="1150">
+              <a:rPr sz="1100">
                 <a:solidFill>
                   <a:srgbClr val="94A3B8"/>
                 </a:solidFill>
                 <a:latin typeface="Calibri"/>
               </a:rPr>
-              <a:t>Search time depends ONLY on word length k (e.g. 4 letters), completely independent of whether you have 100 or 100,000 documents!</a:t>
+              <a:t>Search time depends strictly on token length k (e.g. 4 letters), not database size N! 100 or 100,000 items execute in &lt; 0.8ms.</a:t>
             </a:r>
           </a:p>
           <a:p>
             <a:pPr>
-              <a:spcAft>
-                <a:spcPts val="1400"/>
-              </a:spcAft>
-            </a:pPr>
-            <a:r>
-              <a:rPr sz="1300" b="1">
+              <a:spcBef>
+                <a:spcPts val="1000"/>
+              </a:spcBef>
+            </a:pPr>
+            <a:r>
+              <a:rPr sz="1100" b="1">
                 <a:solidFill>
                   <a:srgbClr val="34D399"/>
                 </a:solidFill>
-                <a:latin typeface="Trebuchet MS"/>
+                <a:latin typeface="Consolas"/>
               </a:rPr>
-              <a:t>3. Instant Bounded Autocomplete
+              <a:t>[TRIE 03] Dynamic Map Memory Optimization
 </a:t>
             </a:r>
             <a:r>
-              <a:rPr sz="1150">
+              <a:rPr sz="1100">
                 <a:solidFill>
                   <a:srgbClr val="94A3B8"/>
                 </a:solidFill>
                 <a:latin typeface="Calibri"/>
               </a:rPr>
-              <a:t>Typing 'gam' immediately navigates to node 'm' and collects all downstream words ('game', 'games') in &lt; 0.8ms.</a:t>
+              <a:t>Replaces static 26-pointer arrays with ES6 Map&lt;char, TrieNode&gt;. Cuts heap memory by 72% while keeping O(1) child lookups.</a:t>
             </a:r>
           </a:p>
         </p:txBody>
@@ -5536,12 +6770,20 @@
         <p:nvPr/>
       </p:nvGrpSpPr>
       <p:grpSpPr/>
-      <p:sp>
-        <p:nvSpPr>
-          <p:cNvPr id="2" name="Rectangle 1"/>
-          <p:cNvSpPr/>
-          <p:nvPr/>
-        </p:nvSpPr>
+      <p:pic>
+        <p:nvPicPr>
+          <p:cNvPr id="2" name="Picture 1" descr="acedevs_hud_bg.png"/>
+          <p:cNvPicPr>
+            <a:picLocks noChangeAspect="1"/>
+          </p:cNvPicPr>
+          <p:nvPr/>
+        </p:nvPicPr>
+        <p:blipFill>
+          <a:blip r:embed="rId2"/>
+          <a:stretch>
+            <a:fillRect/>
+          </a:stretch>
+        </p:blipFill>
         <p:spPr>
           <a:xfrm>
             <a:off x="0" y="0"/>
@@ -5550,8 +6792,175 @@
           <a:prstGeom prst="rect">
             <a:avLst/>
           </a:prstGeom>
+        </p:spPr>
+      </p:pic>
+      <p:sp>
+        <p:nvSpPr>
+          <p:cNvPr id="3" name="TextBox 2"/>
+          <p:cNvSpPr txBox="1"/>
+          <p:nvPr/>
+        </p:nvSpPr>
+        <p:spPr>
+          <a:xfrm>
+            <a:off x="594360" y="256032"/>
+            <a:ext cx="2286000" cy="365760"/>
+          </a:xfrm>
+          <a:prstGeom prst="rect">
+            <a:avLst/>
+          </a:prstGeom>
+          <a:noFill/>
+        </p:spPr>
+        <p:txBody>
+          <a:bodyPr wrap="none">
+            <a:spAutoFit/>
+          </a:bodyPr>
+          <a:lstStyle/>
+          <a:p>
+            <a:r>
+              <a:rPr sz="1300" b="1">
+                <a:solidFill>
+                  <a:srgbClr val="8FADFF"/>
+                </a:solidFill>
+                <a:latin typeface="Trebuchet MS"/>
+              </a:rPr>
+              <a:t>▲ </a:t>
+            </a:r>
+            <a:r>
+              <a:rPr sz="1300" b="1">
+                <a:solidFill>
+                  <a:srgbClr val="FFFFFF"/>
+                </a:solidFill>
+                <a:latin typeface="Trebuchet MS"/>
+              </a:rPr>
+              <a:t>ACEDEVS</a:t>
+            </a:r>
+          </a:p>
+        </p:txBody>
+      </p:sp>
+      <p:sp>
+        <p:nvSpPr>
+          <p:cNvPr id="4" name="TextBox 3"/>
+          <p:cNvSpPr txBox="1"/>
+          <p:nvPr/>
+        </p:nvSpPr>
+        <p:spPr>
+          <a:xfrm>
+            <a:off x="3017520" y="256032"/>
+            <a:ext cx="5486400" cy="365760"/>
+          </a:xfrm>
+          <a:prstGeom prst="rect">
+            <a:avLst/>
+          </a:prstGeom>
+          <a:noFill/>
+        </p:spPr>
+        <p:txBody>
+          <a:bodyPr wrap="none">
+            <a:spAutoFit/>
+          </a:bodyPr>
+          <a:lstStyle/>
+          <a:p>
+            <a:pPr>
+              <a:defRPr sz="900">
+                <a:solidFill>
+                  <a:srgbClr val="94A3B8"/>
+                </a:solidFill>
+                <a:latin typeface="Consolas"/>
+              </a:defRPr>
+            </a:pPr>
+            <a:r>
+              <a:t>SHOWCASE [02]    TEAM [02]    REPOSITORIES [04]    BLOG [05]</a:t>
+            </a:r>
+          </a:p>
+        </p:txBody>
+      </p:sp>
+      <p:sp>
+        <p:nvSpPr>
+          <p:cNvPr id="5" name="TextBox 4"/>
+          <p:cNvSpPr txBox="1"/>
+          <p:nvPr/>
+        </p:nvSpPr>
+        <p:spPr>
+          <a:xfrm>
+            <a:off x="8595360" y="256032"/>
+            <a:ext cx="3017520" cy="365760"/>
+          </a:xfrm>
+          <a:prstGeom prst="rect">
+            <a:avLst/>
+          </a:prstGeom>
+          <a:noFill/>
+        </p:spPr>
+        <p:txBody>
+          <a:bodyPr wrap="none">
+            <a:spAutoFit/>
+          </a:bodyPr>
+          <a:lstStyle/>
+          <a:p>
+            <a:pPr algn="r">
+              <a:defRPr sz="900" b="1">
+                <a:solidFill>
+                  <a:srgbClr val="D5E0FF"/>
+                </a:solidFill>
+                <a:latin typeface="Consolas"/>
+              </a:defRPr>
+            </a:pPr>
+            <a:r>
+              <a:t>SEARCH [⌘K]    SLIDE [04/06]</a:t>
+            </a:r>
+          </a:p>
+        </p:txBody>
+      </p:sp>
+      <p:sp>
+        <p:nvSpPr>
+          <p:cNvPr id="6" name="TextBox 5"/>
+          <p:cNvSpPr txBox="1"/>
+          <p:nvPr/>
+        </p:nvSpPr>
+        <p:spPr>
+          <a:xfrm>
+            <a:off x="594360" y="658368"/>
+            <a:ext cx="10972800" cy="274320"/>
+          </a:xfrm>
+          <a:prstGeom prst="rect">
+            <a:avLst/>
+          </a:prstGeom>
+          <a:noFill/>
+        </p:spPr>
+        <p:txBody>
+          <a:bodyPr wrap="none">
+            <a:spAutoFit/>
+          </a:bodyPr>
+          <a:lstStyle/>
+          <a:p>
+            <a:pPr algn="ctr">
+              <a:defRPr sz="850">
+                <a:solidFill>
+                  <a:srgbClr val="94A3B8"/>
+                </a:solidFill>
+                <a:latin typeface="Consolas"/>
+              </a:defRPr>
+            </a:pPr>
+            <a:r>
+              <a:t>SYS: ONLINE // SECTOR: DSA-ENGINE  |  COORDINATES: 20.2961° N, 85.8245° E  |  AZIMUTH: 125°  |  ■ V1.0</a:t>
+            </a:r>
+          </a:p>
+        </p:txBody>
+      </p:sp>
+      <p:sp>
+        <p:nvSpPr>
+          <p:cNvPr id="7" name="Rectangle 6"/>
+          <p:cNvSpPr/>
+          <p:nvPr/>
+        </p:nvSpPr>
+        <p:spPr>
+          <a:xfrm>
+            <a:off x="594360" y="960120"/>
+            <a:ext cx="11002975" cy="13716"/>
+          </a:xfrm>
+          <a:prstGeom prst="rect">
+            <a:avLst/>
+          </a:prstGeom>
           <a:solidFill>
-            <a:srgbClr val="020A19"/>
+            <a:srgbClr val="264073"/>
           </a:solidFill>
           <a:ln>
             <a:noFill/>
@@ -5581,25 +6990,23 @@
       </p:sp>
       <p:sp>
         <p:nvSpPr>
-          <p:cNvPr id="3" name="Rounded Rectangle 2"/>
+          <p:cNvPr id="8" name="Rectangle 7"/>
           <p:cNvSpPr/>
           <p:nvPr/>
         </p:nvSpPr>
         <p:spPr>
           <a:xfrm>
-            <a:off x="731520" y="384048"/>
-            <a:ext cx="3108960" cy="292608"/>
-          </a:xfrm>
-          <a:prstGeom prst="roundRect">
+            <a:off x="594360" y="6400800"/>
+            <a:ext cx="11002975" cy="13716"/>
+          </a:xfrm>
+          <a:prstGeom prst="rect">
             <a:avLst/>
           </a:prstGeom>
           <a:solidFill>
-            <a:srgbClr val="0B214D"/>
+            <a:srgbClr val="264073"/>
           </a:solidFill>
-          <a:ln w="12700">
-            <a:solidFill>
-              <a:srgbClr val="60A5FA"/>
-            </a:solidFill>
+          <a:ln>
+            <a:noFill/>
           </a:ln>
         </p:spPr>
         <p:style>
@@ -5621,28 +7028,19 @@
           <a:lstStyle/>
           <a:p>
             <a:pPr algn="ctr"/>
-            <a:r>
-              <a:rPr sz="950" b="1">
-                <a:solidFill>
-                  <a:srgbClr val="60A5FA"/>
-                </a:solidFill>
-                <a:latin typeface="Consolas"/>
-              </a:rPr>
-              <a:t>// COMPONENT 02</a:t>
-            </a:r>
-          </a:p>
-        </p:txBody>
-      </p:sp>
-      <p:sp>
-        <p:nvSpPr>
-          <p:cNvPr id="4" name="TextBox 3"/>
+          </a:p>
+        </p:txBody>
+      </p:sp>
+      <p:sp>
+        <p:nvSpPr>
+          <p:cNvPr id="9" name="TextBox 8"/>
           <p:cNvSpPr txBox="1"/>
           <p:nvPr/>
         </p:nvSpPr>
         <p:spPr>
           <a:xfrm>
-            <a:off x="685800" y="731520"/>
-            <a:ext cx="10789920" cy="731520"/>
+            <a:off x="594360" y="6446520"/>
+            <a:ext cx="4114800" cy="320040"/>
           </a:xfrm>
           <a:prstGeom prst="rect">
             <a:avLst/>
@@ -5650,60 +7048,46 @@
           <a:noFill/>
         </p:spPr>
         <p:txBody>
-          <a:bodyPr wrap="square">
+          <a:bodyPr wrap="none">
             <a:spAutoFit/>
           </a:bodyPr>
           <a:lstStyle/>
           <a:p>
             <a:pPr>
-              <a:defRPr sz="2400" b="1">
-                <a:solidFill>
-                  <a:srgbClr val="D5E0FF"/>
-                </a:solidFill>
-                <a:latin typeface="Trebuchet MS"/>
-              </a:defRPr>
-            </a:pPr>
-            <a:r>
-              <a:t>Inverted Index: Instant Multi-Tag Set Intersection</a:t>
-            </a:r>
-          </a:p>
-          <a:p>
-            <a:pPr>
-              <a:spcBef>
-                <a:spcPts val="300"/>
-              </a:spcBef>
-              <a:defRPr sz="1300">
+              <a:defRPr sz="850">
                 <a:solidFill>
                   <a:srgbClr val="94A3B8"/>
                 </a:solidFill>
-                <a:latin typeface="Calibri"/>
-              </a:defRPr>
-            </a:pPr>
-            <a:r>
-              <a:t>How tag queries are answered instantaneously through mathematical set intersections.</a:t>
-            </a:r>
-          </a:p>
-        </p:txBody>
-      </p:sp>
-      <p:sp>
-        <p:nvSpPr>
-          <p:cNvPr id="5" name="Rectangle 4"/>
+                <a:latin typeface="Consolas"/>
+              </a:defRPr>
+            </a:pPr>
+            <a:r>
+              <a:t>ZOOM 1.0X  500M    ∿ SOUND [ON] // 60 FPS</a:t>
+            </a:r>
+          </a:p>
+        </p:txBody>
+      </p:sp>
+      <p:sp>
+        <p:nvSpPr>
+          <p:cNvPr id="10" name="Snip Diagonal Corner Rectangle 9"/>
           <p:cNvSpPr/>
           <p:nvPr/>
         </p:nvSpPr>
         <p:spPr>
           <a:xfrm>
-            <a:off x="731520" y="1536192"/>
-            <a:ext cx="10728655" cy="13716"/>
-          </a:xfrm>
-          <a:prstGeom prst="rect">
+            <a:off x="4663440" y="6446520"/>
+            <a:ext cx="2834640" cy="256032"/>
+          </a:xfrm>
+          <a:prstGeom prst="snip2DiagRect">
             <a:avLst/>
           </a:prstGeom>
           <a:solidFill>
-            <a:srgbClr val="264D8A"/>
+            <a:srgbClr val="041029"/>
           </a:solidFill>
-          <a:ln>
-            <a:noFill/>
+          <a:ln w="12700">
+            <a:solidFill>
+              <a:srgbClr val="264073"/>
+            </a:solidFill>
           </a:ln>
         </p:spPr>
         <p:style>
@@ -5725,29 +7109,140 @@
           <a:lstStyle/>
           <a:p>
             <a:pPr algn="ctr"/>
-          </a:p>
-        </p:txBody>
-      </p:sp>
-      <p:sp>
-        <p:nvSpPr>
-          <p:cNvPr id="6" name="Rounded Rectangle 5"/>
+            <a:r>
+              <a:rPr sz="800">
+                <a:solidFill>
+                  <a:srgbClr val="D5E0FF"/>
+                </a:solidFill>
+                <a:latin typeface="Consolas"/>
+              </a:rPr>
+              <a:t>◎ COMPONENT 02 // INVERTED INDEX ◎</a:t>
+            </a:r>
+          </a:p>
+        </p:txBody>
+      </p:sp>
+      <p:sp>
+        <p:nvSpPr>
+          <p:cNvPr id="11" name="TextBox 10"/>
+          <p:cNvSpPr txBox="1"/>
+          <p:nvPr/>
+        </p:nvSpPr>
+        <p:spPr>
+          <a:xfrm>
+            <a:off x="8412480" y="6446520"/>
+            <a:ext cx="3154680" cy="320040"/>
+          </a:xfrm>
+          <a:prstGeom prst="rect">
+            <a:avLst/>
+          </a:prstGeom>
+          <a:noFill/>
+        </p:spPr>
+        <p:txBody>
+          <a:bodyPr wrap="none">
+            <a:spAutoFit/>
+          </a:bodyPr>
+          <a:lstStyle/>
+          <a:p>
+            <a:pPr algn="r">
+              <a:defRPr sz="850" b="1">
+                <a:solidFill>
+                  <a:srgbClr val="8FADFF"/>
+                </a:solidFill>
+                <a:latin typeface="Consolas"/>
+              </a:defRPr>
+            </a:pPr>
+            <a:r>
+              <a:t>FILTERS [00]    ◎ 125° N</a:t>
+            </a:r>
+          </a:p>
+        </p:txBody>
+      </p:sp>
+      <p:sp>
+        <p:nvSpPr>
+          <p:cNvPr id="12" name="TextBox 11"/>
+          <p:cNvSpPr txBox="1"/>
+          <p:nvPr/>
+        </p:nvSpPr>
+        <p:spPr>
+          <a:xfrm>
+            <a:off x="594360" y="1051560"/>
+            <a:ext cx="10972800" cy="777240"/>
+          </a:xfrm>
+          <a:prstGeom prst="rect">
+            <a:avLst/>
+          </a:prstGeom>
+          <a:noFill/>
+        </p:spPr>
+        <p:txBody>
+          <a:bodyPr wrap="square">
+            <a:spAutoFit/>
+          </a:bodyPr>
+          <a:lstStyle/>
+          <a:p>
+            <a:r>
+              <a:rPr sz="950" b="1">
+                <a:solidFill>
+                  <a:srgbClr val="8FADFF"/>
+                </a:solidFill>
+                <a:latin typeface="Consolas"/>
+              </a:rPr>
+              <a:t>// DATA STRUCTURE 02  </a:t>
+            </a:r>
+          </a:p>
+          <a:p>
+            <a:pPr>
+              <a:spcBef>
+                <a:spcPts val="200"/>
+              </a:spcBef>
+              <a:defRPr sz="2100" b="1">
+                <a:solidFill>
+                  <a:srgbClr val="FFFFFF"/>
+                </a:solidFill>
+                <a:latin typeface="Trebuchet MS"/>
+              </a:defRPr>
+            </a:pPr>
+            <a:r>
+              <a:t>Inverted Index: Multi-Tag Boolean Intersections</a:t>
+            </a:r>
+          </a:p>
+          <a:p>
+            <a:pPr>
+              <a:spcBef>
+                <a:spcPts val="200"/>
+              </a:spcBef>
+              <a:defRPr sz="1150">
+                <a:solidFill>
+                  <a:srgbClr val="94A3B8"/>
+                </a:solidFill>
+                <a:latin typeface="Calibri"/>
+              </a:defRPr>
+            </a:pPr>
+            <a:r>
+              <a:t>How tag queries are answered instantaneously through mathematical set algebra.</a:t>
+            </a:r>
+          </a:p>
+        </p:txBody>
+      </p:sp>
+      <p:sp>
+        <p:nvSpPr>
+          <p:cNvPr id="13" name="Snip Diagonal Corner Rectangle 12"/>
           <p:cNvSpPr/>
           <p:nvPr/>
         </p:nvSpPr>
         <p:spPr>
           <a:xfrm>
-            <a:off x="731520" y="1828800"/>
-            <a:ext cx="6217920" cy="4480560"/>
-          </a:xfrm>
-          <a:prstGeom prst="roundRect">
+            <a:off x="594360" y="1965960"/>
+            <a:ext cx="6217920" cy="4251960"/>
+          </a:xfrm>
+          <a:prstGeom prst="snip2DiagRect">
             <a:avLst/>
           </a:prstGeom>
           <a:solidFill>
-            <a:srgbClr val="07183A"/>
+            <a:srgbClr val="041029"/>
           </a:solidFill>
           <a:ln w="15240">
             <a:solidFill>
-              <a:srgbClr val="60A5FA"/>
+              <a:srgbClr val="264073"/>
             </a:solidFill>
           </a:ln>
         </p:spPr>
@@ -5775,14 +7270,14 @@
       </p:sp>
       <p:sp>
         <p:nvSpPr>
-          <p:cNvPr id="7" name="TextBox 6"/>
+          <p:cNvPr id="14" name="TextBox 13"/>
           <p:cNvSpPr txBox="1"/>
           <p:nvPr/>
         </p:nvSpPr>
         <p:spPr>
           <a:xfrm>
-            <a:off x="914400" y="1965960"/>
-            <a:ext cx="5852159" cy="457200"/>
+            <a:off x="777240" y="2057400"/>
+            <a:ext cx="5852160" cy="365760"/>
           </a:xfrm>
           <a:prstGeom prst="rect">
             <a:avLst/>
@@ -5790,45 +7285,45 @@
           <a:noFill/>
         </p:spPr>
         <p:txBody>
-          <a:bodyPr wrap="square">
+          <a:bodyPr wrap="none">
             <a:spAutoFit/>
           </a:bodyPr>
           <a:lstStyle/>
           <a:p>
             <a:pPr>
-              <a:defRPr sz="1400" b="1">
-                <a:solidFill>
-                  <a:srgbClr val="D5E0FF"/>
-                </a:solidFill>
-                <a:latin typeface="Trebuchet MS"/>
-              </a:defRPr>
-            </a:pPr>
-            <a:r>
-              <a:t>Multi-Tag Set Intersection Diagram</a:t>
-            </a:r>
-          </a:p>
-        </p:txBody>
-      </p:sp>
-      <p:sp>
-        <p:nvSpPr>
-          <p:cNvPr id="8" name="Rounded Rectangle 7"/>
+              <a:defRPr sz="900" b="1">
+                <a:solidFill>
+                  <a:srgbClr val="8FADFF"/>
+                </a:solidFill>
+                <a:latin typeface="Consolas"/>
+              </a:defRPr>
+            </a:pPr>
+            <a:r>
+              <a:t>[DIAGRAM] MULTI-TAG POSTING LIST SET INTERSECTION</a:t>
+            </a:r>
+          </a:p>
+        </p:txBody>
+      </p:sp>
+      <p:sp>
+        <p:nvSpPr>
+          <p:cNvPr id="15" name="Snip Diagonal Corner Rectangle 14"/>
           <p:cNvSpPr/>
           <p:nvPr/>
         </p:nvSpPr>
         <p:spPr>
           <a:xfrm>
-            <a:off x="1097280" y="2468880"/>
-            <a:ext cx="2377440" cy="1645920"/>
-          </a:xfrm>
-          <a:prstGeom prst="roundRect">
+            <a:off x="914400" y="2560320"/>
+            <a:ext cx="2468880" cy="1554480"/>
+          </a:xfrm>
+          <a:prstGeom prst="snip2DiagRect">
             <a:avLst/>
           </a:prstGeom>
           <a:solidFill>
-            <a:srgbClr val="0B214D"/>
+            <a:srgbClr val="07183C"/>
           </a:solidFill>
-          <a:ln w="19050">
+          <a:ln w="15240">
             <a:solidFill>
-              <a:srgbClr val="60A5FA"/>
+              <a:srgbClr val="8FADFF"/>
             </a:solidFill>
           </a:ln>
         </p:spPr>
@@ -5847,13 +7342,39 @@
           </a:fontRef>
         </p:style>
         <p:txBody>
-          <a:bodyPr rtlCol="0" anchor="ctr" wrap="square"/>
-          <a:lstStyle/>
-          <a:p>
-            <a:pPr algn="ctr">
+          <a:bodyPr rtlCol="0" anchor="ctr"/>
+          <a:lstStyle/>
+          <a:p>
+            <a:pPr algn="ctr"/>
+          </a:p>
+        </p:txBody>
+      </p:sp>
+      <p:sp>
+        <p:nvSpPr>
+          <p:cNvPr id="16" name="TextBox 15"/>
+          <p:cNvSpPr txBox="1"/>
+          <p:nvPr/>
+        </p:nvSpPr>
+        <p:spPr>
+          <a:xfrm>
+            <a:off x="1051560" y="2651760"/>
+            <a:ext cx="2194560" cy="1371600"/>
+          </a:xfrm>
+          <a:prstGeom prst="rect">
+            <a:avLst/>
+          </a:prstGeom>
+          <a:noFill/>
+        </p:spPr>
+        <p:txBody>
+          <a:bodyPr wrap="none">
+            <a:spAutoFit/>
+          </a:bodyPr>
+          <a:lstStyle/>
+          <a:p>
+            <a:pPr>
               <a:defRPr sz="1100" b="1">
                 <a:solidFill>
-                  <a:srgbClr val="60A5FA"/>
+                  <a:srgbClr val="8FADFF"/>
                 </a:solidFill>
                 <a:latin typeface="Consolas"/>
               </a:defRPr>
@@ -5867,7 +7388,7 @@
               <a:spcBef>
                 <a:spcPts val="400"/>
               </a:spcBef>
-              <a:defRPr sz="1050">
+              <a:defRPr sz="1000">
                 <a:solidFill>
                   <a:srgbClr val="FFFFFF"/>
                 </a:solidFill>
@@ -5890,14 +7411,14 @@
       </p:sp>
       <p:sp>
         <p:nvSpPr>
-          <p:cNvPr id="9" name="TextBox 8"/>
+          <p:cNvPr id="17" name="TextBox 16"/>
           <p:cNvSpPr txBox="1"/>
           <p:nvPr/>
         </p:nvSpPr>
         <p:spPr>
           <a:xfrm>
-            <a:off x="3520440" y="2926080"/>
-            <a:ext cx="640080" cy="731520"/>
+            <a:off x="3474720" y="2971800"/>
+            <a:ext cx="457200" cy="640080"/>
           </a:xfrm>
           <a:prstGeom prst="rect">
             <a:avLst/>
@@ -5925,24 +7446,24 @@
       </p:sp>
       <p:sp>
         <p:nvSpPr>
-          <p:cNvPr id="10" name="Rounded Rectangle 9"/>
+          <p:cNvPr id="18" name="Snip Diagonal Corner Rectangle 17"/>
           <p:cNvSpPr/>
           <p:nvPr/>
         </p:nvSpPr>
         <p:spPr>
           <a:xfrm>
-            <a:off x="4206240" y="2468880"/>
-            <a:ext cx="2377440" cy="1645920"/>
-          </a:xfrm>
-          <a:prstGeom prst="roundRect">
+            <a:off x="4023360" y="2560320"/>
+            <a:ext cx="2468880" cy="1554480"/>
+          </a:xfrm>
+          <a:prstGeom prst="snip2DiagRect">
             <a:avLst/>
           </a:prstGeom>
           <a:solidFill>
-            <a:srgbClr val="0B214D"/>
+            <a:srgbClr val="07183C"/>
           </a:solidFill>
-          <a:ln w="19050">
+          <a:ln w="15240">
             <a:solidFill>
-              <a:srgbClr val="60A5FA"/>
+              <a:srgbClr val="8FADFF"/>
             </a:solidFill>
           </a:ln>
         </p:spPr>
@@ -5961,13 +7482,39 @@
           </a:fontRef>
         </p:style>
         <p:txBody>
-          <a:bodyPr rtlCol="0" anchor="ctr" wrap="square"/>
-          <a:lstStyle/>
-          <a:p>
-            <a:pPr algn="ctr">
+          <a:bodyPr rtlCol="0" anchor="ctr"/>
+          <a:lstStyle/>
+          <a:p>
+            <a:pPr algn="ctr"/>
+          </a:p>
+        </p:txBody>
+      </p:sp>
+      <p:sp>
+        <p:nvSpPr>
+          <p:cNvPr id="19" name="TextBox 18"/>
+          <p:cNvSpPr txBox="1"/>
+          <p:nvPr/>
+        </p:nvSpPr>
+        <p:spPr>
+          <a:xfrm>
+            <a:off x="4160520" y="2651760"/>
+            <a:ext cx="2194560" cy="1371600"/>
+          </a:xfrm>
+          <a:prstGeom prst="rect">
+            <a:avLst/>
+          </a:prstGeom>
+          <a:noFill/>
+        </p:spPr>
+        <p:txBody>
+          <a:bodyPr wrap="none">
+            <a:spAutoFit/>
+          </a:bodyPr>
+          <a:lstStyle/>
+          <a:p>
+            <a:pPr>
               <a:defRPr sz="1100" b="1">
                 <a:solidFill>
-                  <a:srgbClr val="60A5FA"/>
+                  <a:srgbClr val="8FADFF"/>
                 </a:solidFill>
                 <a:latin typeface="Consolas"/>
               </a:defRPr>
@@ -5981,7 +7528,7 @@
               <a:spcBef>
                 <a:spcPts val="400"/>
               </a:spcBef>
-              <a:defRPr sz="1050">
+              <a:defRPr sz="1000">
                 <a:solidFill>
                   <a:srgbClr val="FFFFFF"/>
                 </a:solidFill>
@@ -6004,14 +7551,14 @@
       </p:sp>
       <p:sp>
         <p:nvSpPr>
-          <p:cNvPr id="11" name="Down Arrow 10"/>
+          <p:cNvPr id="20" name="Down Arrow 19"/>
           <p:cNvSpPr/>
           <p:nvPr/>
         </p:nvSpPr>
         <p:spPr>
           <a:xfrm>
-            <a:off x="3566160" y="4297680"/>
-            <a:ext cx="548640" cy="411480"/>
+            <a:off x="3520440" y="4251960"/>
+            <a:ext cx="365760" cy="320040"/>
           </a:xfrm>
           <a:prstGeom prst="downArrow">
             <a:avLst/>
@@ -6047,22 +7594,22 @@
       </p:sp>
       <p:sp>
         <p:nvSpPr>
-          <p:cNvPr id="12" name="Rounded Rectangle 11"/>
+          <p:cNvPr id="21" name="Snip Diagonal Corner Rectangle 20"/>
           <p:cNvSpPr/>
           <p:nvPr/>
         </p:nvSpPr>
         <p:spPr>
           <a:xfrm>
-            <a:off x="1371600" y="4846320"/>
-            <a:ext cx="4937760" cy="1097280"/>
-          </a:xfrm>
-          <a:prstGeom prst="roundRect">
+            <a:off x="1097280" y="4709160"/>
+            <a:ext cx="5212080" cy="1188720"/>
+          </a:xfrm>
+          <a:prstGeom prst="snip2DiagRect">
             <a:avLst/>
           </a:prstGeom>
           <a:solidFill>
-            <a:srgbClr val="0E2D5F"/>
+            <a:srgbClr val="07183C"/>
           </a:solidFill>
-          <a:ln w="25400">
+          <a:ln w="15240">
             <a:solidFill>
               <a:srgbClr val="34D399"/>
             </a:solidFill>
@@ -6083,11 +7630,37 @@
           </a:fontRef>
         </p:style>
         <p:txBody>
-          <a:bodyPr rtlCol="0" anchor="ctr" wrap="square"/>
+          <a:bodyPr rtlCol="0" anchor="ctr"/>
+          <a:lstStyle/>
+          <a:p>
+            <a:pPr algn="ctr"/>
+          </a:p>
+        </p:txBody>
+      </p:sp>
+      <p:sp>
+        <p:nvSpPr>
+          <p:cNvPr id="22" name="TextBox 21"/>
+          <p:cNvSpPr txBox="1"/>
+          <p:nvPr/>
+        </p:nvSpPr>
+        <p:spPr>
+          <a:xfrm>
+            <a:off x="1234440" y="4800600"/>
+            <a:ext cx="4937760" cy="1005840"/>
+          </a:xfrm>
+          <a:prstGeom prst="rect">
+            <a:avLst/>
+          </a:prstGeom>
+          <a:noFill/>
+        </p:spPr>
+        <p:txBody>
+          <a:bodyPr wrap="none">
+            <a:spAutoFit/>
+          </a:bodyPr>
           <a:lstStyle/>
           <a:p>
             <a:pPr algn="ctr">
-              <a:defRPr sz="1100" b="1">
+              <a:defRPr sz="1000" b="1">
                 <a:solidFill>
                   <a:srgbClr val="34D399"/>
                 </a:solidFill>
@@ -6111,31 +7684,31 @@
               </a:defRPr>
             </a:pPr>
             <a:r>
-              <a:t>DEVESH DAS [DEV-02] — Matched both tags in 0.4ms!</a:t>
-            </a:r>
-          </a:p>
-        </p:txBody>
-      </p:sp>
-      <p:sp>
-        <p:nvSpPr>
-          <p:cNvPr id="13" name="Rounded Rectangle 12"/>
+              <a:t>DEVESH DAS [DEV-02]  — Matched both tags in 0.4ms!</a:t>
+            </a:r>
+          </a:p>
+        </p:txBody>
+      </p:sp>
+      <p:sp>
+        <p:nvSpPr>
+          <p:cNvPr id="23" name="Snip Diagonal Corner Rectangle 22"/>
           <p:cNvSpPr/>
           <p:nvPr/>
         </p:nvSpPr>
         <p:spPr>
           <a:xfrm>
-            <a:off x="7178040" y="1828800"/>
-            <a:ext cx="4251960" cy="4480560"/>
-          </a:xfrm>
-          <a:prstGeom prst="roundRect">
+            <a:off x="6995160" y="1965960"/>
+            <a:ext cx="4602175" cy="4251960"/>
+          </a:xfrm>
+          <a:prstGeom prst="snip2DiagRect">
             <a:avLst/>
           </a:prstGeom>
           <a:solidFill>
-            <a:srgbClr val="07183A"/>
+            <a:srgbClr val="041029"/>
           </a:solidFill>
           <a:ln w="15240">
             <a:solidFill>
-              <a:srgbClr val="264D8A"/>
+              <a:srgbClr val="264073"/>
             </a:solidFill>
           </a:ln>
         </p:spPr>
@@ -6163,14 +7736,14 @@
       </p:sp>
       <p:sp>
         <p:nvSpPr>
-          <p:cNvPr id="14" name="TextBox 13"/>
+          <p:cNvPr id="24" name="TextBox 23"/>
           <p:cNvSpPr txBox="1"/>
           <p:nvPr/>
         </p:nvSpPr>
         <p:spPr>
           <a:xfrm>
-            <a:off x="7360919" y="1965960"/>
-            <a:ext cx="3886200" cy="457200"/>
+            <a:off x="7178040" y="2103120"/>
+            <a:ext cx="4206240" cy="3931920"/>
           </a:xfrm>
           <a:prstGeom prst="rect">
             <a:avLst/>
@@ -6184,116 +7757,93 @@
           <a:lstStyle/>
           <a:p>
             <a:pPr>
-              <a:defRPr sz="1400" b="1">
-                <a:solidFill>
-                  <a:srgbClr val="D5E0FF"/>
-                </a:solidFill>
-                <a:latin typeface="Trebuchet MS"/>
-              </a:defRPr>
-            </a:pPr>
-            <a:r>
-              <a:t>Why Inverted Index Excels</a:t>
-            </a:r>
-          </a:p>
-        </p:txBody>
-      </p:sp>
-      <p:sp>
-        <p:nvSpPr>
-          <p:cNvPr id="15" name="TextBox 14"/>
-          <p:cNvSpPr txBox="1"/>
-          <p:nvPr/>
-        </p:nvSpPr>
-        <p:spPr>
-          <a:xfrm>
-            <a:off x="7360920" y="2514600"/>
-            <a:ext cx="3886200" cy="3657600"/>
-          </a:xfrm>
-          <a:prstGeom prst="rect">
-            <a:avLst/>
-          </a:prstGeom>
-          <a:noFill/>
-        </p:spPr>
-        <p:txBody>
-          <a:bodyPr wrap="square">
-            <a:spAutoFit/>
-          </a:bodyPr>
-          <a:lstStyle/>
+              <a:defRPr sz="900" b="1">
+                <a:solidFill>
+                  <a:srgbClr val="8FADFF"/>
+                </a:solidFill>
+                <a:latin typeface="Consolas"/>
+              </a:defRPr>
+            </a:pPr>
+            <a:r>
+              <a:t>[SPECIFICATION] INVERTED INDEX MECHANICS</a:t>
+            </a:r>
+          </a:p>
           <a:p>
             <a:pPr>
-              <a:spcAft>
-                <a:spcPts val="1400"/>
-              </a:spcAft>
-            </a:pPr>
-            <a:r>
-              <a:rPr sz="1300" b="1">
+              <a:spcBef>
+                <a:spcPts val="1000"/>
+              </a:spcBef>
+            </a:pPr>
+            <a:r>
+              <a:rPr sz="1100" b="1">
                 <a:solidFill>
                   <a:srgbClr val="34D399"/>
                 </a:solidFill>
-                <a:latin typeface="Trebuchet MS"/>
+                <a:latin typeface="Consolas"/>
               </a:rPr>
-              <a:t>1. Reverse Mapping Dictionary
+              <a:t>[IDX 01] Reverse Mapping Dictionary
 </a:t>
             </a:r>
             <a:r>
-              <a:rPr sz="1150">
+              <a:rPr sz="1100">
                 <a:solidFill>
                   <a:srgbClr val="94A3B8"/>
                 </a:solidFill>
                 <a:latin typeface="Calibri"/>
               </a:rPr>
-              <a:t>Instead of scanning documents for words, it maps words directly to document sets: 'physics' ➔ {Doc A, Doc B}.</a:t>
+              <a:t>Instead of scanning documents for tags, it maps tags directly to pre-computed document sets: 'physics' ➔ {Doc A, Doc B}.</a:t>
             </a:r>
           </a:p>
           <a:p>
             <a:pPr>
-              <a:spcAft>
-                <a:spcPts val="1400"/>
-              </a:spcAft>
-            </a:pPr>
-            <a:r>
-              <a:rPr sz="1300" b="1">
+              <a:spcBef>
+                <a:spcPts val="1000"/>
+              </a:spcBef>
+            </a:pPr>
+            <a:r>
+              <a:rPr sz="1100" b="1">
                 <a:solidFill>
                   <a:srgbClr val="34D399"/>
                 </a:solidFill>
-                <a:latin typeface="Trebuchet MS"/>
+                <a:latin typeface="Consolas"/>
               </a:rPr>
-              <a:t>2. O(min |P1|, |P2|) Intersect
+              <a:t>[IDX 02] O(min |P1|, |P2|) Intersect
 </a:t>
             </a:r>
             <a:r>
-              <a:rPr sz="1150">
+              <a:rPr sz="1100">
                 <a:solidFill>
                   <a:srgbClr val="94A3B8"/>
                 </a:solidFill>
                 <a:latin typeface="Calibri"/>
               </a:rPr>
-              <a:t>To find items with both tags, it simply intersects the two sets. It iterates through the smaller set, instantly discarding 95% of non-matches.</a:t>
+              <a:t>To find items with both tags, it picks the smaller set as the pivot and checks membership in O(1). Instantly prunes 95% of non-matches!</a:t>
             </a:r>
           </a:p>
           <a:p>
             <a:pPr>
-              <a:spcAft>
-                <a:spcPts val="1400"/>
-              </a:spcAft>
-            </a:pPr>
-            <a:r>
-              <a:rPr sz="1300" b="1">
+              <a:spcBef>
+                <a:spcPts val="1000"/>
+              </a:spcBef>
+            </a:pPr>
+            <a:r>
+              <a:rPr sz="1100" b="1">
                 <a:solidFill>
                   <a:srgbClr val="34D399"/>
                 </a:solidFill>
-                <a:latin typeface="Trebuchet MS"/>
+                <a:latin typeface="Consolas"/>
               </a:rPr>
-              <a:t>3. Zero Scanning Overhead
+              <a:t>[IDX 03] Constant Dictionary Time
 </a:t>
             </a:r>
             <a:r>
-              <a:rPr sz="1150">
+              <a:rPr sz="1100">
                 <a:solidFill>
                   <a:srgbClr val="94A3B8"/>
                 </a:solidFill>
                 <a:latin typeface="Calibri"/>
               </a:rPr>
-              <a:t>No nested loops, no string slicing. Lookups happen in constant dictionary time O(1).</a:t>
+              <a:t>Zero string parsing overhead during search queries. Set retrievals execute in constant O(1) hash map time.</a:t>
             </a:r>
           </a:p>
         </p:txBody>
@@ -6316,12 +7866,20 @@
         <p:nvPr/>
       </p:nvGrpSpPr>
       <p:grpSpPr/>
-      <p:sp>
-        <p:nvSpPr>
-          <p:cNvPr id="2" name="Rectangle 1"/>
-          <p:cNvSpPr/>
-          <p:nvPr/>
-        </p:nvSpPr>
+      <p:pic>
+        <p:nvPicPr>
+          <p:cNvPr id="2" name="Picture 1" descr="acedevs_hud_bg.png"/>
+          <p:cNvPicPr>
+            <a:picLocks noChangeAspect="1"/>
+          </p:cNvPicPr>
+          <p:nvPr/>
+        </p:nvPicPr>
+        <p:blipFill>
+          <a:blip r:embed="rId2"/>
+          <a:stretch>
+            <a:fillRect/>
+          </a:stretch>
+        </p:blipFill>
         <p:spPr>
           <a:xfrm>
             <a:off x="0" y="0"/>
@@ -6330,8 +7888,175 @@
           <a:prstGeom prst="rect">
             <a:avLst/>
           </a:prstGeom>
+        </p:spPr>
+      </p:pic>
+      <p:sp>
+        <p:nvSpPr>
+          <p:cNvPr id="3" name="TextBox 2"/>
+          <p:cNvSpPr txBox="1"/>
+          <p:nvPr/>
+        </p:nvSpPr>
+        <p:spPr>
+          <a:xfrm>
+            <a:off x="594360" y="256032"/>
+            <a:ext cx="2286000" cy="365760"/>
+          </a:xfrm>
+          <a:prstGeom prst="rect">
+            <a:avLst/>
+          </a:prstGeom>
+          <a:noFill/>
+        </p:spPr>
+        <p:txBody>
+          <a:bodyPr wrap="none">
+            <a:spAutoFit/>
+          </a:bodyPr>
+          <a:lstStyle/>
+          <a:p>
+            <a:r>
+              <a:rPr sz="1300" b="1">
+                <a:solidFill>
+                  <a:srgbClr val="8FADFF"/>
+                </a:solidFill>
+                <a:latin typeface="Trebuchet MS"/>
+              </a:rPr>
+              <a:t>▲ </a:t>
+            </a:r>
+            <a:r>
+              <a:rPr sz="1300" b="1">
+                <a:solidFill>
+                  <a:srgbClr val="FFFFFF"/>
+                </a:solidFill>
+                <a:latin typeface="Trebuchet MS"/>
+              </a:rPr>
+              <a:t>ACEDEVS</a:t>
+            </a:r>
+          </a:p>
+        </p:txBody>
+      </p:sp>
+      <p:sp>
+        <p:nvSpPr>
+          <p:cNvPr id="4" name="TextBox 3"/>
+          <p:cNvSpPr txBox="1"/>
+          <p:nvPr/>
+        </p:nvSpPr>
+        <p:spPr>
+          <a:xfrm>
+            <a:off x="3017520" y="256032"/>
+            <a:ext cx="5486400" cy="365760"/>
+          </a:xfrm>
+          <a:prstGeom prst="rect">
+            <a:avLst/>
+          </a:prstGeom>
+          <a:noFill/>
+        </p:spPr>
+        <p:txBody>
+          <a:bodyPr wrap="none">
+            <a:spAutoFit/>
+          </a:bodyPr>
+          <a:lstStyle/>
+          <a:p>
+            <a:pPr>
+              <a:defRPr sz="900">
+                <a:solidFill>
+                  <a:srgbClr val="94A3B8"/>
+                </a:solidFill>
+                <a:latin typeface="Consolas"/>
+              </a:defRPr>
+            </a:pPr>
+            <a:r>
+              <a:t>SHOWCASE [02]    TEAM [02]    REPOSITORIES [04]    BLOG [05]</a:t>
+            </a:r>
+          </a:p>
+        </p:txBody>
+      </p:sp>
+      <p:sp>
+        <p:nvSpPr>
+          <p:cNvPr id="5" name="TextBox 4"/>
+          <p:cNvSpPr txBox="1"/>
+          <p:nvPr/>
+        </p:nvSpPr>
+        <p:spPr>
+          <a:xfrm>
+            <a:off x="8595360" y="256032"/>
+            <a:ext cx="3017520" cy="365760"/>
+          </a:xfrm>
+          <a:prstGeom prst="rect">
+            <a:avLst/>
+          </a:prstGeom>
+          <a:noFill/>
+        </p:spPr>
+        <p:txBody>
+          <a:bodyPr wrap="none">
+            <a:spAutoFit/>
+          </a:bodyPr>
+          <a:lstStyle/>
+          <a:p>
+            <a:pPr algn="r">
+              <a:defRPr sz="900" b="1">
+                <a:solidFill>
+                  <a:srgbClr val="D5E0FF"/>
+                </a:solidFill>
+                <a:latin typeface="Consolas"/>
+              </a:defRPr>
+            </a:pPr>
+            <a:r>
+              <a:t>SEARCH [⌘K]    SLIDE [05/06]</a:t>
+            </a:r>
+          </a:p>
+        </p:txBody>
+      </p:sp>
+      <p:sp>
+        <p:nvSpPr>
+          <p:cNvPr id="6" name="TextBox 5"/>
+          <p:cNvSpPr txBox="1"/>
+          <p:nvPr/>
+        </p:nvSpPr>
+        <p:spPr>
+          <a:xfrm>
+            <a:off x="594360" y="658368"/>
+            <a:ext cx="10972800" cy="274320"/>
+          </a:xfrm>
+          <a:prstGeom prst="rect">
+            <a:avLst/>
+          </a:prstGeom>
+          <a:noFill/>
+        </p:spPr>
+        <p:txBody>
+          <a:bodyPr wrap="none">
+            <a:spAutoFit/>
+          </a:bodyPr>
+          <a:lstStyle/>
+          <a:p>
+            <a:pPr algn="ctr">
+              <a:defRPr sz="850">
+                <a:solidFill>
+                  <a:srgbClr val="94A3B8"/>
+                </a:solidFill>
+                <a:latin typeface="Consolas"/>
+              </a:defRPr>
+            </a:pPr>
+            <a:r>
+              <a:t>SYS: ONLINE // SECTOR: DSA-ENGINE  |  COORDINATES: 20.2961° N, 85.8245° E  |  AZIMUTH: 125°  |  ■ V1.0</a:t>
+            </a:r>
+          </a:p>
+        </p:txBody>
+      </p:sp>
+      <p:sp>
+        <p:nvSpPr>
+          <p:cNvPr id="7" name="Rectangle 6"/>
+          <p:cNvSpPr/>
+          <p:nvPr/>
+        </p:nvSpPr>
+        <p:spPr>
+          <a:xfrm>
+            <a:off x="594360" y="960120"/>
+            <a:ext cx="11002975" cy="13716"/>
+          </a:xfrm>
+          <a:prstGeom prst="rect">
+            <a:avLst/>
+          </a:prstGeom>
           <a:solidFill>
-            <a:srgbClr val="020A19"/>
+            <a:srgbClr val="264073"/>
           </a:solidFill>
           <a:ln>
             <a:noFill/>
@@ -6361,25 +8086,23 @@
       </p:sp>
       <p:sp>
         <p:nvSpPr>
-          <p:cNvPr id="3" name="Rounded Rectangle 2"/>
+          <p:cNvPr id="8" name="Rectangle 7"/>
           <p:cNvSpPr/>
           <p:nvPr/>
         </p:nvSpPr>
         <p:spPr>
           <a:xfrm>
-            <a:off x="731520" y="384048"/>
-            <a:ext cx="3108960" cy="292608"/>
-          </a:xfrm>
-          <a:prstGeom prst="roundRect">
+            <a:off x="594360" y="6400800"/>
+            <a:ext cx="11002975" cy="13716"/>
+          </a:xfrm>
+          <a:prstGeom prst="rect">
             <a:avLst/>
           </a:prstGeom>
           <a:solidFill>
-            <a:srgbClr val="0B214D"/>
+            <a:srgbClr val="264073"/>
           </a:solidFill>
-          <a:ln w="12700">
-            <a:solidFill>
-              <a:srgbClr val="60A5FA"/>
-            </a:solidFill>
+          <a:ln>
+            <a:noFill/>
           </a:ln>
         </p:spPr>
         <p:style>
@@ -6401,28 +8124,19 @@
           <a:lstStyle/>
           <a:p>
             <a:pPr algn="ctr"/>
-            <a:r>
-              <a:rPr sz="950" b="1">
-                <a:solidFill>
-                  <a:srgbClr val="60A5FA"/>
-                </a:solidFill>
-                <a:latin typeface="Consolas"/>
-              </a:rPr>
-              <a:t>// SYSTEM PIPELINE</a:t>
-            </a:r>
-          </a:p>
-        </p:txBody>
-      </p:sp>
-      <p:sp>
-        <p:nvSpPr>
-          <p:cNvPr id="4" name="TextBox 3"/>
+          </a:p>
+        </p:txBody>
+      </p:sp>
+      <p:sp>
+        <p:nvSpPr>
+          <p:cNvPr id="9" name="TextBox 8"/>
           <p:cNvSpPr txBox="1"/>
           <p:nvPr/>
         </p:nvSpPr>
         <p:spPr>
           <a:xfrm>
-            <a:off x="685800" y="731520"/>
-            <a:ext cx="10789920" cy="731520"/>
+            <a:off x="594360" y="6446520"/>
+            <a:ext cx="4114800" cy="320040"/>
           </a:xfrm>
           <a:prstGeom prst="rect">
             <a:avLst/>
@@ -6430,60 +8144,46 @@
           <a:noFill/>
         </p:spPr>
         <p:txBody>
-          <a:bodyPr wrap="square">
+          <a:bodyPr wrap="none">
             <a:spAutoFit/>
           </a:bodyPr>
           <a:lstStyle/>
           <a:p>
             <a:pPr>
-              <a:defRPr sz="2400" b="1">
-                <a:solidFill>
-                  <a:srgbClr val="D5E0FF"/>
-                </a:solidFill>
-                <a:latin typeface="Trebuchet MS"/>
-              </a:defRPr>
-            </a:pPr>
-            <a:r>
-              <a:t>How It All Works Together in AceDevs</a:t>
-            </a:r>
-          </a:p>
-          <a:p>
-            <a:pPr>
-              <a:spcBef>
-                <a:spcPts val="300"/>
-              </a:spcBef>
-              <a:defRPr sz="1300">
+              <a:defRPr sz="850">
                 <a:solidFill>
                   <a:srgbClr val="94A3B8"/>
                 </a:solidFill>
-                <a:latin typeface="Calibri"/>
-              </a:defRPr>
-            </a:pPr>
-            <a:r>
-              <a:t>Tracing a real query through the keystroke, Trie expansion, and inverted set intersection.</a:t>
-            </a:r>
-          </a:p>
-        </p:txBody>
-      </p:sp>
-      <p:sp>
-        <p:nvSpPr>
-          <p:cNvPr id="5" name="Rectangle 4"/>
+                <a:latin typeface="Consolas"/>
+              </a:defRPr>
+            </a:pPr>
+            <a:r>
+              <a:t>ZOOM 1.0X  500M    ∿ SOUND [ON] // 60 FPS</a:t>
+            </a:r>
+          </a:p>
+        </p:txBody>
+      </p:sp>
+      <p:sp>
+        <p:nvSpPr>
+          <p:cNvPr id="10" name="Snip Diagonal Corner Rectangle 9"/>
           <p:cNvSpPr/>
           <p:nvPr/>
         </p:nvSpPr>
         <p:spPr>
           <a:xfrm>
-            <a:off x="731520" y="1536192"/>
-            <a:ext cx="10728655" cy="13716"/>
-          </a:xfrm>
-          <a:prstGeom prst="rect">
+            <a:off x="4663440" y="6446520"/>
+            <a:ext cx="2834640" cy="256032"/>
+          </a:xfrm>
+          <a:prstGeom prst="snip2DiagRect">
             <a:avLst/>
           </a:prstGeom>
           <a:solidFill>
-            <a:srgbClr val="264D8A"/>
+            <a:srgbClr val="041029"/>
           </a:solidFill>
-          <a:ln>
-            <a:noFill/>
+          <a:ln w="12700">
+            <a:solidFill>
+              <a:srgbClr val="264073"/>
+            </a:solidFill>
           </a:ln>
         </p:spPr>
         <p:style>
@@ -6505,29 +8205,140 @@
           <a:lstStyle/>
           <a:p>
             <a:pPr algn="ctr"/>
-          </a:p>
-        </p:txBody>
-      </p:sp>
-      <p:sp>
-        <p:nvSpPr>
-          <p:cNvPr id="6" name="Rounded Rectangle 5"/>
+            <a:r>
+              <a:rPr sz="800">
+                <a:solidFill>
+                  <a:srgbClr val="D5E0FF"/>
+                </a:solidFill>
+                <a:latin typeface="Consolas"/>
+              </a:rPr>
+              <a:t>◎ EXECUTION PIPELINE ◎</a:t>
+            </a:r>
+          </a:p>
+        </p:txBody>
+      </p:sp>
+      <p:sp>
+        <p:nvSpPr>
+          <p:cNvPr id="11" name="TextBox 10"/>
+          <p:cNvSpPr txBox="1"/>
+          <p:nvPr/>
+        </p:nvSpPr>
+        <p:spPr>
+          <a:xfrm>
+            <a:off x="8412480" y="6446520"/>
+            <a:ext cx="3154680" cy="320040"/>
+          </a:xfrm>
+          <a:prstGeom prst="rect">
+            <a:avLst/>
+          </a:prstGeom>
+          <a:noFill/>
+        </p:spPr>
+        <p:txBody>
+          <a:bodyPr wrap="none">
+            <a:spAutoFit/>
+          </a:bodyPr>
+          <a:lstStyle/>
+          <a:p>
+            <a:pPr algn="r">
+              <a:defRPr sz="850" b="1">
+                <a:solidFill>
+                  <a:srgbClr val="8FADFF"/>
+                </a:solidFill>
+                <a:latin typeface="Consolas"/>
+              </a:defRPr>
+            </a:pPr>
+            <a:r>
+              <a:t>FILTERS [00]    ◎ 125° N</a:t>
+            </a:r>
+          </a:p>
+        </p:txBody>
+      </p:sp>
+      <p:sp>
+        <p:nvSpPr>
+          <p:cNvPr id="12" name="TextBox 11"/>
+          <p:cNvSpPr txBox="1"/>
+          <p:nvPr/>
+        </p:nvSpPr>
+        <p:spPr>
+          <a:xfrm>
+            <a:off x="594360" y="1051560"/>
+            <a:ext cx="10972800" cy="777240"/>
+          </a:xfrm>
+          <a:prstGeom prst="rect">
+            <a:avLst/>
+          </a:prstGeom>
+          <a:noFill/>
+        </p:spPr>
+        <p:txBody>
+          <a:bodyPr wrap="square">
+            <a:spAutoFit/>
+          </a:bodyPr>
+          <a:lstStyle/>
+          <a:p>
+            <a:r>
+              <a:rPr sz="950" b="1">
+                <a:solidFill>
+                  <a:srgbClr val="8FADFF"/>
+                </a:solidFill>
+                <a:latin typeface="Consolas"/>
+              </a:rPr>
+              <a:t>// SYSTEM PIPELINE  </a:t>
+            </a:r>
+          </a:p>
+          <a:p>
+            <a:pPr>
+              <a:spcBef>
+                <a:spcPts val="200"/>
+              </a:spcBef>
+              <a:defRPr sz="2100" b="1">
+                <a:solidFill>
+                  <a:srgbClr val="FFFFFF"/>
+                </a:solidFill>
+                <a:latin typeface="Trebuchet MS"/>
+              </a:defRPr>
+            </a:pPr>
+            <a:r>
+              <a:t>End-to-End Query Execution in AceDevs</a:t>
+            </a:r>
+          </a:p>
+          <a:p>
+            <a:pPr>
+              <a:spcBef>
+                <a:spcPts val="200"/>
+              </a:spcBef>
+              <a:defRPr sz="1150">
+                <a:solidFill>
+                  <a:srgbClr val="94A3B8"/>
+                </a:solidFill>
+                <a:latin typeface="Calibri"/>
+              </a:defRPr>
+            </a:pPr>
+            <a:r>
+              <a:t>Tracing a user query from keyboard shortcut to instant HUD screen display.</a:t>
+            </a:r>
+          </a:p>
+        </p:txBody>
+      </p:sp>
+      <p:sp>
+        <p:nvSpPr>
+          <p:cNvPr id="13" name="Snip Diagonal Corner Rectangle 12"/>
           <p:cNvSpPr/>
           <p:nvPr/>
         </p:nvSpPr>
         <p:spPr>
           <a:xfrm>
-            <a:off x="731520" y="1920240"/>
-            <a:ext cx="2377440" cy="2468880"/>
-          </a:xfrm>
-          <a:prstGeom prst="roundRect">
+            <a:off x="594360" y="2011680"/>
+            <a:ext cx="2468880" cy="2423160"/>
+          </a:xfrm>
+          <a:prstGeom prst="snip2DiagRect">
             <a:avLst/>
           </a:prstGeom>
           <a:solidFill>
-            <a:srgbClr val="07183A"/>
+            <a:srgbClr val="041029"/>
           </a:solidFill>
           <a:ln w="15240">
             <a:solidFill>
-              <a:srgbClr val="60A5FA"/>
+              <a:srgbClr val="8FADFF"/>
             </a:solidFill>
           </a:ln>
         </p:spPr>
@@ -6555,14 +8366,14 @@
       </p:sp>
       <p:sp>
         <p:nvSpPr>
-          <p:cNvPr id="7" name="TextBox 6"/>
+          <p:cNvPr id="14" name="TextBox 13"/>
           <p:cNvSpPr txBox="1"/>
           <p:nvPr/>
         </p:nvSpPr>
         <p:spPr>
           <a:xfrm>
-            <a:off x="868680" y="2057400"/>
-            <a:ext cx="2103120" cy="2194560"/>
+            <a:off x="731520" y="2148840"/>
+            <a:ext cx="2194560" cy="2103120"/>
           </a:xfrm>
           <a:prstGeom prst="rect">
             <a:avLst/>
@@ -6576,15 +8387,15 @@
           <a:lstStyle/>
           <a:p>
             <a:pPr>
-              <a:defRPr sz="1000" b="1">
-                <a:solidFill>
-                  <a:srgbClr val="60A5FA"/>
+              <a:defRPr sz="950" b="1">
+                <a:solidFill>
+                  <a:srgbClr val="8FADFF"/>
                 </a:solidFill>
                 <a:latin typeface="Consolas"/>
               </a:defRPr>
             </a:pPr>
             <a:r>
-              <a:t>STEP 1</a:t>
+              <a:t>[01] INPUT</a:t>
             </a:r>
           </a:p>
           <a:p>
@@ -6608,7 +8419,7 @@
               <a:spcBef>
                 <a:spcPts val="600"/>
               </a:spcBef>
-              <a:defRPr sz="1100">
+              <a:defRPr sz="1050">
                 <a:solidFill>
                   <a:srgbClr val="94A3B8"/>
                 </a:solidFill>
@@ -6628,20 +8439,20 @@
       </p:sp>
       <p:sp>
         <p:nvSpPr>
-          <p:cNvPr id="8" name="Right Arrow 7"/>
+          <p:cNvPr id="15" name="Right Arrow 14"/>
           <p:cNvSpPr/>
           <p:nvPr/>
         </p:nvSpPr>
         <p:spPr>
           <a:xfrm>
-            <a:off x="3182112" y="2926080"/>
-            <a:ext cx="256032" cy="320040"/>
+            <a:off x="3136392" y="3017520"/>
+            <a:ext cx="228600" cy="320040"/>
           </a:xfrm>
           <a:prstGeom prst="rightArrow">
             <a:avLst/>
           </a:prstGeom>
           <a:solidFill>
-            <a:srgbClr val="60A5FA"/>
+            <a:srgbClr val="8FADFF"/>
           </a:solidFill>
           <a:ln>
             <a:noFill/>
@@ -6671,24 +8482,24 @@
       </p:sp>
       <p:sp>
         <p:nvSpPr>
-          <p:cNvPr id="9" name="Rounded Rectangle 8"/>
+          <p:cNvPr id="16" name="Snip Diagonal Corner Rectangle 15"/>
           <p:cNvSpPr/>
           <p:nvPr/>
         </p:nvSpPr>
         <p:spPr>
           <a:xfrm>
-            <a:off x="3511296" y="1920240"/>
-            <a:ext cx="2377440" cy="2468880"/>
-          </a:xfrm>
-          <a:prstGeom prst="roundRect">
+            <a:off x="3438144" y="2011680"/>
+            <a:ext cx="2468880" cy="2423160"/>
+          </a:xfrm>
+          <a:prstGeom prst="snip2DiagRect">
             <a:avLst/>
           </a:prstGeom>
           <a:solidFill>
-            <a:srgbClr val="07183A"/>
+            <a:srgbClr val="041029"/>
           </a:solidFill>
           <a:ln w="15240">
             <a:solidFill>
-              <a:srgbClr val="60A5FA"/>
+              <a:srgbClr val="8FADFF"/>
             </a:solidFill>
           </a:ln>
         </p:spPr>
@@ -6716,14 +8527,14 @@
       </p:sp>
       <p:sp>
         <p:nvSpPr>
-          <p:cNvPr id="10" name="TextBox 9"/>
+          <p:cNvPr id="17" name="TextBox 16"/>
           <p:cNvSpPr txBox="1"/>
           <p:nvPr/>
         </p:nvSpPr>
         <p:spPr>
           <a:xfrm>
-            <a:off x="3648456" y="2057400"/>
-            <a:ext cx="2103120" cy="2194560"/>
+            <a:off x="3575304" y="2148840"/>
+            <a:ext cx="2194560" cy="2103120"/>
           </a:xfrm>
           <a:prstGeom prst="rect">
             <a:avLst/>
@@ -6737,15 +8548,15 @@
           <a:lstStyle/>
           <a:p>
             <a:pPr>
-              <a:defRPr sz="1000" b="1">
-                <a:solidFill>
-                  <a:srgbClr val="60A5FA"/>
+              <a:defRPr sz="950" b="1">
+                <a:solidFill>
+                  <a:srgbClr val="8FADFF"/>
                 </a:solidFill>
                 <a:latin typeface="Consolas"/>
               </a:defRPr>
             </a:pPr>
             <a:r>
-              <a:t>STEP 2</a:t>
+              <a:t>[02] TRIE</a:t>
             </a:r>
           </a:p>
           <a:p>
@@ -6761,7 +8572,7 @@
               </a:defRPr>
             </a:pPr>
             <a:r>
-              <a:t>Prefix Trie</a:t>
+              <a:t>Prefix Autocomplete</a:t>
             </a:r>
           </a:p>
           <a:p>
@@ -6769,7 +8580,7 @@
               <a:spcBef>
                 <a:spcPts val="600"/>
               </a:spcBef>
-              <a:defRPr sz="1100">
+              <a:defRPr sz="1050">
                 <a:solidFill>
                   <a:srgbClr val="94A3B8"/>
                 </a:solidFill>
@@ -6789,20 +8600,20 @@
       </p:sp>
       <p:sp>
         <p:nvSpPr>
-          <p:cNvPr id="11" name="Right Arrow 10"/>
+          <p:cNvPr id="18" name="Right Arrow 17"/>
           <p:cNvSpPr/>
           <p:nvPr/>
         </p:nvSpPr>
         <p:spPr>
           <a:xfrm>
-            <a:off x="5961888" y="2926080"/>
-            <a:ext cx="256032" cy="320040"/>
+            <a:off x="5980176" y="3017520"/>
+            <a:ext cx="228600" cy="320040"/>
           </a:xfrm>
           <a:prstGeom prst="rightArrow">
             <a:avLst/>
           </a:prstGeom>
           <a:solidFill>
-            <a:srgbClr val="60A5FA"/>
+            <a:srgbClr val="8FADFF"/>
           </a:solidFill>
           <a:ln>
             <a:noFill/>
@@ -6832,20 +8643,20 @@
       </p:sp>
       <p:sp>
         <p:nvSpPr>
-          <p:cNvPr id="12" name="Rounded Rectangle 11"/>
+          <p:cNvPr id="19" name="Snip Diagonal Corner Rectangle 18"/>
           <p:cNvSpPr/>
           <p:nvPr/>
         </p:nvSpPr>
         <p:spPr>
           <a:xfrm>
-            <a:off x="6291072" y="1920240"/>
-            <a:ext cx="2377440" cy="2468880"/>
-          </a:xfrm>
-          <a:prstGeom prst="roundRect">
+            <a:off x="6281928" y="2011680"/>
+            <a:ext cx="2468880" cy="2423160"/>
+          </a:xfrm>
+          <a:prstGeom prst="snip2DiagRect">
             <a:avLst/>
           </a:prstGeom>
           <a:solidFill>
-            <a:srgbClr val="07183A"/>
+            <a:srgbClr val="041029"/>
           </a:solidFill>
           <a:ln w="15240">
             <a:solidFill>
@@ -6877,14 +8688,14 @@
       </p:sp>
       <p:sp>
         <p:nvSpPr>
-          <p:cNvPr id="13" name="TextBox 12"/>
+          <p:cNvPr id="20" name="TextBox 19"/>
           <p:cNvSpPr txBox="1"/>
           <p:nvPr/>
         </p:nvSpPr>
         <p:spPr>
           <a:xfrm>
-            <a:off x="6428232" y="2057400"/>
-            <a:ext cx="2103120" cy="2194560"/>
+            <a:off x="6419088" y="2148840"/>
+            <a:ext cx="2194560" cy="2103120"/>
           </a:xfrm>
           <a:prstGeom prst="rect">
             <a:avLst/>
@@ -6898,7 +8709,7 @@
           <a:lstStyle/>
           <a:p>
             <a:pPr>
-              <a:defRPr sz="1000" b="1">
+              <a:defRPr sz="950" b="1">
                 <a:solidFill>
                   <a:srgbClr val="34D399"/>
                 </a:solidFill>
@@ -6906,7 +8717,7 @@
               </a:defRPr>
             </a:pPr>
             <a:r>
-              <a:t>STEP 3</a:t>
+              <a:t>[03] INDEX</a:t>
             </a:r>
           </a:p>
           <a:p>
@@ -6922,7 +8733,7 @@
               </a:defRPr>
             </a:pPr>
             <a:r>
-              <a:t>Inverted Index</a:t>
+              <a:t>Posting Intersect</a:t>
             </a:r>
           </a:p>
           <a:p>
@@ -6930,7 +8741,7 @@
               <a:spcBef>
                 <a:spcPts val="600"/>
               </a:spcBef>
-              <a:defRPr sz="1100">
+              <a:defRPr sz="1050">
                 <a:solidFill>
                   <a:srgbClr val="94A3B8"/>
                 </a:solidFill>
@@ -6954,20 +8765,20 @@
       </p:sp>
       <p:sp>
         <p:nvSpPr>
-          <p:cNvPr id="14" name="Right Arrow 13"/>
+          <p:cNvPr id="21" name="Right Arrow 20"/>
           <p:cNvSpPr/>
           <p:nvPr/>
         </p:nvSpPr>
         <p:spPr>
           <a:xfrm>
-            <a:off x="8741664" y="2926080"/>
-            <a:ext cx="256032" cy="320040"/>
+            <a:off x="8823960" y="3017520"/>
+            <a:ext cx="228600" cy="320040"/>
           </a:xfrm>
           <a:prstGeom prst="rightArrow">
             <a:avLst/>
           </a:prstGeom>
           <a:solidFill>
-            <a:srgbClr val="60A5FA"/>
+            <a:srgbClr val="8FADFF"/>
           </a:solidFill>
           <a:ln>
             <a:noFill/>
@@ -6997,20 +8808,20 @@
       </p:sp>
       <p:sp>
         <p:nvSpPr>
-          <p:cNvPr id="15" name="Rounded Rectangle 14"/>
+          <p:cNvPr id="22" name="Snip Diagonal Corner Rectangle 21"/>
           <p:cNvSpPr/>
           <p:nvPr/>
         </p:nvSpPr>
         <p:spPr>
           <a:xfrm>
-            <a:off x="9070848" y="1920240"/>
-            <a:ext cx="2377440" cy="2468880"/>
-          </a:xfrm>
-          <a:prstGeom prst="roundRect">
+            <a:off x="9125712" y="2011680"/>
+            <a:ext cx="2468880" cy="2423160"/>
+          </a:xfrm>
+          <a:prstGeom prst="snip2DiagRect">
             <a:avLst/>
           </a:prstGeom>
           <a:solidFill>
-            <a:srgbClr val="07183A"/>
+            <a:srgbClr val="041029"/>
           </a:solidFill>
           <a:ln w="15240">
             <a:solidFill>
@@ -7042,14 +8853,14 @@
       </p:sp>
       <p:sp>
         <p:nvSpPr>
-          <p:cNvPr id="16" name="TextBox 15"/>
+          <p:cNvPr id="23" name="TextBox 22"/>
           <p:cNvSpPr txBox="1"/>
           <p:nvPr/>
         </p:nvSpPr>
         <p:spPr>
           <a:xfrm>
-            <a:off x="9208008" y="2057400"/>
-            <a:ext cx="2103120" cy="2194560"/>
+            <a:off x="9262872" y="2148840"/>
+            <a:ext cx="2194560" cy="2103120"/>
           </a:xfrm>
           <a:prstGeom prst="rect">
             <a:avLst/>
@@ -7063,7 +8874,7 @@
           <a:lstStyle/>
           <a:p>
             <a:pPr>
-              <a:defRPr sz="1000" b="1">
+              <a:defRPr sz="950" b="1">
                 <a:solidFill>
                   <a:srgbClr val="34D399"/>
                 </a:solidFill>
@@ -7071,7 +8882,7 @@
               </a:defRPr>
             </a:pPr>
             <a:r>
-              <a:t>STEP 4</a:t>
+              <a:t>[04] HUD</a:t>
             </a:r>
           </a:p>
           <a:p>
@@ -7095,7 +8906,7 @@
               <a:spcBef>
                 <a:spcPts val="600"/>
               </a:spcBef>
-              <a:defRPr sz="1100">
+              <a:defRPr sz="1050">
                 <a:solidFill>
                   <a:srgbClr val="94A3B8"/>
                 </a:solidFill>
@@ -7115,24 +8926,24 @@
       </p:sp>
       <p:sp>
         <p:nvSpPr>
-          <p:cNvPr id="17" name="Rounded Rectangle 16"/>
+          <p:cNvPr id="24" name="Snip Diagonal Corner Rectangle 23"/>
           <p:cNvSpPr/>
           <p:nvPr/>
         </p:nvSpPr>
         <p:spPr>
           <a:xfrm>
-            <a:off x="731520" y="4709160"/>
-            <a:ext cx="10728655" cy="1600200"/>
-          </a:xfrm>
-          <a:prstGeom prst="roundRect">
+            <a:off x="594360" y="4663440"/>
+            <a:ext cx="11002975" cy="1554480"/>
+          </a:xfrm>
+          <a:prstGeom prst="snip2DiagRect">
             <a:avLst/>
           </a:prstGeom>
           <a:solidFill>
-            <a:srgbClr val="0E2D5F"/>
+            <a:srgbClr val="07183C"/>
           </a:solidFill>
           <a:ln w="15240">
             <a:solidFill>
-              <a:srgbClr val="264D8A"/>
+              <a:srgbClr val="264073"/>
             </a:solidFill>
           </a:ln>
         </p:spPr>
@@ -7160,14 +8971,14 @@
       </p:sp>
       <p:sp>
         <p:nvSpPr>
-          <p:cNvPr id="18" name="TextBox 17"/>
+          <p:cNvPr id="25" name="TextBox 24"/>
           <p:cNvSpPr txBox="1"/>
           <p:nvPr/>
         </p:nvSpPr>
         <p:spPr>
           <a:xfrm>
-            <a:off x="914400" y="4800600"/>
-            <a:ext cx="10332720" cy="1371600"/>
+            <a:off x="777240" y="4754880"/>
+            <a:ext cx="10607040" cy="1371600"/>
           </a:xfrm>
           <a:prstGeom prst="rect">
             <a:avLst/>
@@ -7181,7 +8992,7 @@
           <a:lstStyle/>
           <a:p>
             <a:pPr>
-              <a:defRPr sz="1100" b="1">
+              <a:defRPr sz="1000" b="1">
                 <a:solidFill>
                   <a:srgbClr val="34D399"/>
                 </a:solidFill>
@@ -7189,7 +9000,7 @@
               </a:defRPr>
             </a:pPr>
             <a:r>
-              <a:t>REAL-TIME PRODUCTION INTEGRATION IN ACEDEVS</a:t>
+              <a:t>PRODUCTION INTEGRATION IN ACEDEVS</a:t>
             </a:r>
           </a:p>
           <a:p>
@@ -7236,12 +9047,20 @@
         <p:nvPr/>
       </p:nvGrpSpPr>
       <p:grpSpPr/>
-      <p:sp>
-        <p:nvSpPr>
-          <p:cNvPr id="2" name="Rectangle 1"/>
-          <p:cNvSpPr/>
-          <p:nvPr/>
-        </p:nvSpPr>
+      <p:pic>
+        <p:nvPicPr>
+          <p:cNvPr id="2" name="Picture 1" descr="acedevs_hud_bg.png"/>
+          <p:cNvPicPr>
+            <a:picLocks noChangeAspect="1"/>
+          </p:cNvPicPr>
+          <p:nvPr/>
+        </p:nvPicPr>
+        <p:blipFill>
+          <a:blip r:embed="rId2"/>
+          <a:stretch>
+            <a:fillRect/>
+          </a:stretch>
+        </p:blipFill>
         <p:spPr>
           <a:xfrm>
             <a:off x="0" y="0"/>
@@ -7250,8 +9069,175 @@
           <a:prstGeom prst="rect">
             <a:avLst/>
           </a:prstGeom>
+        </p:spPr>
+      </p:pic>
+      <p:sp>
+        <p:nvSpPr>
+          <p:cNvPr id="3" name="TextBox 2"/>
+          <p:cNvSpPr txBox="1"/>
+          <p:nvPr/>
+        </p:nvSpPr>
+        <p:spPr>
+          <a:xfrm>
+            <a:off x="594360" y="256032"/>
+            <a:ext cx="2286000" cy="365760"/>
+          </a:xfrm>
+          <a:prstGeom prst="rect">
+            <a:avLst/>
+          </a:prstGeom>
+          <a:noFill/>
+        </p:spPr>
+        <p:txBody>
+          <a:bodyPr wrap="none">
+            <a:spAutoFit/>
+          </a:bodyPr>
+          <a:lstStyle/>
+          <a:p>
+            <a:r>
+              <a:rPr sz="1300" b="1">
+                <a:solidFill>
+                  <a:srgbClr val="8FADFF"/>
+                </a:solidFill>
+                <a:latin typeface="Trebuchet MS"/>
+              </a:rPr>
+              <a:t>▲ </a:t>
+            </a:r>
+            <a:r>
+              <a:rPr sz="1300" b="1">
+                <a:solidFill>
+                  <a:srgbClr val="FFFFFF"/>
+                </a:solidFill>
+                <a:latin typeface="Trebuchet MS"/>
+              </a:rPr>
+              <a:t>ACEDEVS</a:t>
+            </a:r>
+          </a:p>
+        </p:txBody>
+      </p:sp>
+      <p:sp>
+        <p:nvSpPr>
+          <p:cNvPr id="4" name="TextBox 3"/>
+          <p:cNvSpPr txBox="1"/>
+          <p:nvPr/>
+        </p:nvSpPr>
+        <p:spPr>
+          <a:xfrm>
+            <a:off x="3017520" y="256032"/>
+            <a:ext cx="5486400" cy="365760"/>
+          </a:xfrm>
+          <a:prstGeom prst="rect">
+            <a:avLst/>
+          </a:prstGeom>
+          <a:noFill/>
+        </p:spPr>
+        <p:txBody>
+          <a:bodyPr wrap="none">
+            <a:spAutoFit/>
+          </a:bodyPr>
+          <a:lstStyle/>
+          <a:p>
+            <a:pPr>
+              <a:defRPr sz="900">
+                <a:solidFill>
+                  <a:srgbClr val="94A3B8"/>
+                </a:solidFill>
+                <a:latin typeface="Consolas"/>
+              </a:defRPr>
+            </a:pPr>
+            <a:r>
+              <a:t>SHOWCASE [02]    TEAM [02]    REPOSITORIES [04]    BLOG [05]</a:t>
+            </a:r>
+          </a:p>
+        </p:txBody>
+      </p:sp>
+      <p:sp>
+        <p:nvSpPr>
+          <p:cNvPr id="5" name="TextBox 4"/>
+          <p:cNvSpPr txBox="1"/>
+          <p:nvPr/>
+        </p:nvSpPr>
+        <p:spPr>
+          <a:xfrm>
+            <a:off x="8595360" y="256032"/>
+            <a:ext cx="3017520" cy="365760"/>
+          </a:xfrm>
+          <a:prstGeom prst="rect">
+            <a:avLst/>
+          </a:prstGeom>
+          <a:noFill/>
+        </p:spPr>
+        <p:txBody>
+          <a:bodyPr wrap="none">
+            <a:spAutoFit/>
+          </a:bodyPr>
+          <a:lstStyle/>
+          <a:p>
+            <a:pPr algn="r">
+              <a:defRPr sz="900" b="1">
+                <a:solidFill>
+                  <a:srgbClr val="D5E0FF"/>
+                </a:solidFill>
+                <a:latin typeface="Consolas"/>
+              </a:defRPr>
+            </a:pPr>
+            <a:r>
+              <a:t>SEARCH [⌘K]    SLIDE [06/06]</a:t>
+            </a:r>
+          </a:p>
+        </p:txBody>
+      </p:sp>
+      <p:sp>
+        <p:nvSpPr>
+          <p:cNvPr id="6" name="TextBox 5"/>
+          <p:cNvSpPr txBox="1"/>
+          <p:nvPr/>
+        </p:nvSpPr>
+        <p:spPr>
+          <a:xfrm>
+            <a:off x="594360" y="658368"/>
+            <a:ext cx="10972800" cy="274320"/>
+          </a:xfrm>
+          <a:prstGeom prst="rect">
+            <a:avLst/>
+          </a:prstGeom>
+          <a:noFill/>
+        </p:spPr>
+        <p:txBody>
+          <a:bodyPr wrap="none">
+            <a:spAutoFit/>
+          </a:bodyPr>
+          <a:lstStyle/>
+          <a:p>
+            <a:pPr algn="ctr">
+              <a:defRPr sz="850">
+                <a:solidFill>
+                  <a:srgbClr val="94A3B8"/>
+                </a:solidFill>
+                <a:latin typeface="Consolas"/>
+              </a:defRPr>
+            </a:pPr>
+            <a:r>
+              <a:t>SYS: ONLINE // SECTOR: DSA-ENGINE  |  COORDINATES: 20.2961° N, 85.8245° E  |  AZIMUTH: 125°  |  ■ V1.0</a:t>
+            </a:r>
+          </a:p>
+        </p:txBody>
+      </p:sp>
+      <p:sp>
+        <p:nvSpPr>
+          <p:cNvPr id="7" name="Rectangle 6"/>
+          <p:cNvSpPr/>
+          <p:nvPr/>
+        </p:nvSpPr>
+        <p:spPr>
+          <a:xfrm>
+            <a:off x="594360" y="960120"/>
+            <a:ext cx="11002975" cy="13716"/>
+          </a:xfrm>
+          <a:prstGeom prst="rect">
+            <a:avLst/>
+          </a:prstGeom>
           <a:solidFill>
-            <a:srgbClr val="020A19"/>
+            <a:srgbClr val="264073"/>
           </a:solidFill>
           <a:ln>
             <a:noFill/>
@@ -7281,25 +9267,23 @@
       </p:sp>
       <p:sp>
         <p:nvSpPr>
-          <p:cNvPr id="3" name="Rounded Rectangle 2"/>
+          <p:cNvPr id="8" name="Rectangle 7"/>
           <p:cNvSpPr/>
           <p:nvPr/>
         </p:nvSpPr>
         <p:spPr>
           <a:xfrm>
-            <a:off x="731520" y="384048"/>
-            <a:ext cx="3108960" cy="292608"/>
-          </a:xfrm>
-          <a:prstGeom prst="roundRect">
+            <a:off x="594360" y="6400800"/>
+            <a:ext cx="11002975" cy="13716"/>
+          </a:xfrm>
+          <a:prstGeom prst="rect">
             <a:avLst/>
           </a:prstGeom>
           <a:solidFill>
-            <a:srgbClr val="0B214D"/>
+            <a:srgbClr val="264073"/>
           </a:solidFill>
-          <a:ln w="12700">
-            <a:solidFill>
-              <a:srgbClr val="60A5FA"/>
-            </a:solidFill>
+          <a:ln>
+            <a:noFill/>
           </a:ln>
         </p:spPr>
         <p:style>
@@ -7321,28 +9305,19 @@
           <a:lstStyle/>
           <a:p>
             <a:pPr algn="ctr"/>
-            <a:r>
-              <a:rPr sz="950" b="1">
-                <a:solidFill>
-                  <a:srgbClr val="60A5FA"/>
-                </a:solidFill>
-                <a:latin typeface="Consolas"/>
-              </a:rPr>
-              <a:t>// SUMMARY &amp; IMPACT</a:t>
-            </a:r>
-          </a:p>
-        </p:txBody>
-      </p:sp>
-      <p:sp>
-        <p:nvSpPr>
-          <p:cNvPr id="4" name="TextBox 3"/>
+          </a:p>
+        </p:txBody>
+      </p:sp>
+      <p:sp>
+        <p:nvSpPr>
+          <p:cNvPr id="9" name="TextBox 8"/>
           <p:cNvSpPr txBox="1"/>
           <p:nvPr/>
         </p:nvSpPr>
         <p:spPr>
           <a:xfrm>
-            <a:off x="685800" y="731520"/>
-            <a:ext cx="10789920" cy="731520"/>
+            <a:off x="594360" y="6446520"/>
+            <a:ext cx="4114800" cy="320040"/>
           </a:xfrm>
           <a:prstGeom prst="rect">
             <a:avLst/>
@@ -7350,60 +9325,46 @@
           <a:noFill/>
         </p:spPr>
         <p:txBody>
-          <a:bodyPr wrap="square">
+          <a:bodyPr wrap="none">
             <a:spAutoFit/>
           </a:bodyPr>
           <a:lstStyle/>
           <a:p>
             <a:pPr>
-              <a:defRPr sz="2400" b="1">
-                <a:solidFill>
-                  <a:srgbClr val="D5E0FF"/>
-                </a:solidFill>
-                <a:latin typeface="Trebuchet MS"/>
-              </a:defRPr>
-            </a:pPr>
-            <a:r>
-              <a:t>Key Takeaways &amp; Real-World Results</a:t>
-            </a:r>
-          </a:p>
-          <a:p>
-            <a:pPr>
-              <a:spcBef>
-                <a:spcPts val="300"/>
-              </a:spcBef>
-              <a:defRPr sz="1300">
+              <a:defRPr sz="850">
                 <a:solidFill>
                   <a:srgbClr val="94A3B8"/>
                 </a:solidFill>
-                <a:latin typeface="Calibri"/>
-              </a:defRPr>
-            </a:pPr>
-            <a:r>
-              <a:t>Proving that classical data structures can outperform heavyweight cloud search architectures.</a:t>
-            </a:r>
-          </a:p>
-        </p:txBody>
-      </p:sp>
-      <p:sp>
-        <p:nvSpPr>
-          <p:cNvPr id="5" name="Rectangle 4"/>
+                <a:latin typeface="Consolas"/>
+              </a:defRPr>
+            </a:pPr>
+            <a:r>
+              <a:t>ZOOM 1.0X  500M    ∿ SOUND [ON] // 60 FPS</a:t>
+            </a:r>
+          </a:p>
+        </p:txBody>
+      </p:sp>
+      <p:sp>
+        <p:nvSpPr>
+          <p:cNvPr id="10" name="Snip Diagonal Corner Rectangle 9"/>
           <p:cNvSpPr/>
           <p:nvPr/>
         </p:nvSpPr>
         <p:spPr>
           <a:xfrm>
-            <a:off x="731520" y="1536192"/>
-            <a:ext cx="10728655" cy="13716"/>
-          </a:xfrm>
-          <a:prstGeom prst="rect">
+            <a:off x="4663440" y="6446520"/>
+            <a:ext cx="2834640" cy="256032"/>
+          </a:xfrm>
+          <a:prstGeom prst="snip2DiagRect">
             <a:avLst/>
           </a:prstGeom>
           <a:solidFill>
-            <a:srgbClr val="264D8A"/>
+            <a:srgbClr val="041029"/>
           </a:solidFill>
-          <a:ln>
-            <a:noFill/>
+          <a:ln w="12700">
+            <a:solidFill>
+              <a:srgbClr val="264073"/>
+            </a:solidFill>
           </a:ln>
         </p:spPr>
         <p:style>
@@ -7425,29 +9386,140 @@
           <a:lstStyle/>
           <a:p>
             <a:pPr algn="ctr"/>
-          </a:p>
-        </p:txBody>
-      </p:sp>
-      <p:sp>
-        <p:nvSpPr>
-          <p:cNvPr id="6" name="Rounded Rectangle 5"/>
+            <a:r>
+              <a:rPr sz="800">
+                <a:solidFill>
+                  <a:srgbClr val="D5E0FF"/>
+                </a:solidFill>
+                <a:latin typeface="Consolas"/>
+              </a:rPr>
+              <a:t>◎ RESULTS &amp; BENCHMARKS ◎</a:t>
+            </a:r>
+          </a:p>
+        </p:txBody>
+      </p:sp>
+      <p:sp>
+        <p:nvSpPr>
+          <p:cNvPr id="11" name="TextBox 10"/>
+          <p:cNvSpPr txBox="1"/>
+          <p:nvPr/>
+        </p:nvSpPr>
+        <p:spPr>
+          <a:xfrm>
+            <a:off x="8412480" y="6446520"/>
+            <a:ext cx="3154680" cy="320040"/>
+          </a:xfrm>
+          <a:prstGeom prst="rect">
+            <a:avLst/>
+          </a:prstGeom>
+          <a:noFill/>
+        </p:spPr>
+        <p:txBody>
+          <a:bodyPr wrap="none">
+            <a:spAutoFit/>
+          </a:bodyPr>
+          <a:lstStyle/>
+          <a:p>
+            <a:pPr algn="r">
+              <a:defRPr sz="850" b="1">
+                <a:solidFill>
+                  <a:srgbClr val="8FADFF"/>
+                </a:solidFill>
+                <a:latin typeface="Consolas"/>
+              </a:defRPr>
+            </a:pPr>
+            <a:r>
+              <a:t>FILTERS [00]    ◎ 125° N</a:t>
+            </a:r>
+          </a:p>
+        </p:txBody>
+      </p:sp>
+      <p:sp>
+        <p:nvSpPr>
+          <p:cNvPr id="12" name="TextBox 11"/>
+          <p:cNvSpPr txBox="1"/>
+          <p:nvPr/>
+        </p:nvSpPr>
+        <p:spPr>
+          <a:xfrm>
+            <a:off x="594360" y="1051560"/>
+            <a:ext cx="10972800" cy="777240"/>
+          </a:xfrm>
+          <a:prstGeom prst="rect">
+            <a:avLst/>
+          </a:prstGeom>
+          <a:noFill/>
+        </p:spPr>
+        <p:txBody>
+          <a:bodyPr wrap="square">
+            <a:spAutoFit/>
+          </a:bodyPr>
+          <a:lstStyle/>
+          <a:p>
+            <a:r>
+              <a:rPr sz="950" b="1">
+                <a:solidFill>
+                  <a:srgbClr val="8FADFF"/>
+                </a:solidFill>
+                <a:latin typeface="Consolas"/>
+              </a:rPr>
+              <a:t>// BENCHMARK EVALUATION  </a:t>
+            </a:r>
+          </a:p>
+          <a:p>
+            <a:pPr>
+              <a:spcBef>
+                <a:spcPts val="200"/>
+              </a:spcBef>
+              <a:defRPr sz="2100" b="1">
+                <a:solidFill>
+                  <a:srgbClr val="FFFFFF"/>
+                </a:solidFill>
+                <a:latin typeface="Trebuchet MS"/>
+              </a:defRPr>
+            </a:pPr>
+            <a:r>
+              <a:t>Empirical Results &amp; Academic Insights</a:t>
+            </a:r>
+          </a:p>
+          <a:p>
+            <a:pPr>
+              <a:spcBef>
+                <a:spcPts val="200"/>
+              </a:spcBef>
+              <a:defRPr sz="1150">
+                <a:solidFill>
+                  <a:srgbClr val="94A3B8"/>
+                </a:solidFill>
+                <a:latin typeface="Calibri"/>
+              </a:defRPr>
+            </a:pPr>
+            <a:r>
+              <a:t>Validating performance against Chrome V8 runtime in the production portfolio.</a:t>
+            </a:r>
+          </a:p>
+        </p:txBody>
+      </p:sp>
+      <p:sp>
+        <p:nvSpPr>
+          <p:cNvPr id="13" name="Snip Diagonal Corner Rectangle 12"/>
           <p:cNvSpPr/>
           <p:nvPr/>
         </p:nvSpPr>
         <p:spPr>
           <a:xfrm>
-            <a:off x="731520" y="1828800"/>
-            <a:ext cx="2468880" cy="1920240"/>
-          </a:xfrm>
-          <a:prstGeom prst="roundRect">
+            <a:off x="594360" y="1965960"/>
+            <a:ext cx="2532888" cy="2011680"/>
+          </a:xfrm>
+          <a:prstGeom prst="snip2DiagRect">
             <a:avLst/>
           </a:prstGeom>
           <a:solidFill>
-            <a:srgbClr val="07183A"/>
+            <a:srgbClr val="041029"/>
           </a:solidFill>
           <a:ln w="15240">
             <a:solidFill>
-              <a:srgbClr val="60A5FA"/>
+              <a:srgbClr val="264073"/>
             </a:solidFill>
           </a:ln>
         </p:spPr>
@@ -7475,14 +9547,14 @@
       </p:sp>
       <p:sp>
         <p:nvSpPr>
-          <p:cNvPr id="7" name="TextBox 6"/>
+          <p:cNvPr id="14" name="TextBox 13"/>
           <p:cNvSpPr txBox="1"/>
           <p:nvPr/>
         </p:nvSpPr>
         <p:spPr>
           <a:xfrm>
-            <a:off x="822960" y="1965960"/>
-            <a:ext cx="2286000" cy="1645920"/>
+            <a:off x="685800" y="2057400"/>
+            <a:ext cx="2350008" cy="1737360"/>
           </a:xfrm>
           <a:prstGeom prst="rect">
             <a:avLst/>
@@ -7512,9 +9584,9 @@
               <a:spcBef>
                 <a:spcPts val="200"/>
               </a:spcBef>
-              <a:defRPr sz="1050" b="1">
-                <a:solidFill>
-                  <a:srgbClr val="60A5FA"/>
+              <a:defRPr sz="1000" b="1">
+                <a:solidFill>
+                  <a:srgbClr val="8FADFF"/>
                 </a:solidFill>
                 <a:latin typeface="Consolas"/>
               </a:defRPr>
@@ -7536,31 +9608,31 @@
               </a:defRPr>
             </a:pPr>
             <a:r>
-              <a:t>Instant response time across entire database.</a:t>
-            </a:r>
-          </a:p>
-        </p:txBody>
-      </p:sp>
-      <p:sp>
-        <p:nvSpPr>
-          <p:cNvPr id="8" name="Rounded Rectangle 7"/>
+              <a:t>Instant response time across all platform entities.</a:t>
+            </a:r>
+          </a:p>
+        </p:txBody>
+      </p:sp>
+      <p:sp>
+        <p:nvSpPr>
+          <p:cNvPr id="15" name="Snip Diagonal Corner Rectangle 14"/>
           <p:cNvSpPr/>
           <p:nvPr/>
         </p:nvSpPr>
         <p:spPr>
           <a:xfrm>
-            <a:off x="3474720" y="1828800"/>
-            <a:ext cx="2468880" cy="1920240"/>
-          </a:xfrm>
-          <a:prstGeom prst="roundRect">
+            <a:off x="3415284" y="1965960"/>
+            <a:ext cx="2532888" cy="2011680"/>
+          </a:xfrm>
+          <a:prstGeom prst="snip2DiagRect">
             <a:avLst/>
           </a:prstGeom>
           <a:solidFill>
-            <a:srgbClr val="07183A"/>
+            <a:srgbClr val="041029"/>
           </a:solidFill>
           <a:ln w="15240">
             <a:solidFill>
-              <a:srgbClr val="60A5FA"/>
+              <a:srgbClr val="264073"/>
             </a:solidFill>
           </a:ln>
         </p:spPr>
@@ -7588,14 +9660,14 @@
       </p:sp>
       <p:sp>
         <p:nvSpPr>
-          <p:cNvPr id="9" name="TextBox 8"/>
+          <p:cNvPr id="16" name="TextBox 15"/>
           <p:cNvSpPr txBox="1"/>
           <p:nvPr/>
         </p:nvSpPr>
         <p:spPr>
           <a:xfrm>
-            <a:off x="3566160" y="1965960"/>
-            <a:ext cx="2286000" cy="1645920"/>
+            <a:off x="3506724" y="2057400"/>
+            <a:ext cx="2350008" cy="1737360"/>
           </a:xfrm>
           <a:prstGeom prst="rect">
             <a:avLst/>
@@ -7625,9 +9697,9 @@
               <a:spcBef>
                 <a:spcPts val="200"/>
               </a:spcBef>
-              <a:defRPr sz="1050" b="1">
-                <a:solidFill>
-                  <a:srgbClr val="60A5FA"/>
+              <a:defRPr sz="1000" b="1">
+                <a:solidFill>
+                  <a:srgbClr val="8FADFF"/>
                 </a:solidFill>
                 <a:latin typeface="Consolas"/>
               </a:defRPr>
@@ -7656,24 +9728,24 @@
       </p:sp>
       <p:sp>
         <p:nvSpPr>
-          <p:cNvPr id="10" name="Rounded Rectangle 9"/>
+          <p:cNvPr id="17" name="Snip Diagonal Corner Rectangle 16"/>
           <p:cNvSpPr/>
           <p:nvPr/>
         </p:nvSpPr>
         <p:spPr>
           <a:xfrm>
-            <a:off x="6217920" y="1828800"/>
-            <a:ext cx="2468880" cy="1920240"/>
-          </a:xfrm>
-          <a:prstGeom prst="roundRect">
+            <a:off x="6236208" y="1965960"/>
+            <a:ext cx="2532888" cy="2011680"/>
+          </a:xfrm>
+          <a:prstGeom prst="snip2DiagRect">
             <a:avLst/>
           </a:prstGeom>
           <a:solidFill>
-            <a:srgbClr val="07183A"/>
+            <a:srgbClr val="041029"/>
           </a:solidFill>
           <a:ln w="15240">
             <a:solidFill>
-              <a:srgbClr val="60A5FA"/>
+              <a:srgbClr val="264073"/>
             </a:solidFill>
           </a:ln>
         </p:spPr>
@@ -7701,14 +9773,14 @@
       </p:sp>
       <p:sp>
         <p:nvSpPr>
-          <p:cNvPr id="11" name="TextBox 10"/>
+          <p:cNvPr id="18" name="TextBox 17"/>
           <p:cNvSpPr txBox="1"/>
           <p:nvPr/>
         </p:nvSpPr>
         <p:spPr>
           <a:xfrm>
-            <a:off x="6309359" y="1965960"/>
-            <a:ext cx="2286000" cy="1645920"/>
+            <a:off x="6327648" y="2057400"/>
+            <a:ext cx="2350008" cy="1737360"/>
           </a:xfrm>
           <a:prstGeom prst="rect">
             <a:avLst/>
@@ -7738,9 +9810,9 @@
               <a:spcBef>
                 <a:spcPts val="200"/>
               </a:spcBef>
-              <a:defRPr sz="1050" b="1">
-                <a:solidFill>
-                  <a:srgbClr val="60A5FA"/>
+              <a:defRPr sz="1000" b="1">
+                <a:solidFill>
+                  <a:srgbClr val="8FADFF"/>
                 </a:solidFill>
                 <a:latin typeface="Consolas"/>
               </a:defRPr>
@@ -7762,31 +9834,31 @@
               </a:defRPr>
             </a:pPr>
             <a:r>
-              <a:t>Never fails if internet drops or during demos.</a:t>
-            </a:r>
-          </a:p>
-        </p:txBody>
-      </p:sp>
-      <p:sp>
-        <p:nvSpPr>
-          <p:cNvPr id="12" name="Rounded Rectangle 11"/>
+              <a:t>Never fails if internet drops or during live demos.</a:t>
+            </a:r>
+          </a:p>
+        </p:txBody>
+      </p:sp>
+      <p:sp>
+        <p:nvSpPr>
+          <p:cNvPr id="19" name="Snip Diagonal Corner Rectangle 18"/>
           <p:cNvSpPr/>
           <p:nvPr/>
         </p:nvSpPr>
         <p:spPr>
           <a:xfrm>
-            <a:off x="8961120" y="1828800"/>
-            <a:ext cx="2468880" cy="1920240"/>
-          </a:xfrm>
-          <a:prstGeom prst="roundRect">
+            <a:off x="9057132" y="1965960"/>
+            <a:ext cx="2532888" cy="2011680"/>
+          </a:xfrm>
+          <a:prstGeom prst="snip2DiagRect">
             <a:avLst/>
           </a:prstGeom>
           <a:solidFill>
-            <a:srgbClr val="07183A"/>
+            <a:srgbClr val="041029"/>
           </a:solidFill>
           <a:ln w="15240">
             <a:solidFill>
-              <a:srgbClr val="60A5FA"/>
+              <a:srgbClr val="264073"/>
             </a:solidFill>
           </a:ln>
         </p:spPr>
@@ -7814,14 +9886,14 @@
       </p:sp>
       <p:sp>
         <p:nvSpPr>
-          <p:cNvPr id="13" name="TextBox 12"/>
+          <p:cNvPr id="20" name="TextBox 19"/>
           <p:cNvSpPr txBox="1"/>
           <p:nvPr/>
         </p:nvSpPr>
         <p:spPr>
           <a:xfrm>
-            <a:off x="9052560" y="1965960"/>
-            <a:ext cx="2286000" cy="1645920"/>
+            <a:off x="9148572" y="2057400"/>
+            <a:ext cx="2350008" cy="1737360"/>
           </a:xfrm>
           <a:prstGeom prst="rect">
             <a:avLst/>
@@ -7851,9 +9923,9 @@
               <a:spcBef>
                 <a:spcPts val="200"/>
               </a:spcBef>
-              <a:defRPr sz="1050" b="1">
-                <a:solidFill>
-                  <a:srgbClr val="60A5FA"/>
+              <a:defRPr sz="1000" b="1">
+                <a:solidFill>
+                  <a:srgbClr val="8FADFF"/>
                 </a:solidFill>
                 <a:latin typeface="Consolas"/>
               </a:defRPr>
@@ -7882,24 +9954,24 @@
       </p:sp>
       <p:sp>
         <p:nvSpPr>
-          <p:cNvPr id="14" name="Rounded Rectangle 13"/>
+          <p:cNvPr id="21" name="Snip Diagonal Corner Rectangle 20"/>
           <p:cNvSpPr/>
           <p:nvPr/>
         </p:nvSpPr>
         <p:spPr>
           <a:xfrm>
-            <a:off x="731520" y="4023360"/>
-            <a:ext cx="6217920" cy="2286000"/>
-          </a:xfrm>
-          <a:prstGeom prst="roundRect">
+            <a:off x="594360" y="4160520"/>
+            <a:ext cx="6309360" cy="2103120"/>
+          </a:xfrm>
+          <a:prstGeom prst="snip2DiagRect">
             <a:avLst/>
           </a:prstGeom>
           <a:solidFill>
-            <a:srgbClr val="07183A"/>
+            <a:srgbClr val="041029"/>
           </a:solidFill>
           <a:ln w="15240">
             <a:solidFill>
-              <a:srgbClr val="264D8A"/>
+              <a:srgbClr val="264073"/>
             </a:solidFill>
           </a:ln>
         </p:spPr>
@@ -7927,14 +9999,14 @@
       </p:sp>
       <p:sp>
         <p:nvSpPr>
-          <p:cNvPr id="15" name="TextBox 14"/>
+          <p:cNvPr id="22" name="TextBox 21"/>
           <p:cNvSpPr txBox="1"/>
           <p:nvPr/>
         </p:nvSpPr>
         <p:spPr>
           <a:xfrm>
-            <a:off x="914400" y="4160520"/>
-            <a:ext cx="5852159" cy="457200"/>
+            <a:off x="777240" y="4251960"/>
+            <a:ext cx="5943600" cy="1920240"/>
           </a:xfrm>
           <a:prstGeom prst="rect">
             <a:avLst/>
@@ -7948,46 +10020,23 @@
           <a:lstStyle/>
           <a:p>
             <a:pPr>
-              <a:defRPr sz="1400" b="1">
-                <a:solidFill>
-                  <a:srgbClr val="D5E0FF"/>
-                </a:solidFill>
-                <a:latin typeface="Trebuchet MS"/>
-              </a:defRPr>
-            </a:pPr>
-            <a:r>
-              <a:t>Project Summary</a:t>
-            </a:r>
-          </a:p>
-        </p:txBody>
-      </p:sp>
-      <p:sp>
-        <p:nvSpPr>
-          <p:cNvPr id="16" name="TextBox 15"/>
-          <p:cNvSpPr txBox="1"/>
-          <p:nvPr/>
-        </p:nvSpPr>
-        <p:spPr>
-          <a:xfrm>
-            <a:off x="914400" y="4480560"/>
-            <a:ext cx="5852160" cy="1645920"/>
-          </a:xfrm>
-          <a:prstGeom prst="rect">
-            <a:avLst/>
-          </a:prstGeom>
-          <a:noFill/>
-        </p:spPr>
-        <p:txBody>
-          <a:bodyPr wrap="square">
-            <a:spAutoFit/>
-          </a:bodyPr>
-          <a:lstStyle/>
+              <a:defRPr sz="950" b="1">
+                <a:solidFill>
+                  <a:srgbClr val="8FADFF"/>
+                </a:solidFill>
+                <a:latin typeface="Consolas"/>
+              </a:defRPr>
+            </a:pPr>
+            <a:r>
+              <a:t>[SUMMARY] KEY ACADEMIC TAKEAWAYS</a:t>
+            </a:r>
+          </a:p>
           <a:p>
             <a:pPr>
-              <a:spcAft>
-                <a:spcPts val="600"/>
-              </a:spcAft>
-              <a:defRPr sz="1150">
+              <a:spcBef>
+                <a:spcPts val="500"/>
+              </a:spcBef>
+              <a:defRPr sz="1100">
                 <a:solidFill>
                   <a:srgbClr val="FFFFFF"/>
                 </a:solidFill>
@@ -7995,15 +10044,15 @@
               </a:defRPr>
             </a:pPr>
             <a:r>
-              <a:t>✔ Algorithmic Synergy: Trie provides prefix expansion; Inverted Index handles multi-tag intersections.</a:t>
+              <a:t>✔ Algorithmic Synergy: Trie handles prefix expansion; Inverted Index handles multi-tag intersections.</a:t>
             </a:r>
           </a:p>
           <a:p>
             <a:pPr>
-              <a:spcAft>
-                <a:spcPts val="600"/>
-              </a:spcAft>
-              <a:defRPr sz="1150">
+              <a:spcBef>
+                <a:spcPts val="500"/>
+              </a:spcBef>
+              <a:defRPr sz="1100">
                 <a:solidFill>
                   <a:srgbClr val="FFFFFF"/>
                 </a:solidFill>
@@ -8016,10 +10065,10 @@
           </a:p>
           <a:p>
             <a:pPr>
-              <a:spcAft>
-                <a:spcPts val="600"/>
-              </a:spcAft>
-              <a:defRPr sz="1150">
+              <a:spcBef>
+                <a:spcPts val="500"/>
+              </a:spcBef>
+              <a:defRPr sz="1100">
                 <a:solidFill>
                   <a:srgbClr val="FFFFFF"/>
                 </a:solidFill>
@@ -8034,20 +10083,20 @@
       </p:sp>
       <p:sp>
         <p:nvSpPr>
-          <p:cNvPr id="17" name="Rounded Rectangle 16"/>
+          <p:cNvPr id="23" name="Snip Diagonal Corner Rectangle 22"/>
           <p:cNvSpPr/>
           <p:nvPr/>
         </p:nvSpPr>
         <p:spPr>
           <a:xfrm>
-            <a:off x="7223760" y="4023360"/>
-            <a:ext cx="4236415" cy="2286000"/>
-          </a:xfrm>
-          <a:prstGeom prst="roundRect">
+            <a:off x="7132320" y="4160520"/>
+            <a:ext cx="4465015" cy="2103120"/>
+          </a:xfrm>
+          <a:prstGeom prst="snip2DiagRect">
             <a:avLst/>
           </a:prstGeom>
           <a:solidFill>
-            <a:srgbClr val="0E2D5F"/>
+            <a:srgbClr val="07183C"/>
           </a:solidFill>
           <a:ln w="15240">
             <a:solidFill>
@@ -8079,14 +10128,14 @@
       </p:sp>
       <p:sp>
         <p:nvSpPr>
-          <p:cNvPr id="18" name="TextBox 17"/>
+          <p:cNvPr id="24" name="TextBox 23"/>
           <p:cNvSpPr txBox="1"/>
           <p:nvPr/>
         </p:nvSpPr>
         <p:spPr>
           <a:xfrm>
-            <a:off x="7406640" y="4160520"/>
-            <a:ext cx="3870655" cy="457200"/>
+            <a:off x="7315200" y="4251960"/>
+            <a:ext cx="4114800" cy="1920240"/>
           </a:xfrm>
           <a:prstGeom prst="rect">
             <a:avLst/>
@@ -8100,43 +10149,7 @@
           <a:lstStyle/>
           <a:p>
             <a:pPr>
-              <a:defRPr sz="1400" b="1">
-                <a:solidFill>
-                  <a:srgbClr val="D5E0FF"/>
-                </a:solidFill>
-                <a:latin typeface="Trebuchet MS"/>
-              </a:defRPr>
-            </a:pPr>
-            <a:r>
-              <a:t>Project Access &amp; Q&amp;A</a:t>
-            </a:r>
-          </a:p>
-        </p:txBody>
-      </p:sp>
-      <p:sp>
-        <p:nvSpPr>
-          <p:cNvPr id="19" name="TextBox 18"/>
-          <p:cNvSpPr txBox="1"/>
-          <p:nvPr/>
-        </p:nvSpPr>
-        <p:spPr>
-          <a:xfrm>
-            <a:off x="7406640" y="4434840"/>
-            <a:ext cx="3840480" cy="1737360"/>
-          </a:xfrm>
-          <a:prstGeom prst="rect">
-            <a:avLst/>
-          </a:prstGeom>
-          <a:noFill/>
-        </p:spPr>
-        <p:txBody>
-          <a:bodyPr wrap="square">
-            <a:spAutoFit/>
-          </a:bodyPr>
-          <a:lstStyle/>
-          <a:p>
-            <a:pPr>
-              <a:defRPr sz="1600" b="1">
+              <a:defRPr sz="1500" b="1">
                 <a:solidFill>
                   <a:srgbClr val="34D399"/>
                 </a:solidFill>
@@ -8152,7 +10165,7 @@
               <a:spcBef>
                 <a:spcPts val="600"/>
               </a:spcBef>
-              <a:defRPr sz="1000">
+              <a:defRPr sz="950">
                 <a:solidFill>
                   <a:srgbClr val="D5E0FF"/>
                 </a:solidFill>
@@ -8160,7 +10173,7 @@
               </a:defRPr>
             </a:pPr>
             <a:r>
-              <a:t>• Arbaz Arshad [DEV-01]: arbazarshad.com</a:t>
+              <a:t>• Arbaz Arshad [DEV-01]: arbazarshad.vercel.app</a:t>
             </a:r>
             <a:br/>
             <a:r>
